--- a/docs/PID_POS_Panduan_Admin_Purchase_Approve_PO.pptx
+++ b/docs/PID_POS_Panduan_Admin_Purchase_Approve_PO.pptx
@@ -17,11 +17,9 @@
     <p:sldId id="265" r:id="rId11"/>
     <p:sldId id="266" r:id="rId12"/>
     <p:sldId id="267" r:id="rId13"/>
-    <p:sldId id="268" r:id="rId14"/>
-    <p:sldId id="269" r:id="rId15"/>
   </p:sldIdLst>
   <p:notesMasterIdLst>
-    <p:notesMasterId r:id="rId16"/>
+    <p:notesMasterId r:id="rId14"/>
   </p:notesMasterIdLst>
   <p:sldSz cx="12192000" cy="6858000"/>
   <p:notesSz cx="6858000" cy="12192000"/>
@@ -120,29 +118,29 @@
   <p:extLst>
     <p:ext uri="{521415D9-36F7-43E2-AB2F-B90AF26B5E84}">
       <p14:sectionLst xmlns:p14="http://schemas.microsoft.com/office/powerpoint/2010/main">
-        <p14:section name="Admin purchase" id="{bcea286f-9691-ae82-334e-9ae2c153ea19}">
+        <p14:section name="Admin purchase" id="{ce80675a-b99c-33c3-b9c3-1ba33c050410}">
           <p14:sldIdLst>
+            <p14:sldId id="259"/>
+            <p14:sldId id="260"/>
             <p14:sldId id="261"/>
             <p14:sldId id="262"/>
+          </p14:sldIdLst>
+        </p14:section>
+        <p14:section name="Approve PO" id="{accbaff2-0a82-13fa-2bd7-4dd465bd8df3}">
+          <p14:sldIdLst>
             <p14:sldId id="263"/>
             <p14:sldId id="264"/>
           </p14:sldIdLst>
         </p14:section>
-        <p14:section name="Approve PO" id="{7d356fc4-c0f2-6394-bcc6-63dfad646ebc}">
+        <p14:section name="Referensi" id="{78805a83-32ae-e752-d355-e616ae851680}">
           <p14:sldIdLst>
             <p14:sldId id="265"/>
             <p14:sldId id="266"/>
           </p14:sldIdLst>
         </p14:section>
-        <p14:section name="Referensi" id="{4f6c5b3d-830f-66aa-c656-6b27be9d2654}">
+        <p14:section name="Default-1" id="{a4508879-e4d7-2b05-3d9f-03c453a3e255}">
           <p14:sldIdLst>
             <p14:sldId id="267"/>
-            <p14:sldId id="268"/>
-          </p14:sldIdLst>
-        </p14:section>
-        <p14:section name="Default-1" id="{6cd53861-ef2f-2104-f8ff-f2fb7752ded5}">
-          <p14:sldIdLst>
-            <p14:sldId id="269"/>
           </p14:sldIdLst>
         </p14:section>
       </p14:sectionLst>
@@ -549,7 +547,7 @@
           <a:p>
             <a:r>
               <a:rPr lang="en-US" dirty="0"/>
-              <a:t>Panduan ini untuk dua peran di web PID POS, menu Permintaan DC: admin purchase yang membuat Purchase Order (PO) per vendor dari sisa Purchase Request (PUR), dan Approve PO yang menyetujuinya level demi level sampai PO final di SAP. Penerimaan barang (GRPO) dibahas di panduan terpisah.</a:t>
+              <a:t>Panduan ini untuk dua peran di web PID POS, menu Permintaan DC: admin purchase yang membuat Purchase Order (PO) per vendor dari sisa Purchase Request (PUR), dan Approve PO yang menyetujuinya level demi level sampai PO final di SAP.</a:t>
             </a:r>
             <a:endParaRPr lang="en-US" dirty="0"/>
           </a:p>
@@ -637,7 +635,7 @@
           <a:p>
             <a:r>
               <a:rPr lang="en-US" dirty="0"/>
-              <a:t>Penyetuju membuka tab Giliran saya; permintaan berstatus Approval PO · Draft SAP sedang menunggu. Buka permintaannya, cari kartu PO yang menunggu approval di level Anda, lalu klik Lihat dan periksa vendor, harga, pajak, qty, dek, dan catatan pengiriman.</a:t>
+              <a:t>Pesan galat yang paling sering muncul beserta penyebab dan cara mengatasinya.</a:t>
             </a:r>
             <a:endParaRPr lang="en-US" dirty="0"/>
           </a:p>
@@ -725,7 +723,7 @@
           <a:p>
             <a:r>
               <a:rPr lang="en-US" dirty="0"/>
-              <a:t>Klik Setujui untuk menaikkan PO ke level berikutnya. Di level terakhir, Draft SAP yang sama menjadi PO final dan nomor PO tampil di web. Untuk menolak, isi catatan alasannya lalu klik Tolak; Draft SAP dihapus dan admin purchase bisa mengubah lalu mengajukan ulang. Bila pembuatan PO di SAP gagal, klik Setujui lagi setelah penyebabnya diatasi.</a:t>
+              <a:t>Pertanyaan yang sering muncul dari admin purchase dan penyetuju PO.</a:t>
             </a:r>
             <a:endParaRPr lang="en-US" dirty="0"/>
           </a:p>
@@ -813,7 +811,7 @@
           <a:p>
             <a:r>
               <a:rPr lang="en-US" dirty="0"/>
-              <a:t>Pesan galat yang paling sering muncul beserta penyebab dan cara mengatasinya.</a:t>
+              <a:t>Terima kasih. Untuk belajar ulang, gunakan video tutorial Admin Purchase &amp; Approve PO.</a:t>
             </a:r>
             <a:endParaRPr lang="en-US" dirty="0"/>
           </a:p>
@@ -837,182 +835,6 @@
             <a:fld id="{F7021451-1387-4CA6-816F-3879F97B5CBC}" type="slidenum">
               <a:rPr lang="en-US"/>
               <a:t>12</a:t>
-            </a:fld>
-            <a:endParaRPr lang="en-US"/>
-          </a:p>
-        </p:txBody>
-      </p:sp>
-    </p:spTree>
-    <p:extLst>
-      <p:ext uri="{BB962C8B-B14F-4D97-AF65-F5344CB8AC3E}">
-        <p14:creationId xmlns:p14="http://schemas.microsoft.com/office/powerpoint/2010/main" val="1024086991"/>
-      </p:ext>
-    </p:extLst>
-  </p:cSld>
-  <p:clrMapOvr>
-    <a:masterClrMapping/>
-  </p:clrMapOvr>
-</p:notes>
-</file>
-
-<file path=ppt/notesSlides/notesSlide13.xml><?xml version="1.0" encoding="utf-8"?>
-<p:notes xmlns:a="http://schemas.openxmlformats.org/drawingml/2006/main" xmlns:r="http://schemas.openxmlformats.org/officeDocument/2006/relationships" xmlns:p="http://schemas.openxmlformats.org/presentationml/2006/main">
-  <p:cSld>
-    <p:spTree>
-      <p:nvGrpSpPr>
-        <p:cNvPr id="1" name=""/>
-        <p:cNvGrpSpPr/>
-        <p:nvPr/>
-      </p:nvGrpSpPr>
-      <p:grpSpPr>
-        <a:xfrm>
-          <a:off x="0" y="0"/>
-          <a:ext cx="0" cy="0"/>
-          <a:chOff x="0" y="0"/>
-          <a:chExt cx="0" cy="0"/>
-        </a:xfrm>
-      </p:grpSpPr>
-      <p:sp>
-        <p:nvSpPr>
-          <p:cNvPr id="2" name="Slide Image Placeholder 1"/>
-          <p:cNvSpPr>
-            <a:spLocks noGrp="1" noRot="1" noChangeAspect="1"/>
-          </p:cNvSpPr>
-          <p:nvPr>
-            <p:ph type="sldImg"/>
-          </p:nvPr>
-        </p:nvSpPr>
-        <p:spPr/>
-      </p:sp>
-      <p:sp>
-        <p:nvSpPr>
-          <p:cNvPr id="3" name="Notes Placeholder 2"/>
-          <p:cNvSpPr>
-            <a:spLocks noGrp="1"/>
-          </p:cNvSpPr>
-          <p:nvPr>
-            <p:ph type="body" idx="1"/>
-          </p:nvPr>
-        </p:nvSpPr>
-        <p:spPr/>
-        <p:txBody>
-          <a:bodyPr/>
-          <a:lstStyle/>
-          <a:p>
-            <a:r>
-              <a:rPr lang="en-US" dirty="0"/>
-              <a:t>Pertanyaan yang sering muncul dari admin purchase dan penyetuju PO.</a:t>
-            </a:r>
-            <a:endParaRPr lang="en-US" dirty="0"/>
-          </a:p>
-        </p:txBody>
-      </p:sp>
-      <p:sp>
-        <p:nvSpPr>
-          <p:cNvPr id="4" name="Slide Number Placeholder 3"/>
-          <p:cNvSpPr>
-            <a:spLocks noGrp="1"/>
-          </p:cNvSpPr>
-          <p:nvPr>
-            <p:ph type="sldNum" sz="quarter" idx="10"/>
-          </p:nvPr>
-        </p:nvSpPr>
-        <p:spPr/>
-        <p:txBody>
-          <a:bodyPr/>
-          <a:lstStyle/>
-          <a:p>
-            <a:fld id="{F7021451-1387-4CA6-816F-3879F97B5CBC}" type="slidenum">
-              <a:rPr lang="en-US"/>
-              <a:t>13</a:t>
-            </a:fld>
-            <a:endParaRPr lang="en-US"/>
-          </a:p>
-        </p:txBody>
-      </p:sp>
-    </p:spTree>
-    <p:extLst>
-      <p:ext uri="{BB962C8B-B14F-4D97-AF65-F5344CB8AC3E}">
-        <p14:creationId xmlns:p14="http://schemas.microsoft.com/office/powerpoint/2010/main" val="1024086991"/>
-      </p:ext>
-    </p:extLst>
-  </p:cSld>
-  <p:clrMapOvr>
-    <a:masterClrMapping/>
-  </p:clrMapOvr>
-</p:notes>
-</file>
-
-<file path=ppt/notesSlides/notesSlide14.xml><?xml version="1.0" encoding="utf-8"?>
-<p:notes xmlns:a="http://schemas.openxmlformats.org/drawingml/2006/main" xmlns:r="http://schemas.openxmlformats.org/officeDocument/2006/relationships" xmlns:p="http://schemas.openxmlformats.org/presentationml/2006/main">
-  <p:cSld>
-    <p:spTree>
-      <p:nvGrpSpPr>
-        <p:cNvPr id="1" name=""/>
-        <p:cNvGrpSpPr/>
-        <p:nvPr/>
-      </p:nvGrpSpPr>
-      <p:grpSpPr>
-        <a:xfrm>
-          <a:off x="0" y="0"/>
-          <a:ext cx="0" cy="0"/>
-          <a:chOff x="0" y="0"/>
-          <a:chExt cx="0" cy="0"/>
-        </a:xfrm>
-      </p:grpSpPr>
-      <p:sp>
-        <p:nvSpPr>
-          <p:cNvPr id="2" name="Slide Image Placeholder 1"/>
-          <p:cNvSpPr>
-            <a:spLocks noGrp="1" noRot="1" noChangeAspect="1"/>
-          </p:cNvSpPr>
-          <p:nvPr>
-            <p:ph type="sldImg"/>
-          </p:nvPr>
-        </p:nvSpPr>
-        <p:spPr/>
-      </p:sp>
-      <p:sp>
-        <p:nvSpPr>
-          <p:cNvPr id="3" name="Notes Placeholder 2"/>
-          <p:cNvSpPr>
-            <a:spLocks noGrp="1"/>
-          </p:cNvSpPr>
-          <p:nvPr>
-            <p:ph type="body" idx="1"/>
-          </p:nvPr>
-        </p:nvSpPr>
-        <p:spPr/>
-        <p:txBody>
-          <a:bodyPr/>
-          <a:lstStyle/>
-          <a:p>
-            <a:r>
-              <a:rPr lang="en-US" dirty="0"/>
-              <a:t>Terima kasih. Untuk belajar ulang, gunakan video tutorial dan manual book Admin Purchase &amp; Approve PO.</a:t>
-            </a:r>
-            <a:endParaRPr lang="en-US" dirty="0"/>
-          </a:p>
-        </p:txBody>
-      </p:sp>
-      <p:sp>
-        <p:nvSpPr>
-          <p:cNvPr id="4" name="Slide Number Placeholder 3"/>
-          <p:cNvSpPr>
-            <a:spLocks noGrp="1"/>
-          </p:cNvSpPr>
-          <p:nvPr>
-            <p:ph type="sldNum" sz="quarter" idx="10"/>
-          </p:nvPr>
-        </p:nvSpPr>
-        <p:spPr/>
-        <p:txBody>
-          <a:bodyPr/>
-          <a:lstStyle/>
-          <a:p>
-            <a:fld id="{F7021451-1387-4CA6-816F-3879F97B5CBC}" type="slidenum">
-              <a:rPr lang="en-US"/>
-              <a:t>14</a:t>
             </a:fld>
             <a:endParaRPr lang="en-US"/>
           </a:p>
@@ -1165,7 +987,7 @@
           <a:p>
             <a:r>
               <a:rPr lang="en-US" dirty="0"/>
-              <a:t>Admin purchase membuat PO, bisa disimpan sebagai draft di web dulu (qty sudah dicadangkan), lalu diajukan sehingga masuk SAP sebagai Draft dan menunggu approval level 1 sampai level terakhir. Hanya persetujuan level terakhir yang membuat PO final. PO ditolak kembali ke admin purchase untuk diubah dan diajukan ulang; PO yang dibatalkan mengembalikan qty ke sisa PUR. PO final lanjut ke penerimaan barang (GRPO).</a:t>
+              <a:t>Admin purchase membuat PO, bisa disimpan sebagai draft di web dulu (qty sudah dicadangkan), lalu diajukan sehingga masuk SAP sebagai Draft dan menunggu approval level 1 sampai level terakhir. Hanya persetujuan level terakhir yang membuat PO final. PO ditolak kembali ke admin purchase untuk diubah dan diajukan ulang; PO yang dibatalkan mengembalikan qty ke sisa PUR. PO final tidak bisa diubah atau dibatalkan dari web.</a:t>
             </a:r>
             <a:endParaRPr lang="en-US" dirty="0"/>
           </a:p>
@@ -1253,7 +1075,7 @@
           <a:p>
             <a:r>
               <a:rPr lang="en-US" dirty="0"/>
-              <a:t>Sebelum mulai, admin menentukan siapa admin purchase dan penyetuju PO di Permintaan DC, tombol Level approval. Di tab Admin purchase, centang akun yang boleh membuat PO. Di tab Approval PO, buat satu baris per level dan centang penyetujunya; level tanpa akun dicentang berarti semua admin boleh menyetujui level itu. Klik Simpan level; perubahan juga berlaku untuk PO yang sedang menunggu.</a:t>
+              <a:t>Buka Permintaan DC, tab PO atau Giliran saya, lalu klik permintaan berstatus Buat PO atau PO ditolak. Panel Purchase Order langsung tampil: ringkasan qty PUR, yang sudah di-PO, dan sisanya; kartu PO per vendor; dan tombol + Buat PO. Tabel permintaan bisa dibuka lewat tombol Detail permintaan.</a:t>
             </a:r>
             <a:endParaRPr lang="en-US" dirty="0"/>
           </a:p>
@@ -1341,7 +1163,7 @@
           <a:p>
             <a:r>
               <a:rPr lang="en-US" dirty="0"/>
-              <a:t>Aturan pajak pembelian ada di Pengaturan, tab Templat SAP. Pilih sumber pajak bawaan dan, bila perlu, aturan ganti kode pajak, misalnya VAT I-B ke VAT I-E. Aturan hanya mengisi bawaan kolom pajak. Catatan: approval PO aktif secara bawaan (sakelar dc.po_approval_required); bila dimatikan, PO langsung final di SAP saat diajukan. Sakelar ini belum ada di halaman Pengaturan dan diubah oleh tim IT.</a:t>
+              <a:t>Klik + Buat PO; form selalu mulai kosong. Pilih vendor dari daftar SAP, satu PO untuk satu vendor. Isi barang dengan Salin dari PUR (semua barang yang masih bersisa, qty sama dengan sisa), Cari barang PUR untuk menambah satu per satu, atau Tempel dari Excel. Gunakan filter dek bila PO ingin dibuat per dek.</a:t>
             </a:r>
             <a:endParaRPr lang="en-US" dirty="0"/>
           </a:p>
@@ -1429,7 +1251,7 @@
           <a:p>
             <a:r>
               <a:rPr lang="en-US" dirty="0"/>
-              <a:t>Buka Permintaan DC, tab PO atau Giliran saya, lalu klik permintaan berstatus Buat PO atau PO ditolak. Panel Purchase Order langsung tampil: ringkasan qty PUR, yang sudah di-PO, dan sisanya; kartu PO per vendor; dan tombol + Buat PO. Tabel permintaan bisa dibuka lewat tombol Detail permintaan.</a:t>
+              <a:t>Periksa setiap baris: qty tidak boleh melebihi sisa, harga beli terisi dari PO final terakhir vendor itu dan bisa diubah, pajak bisa diubah per baris. Tambahkan catatan bila perlu dan periksa total di kiri bawah. Simpan draft hanya menyimpan di web dan mencadangkan qty; Ajukan approval mengirim PO ke SAP sebagai Draft dan menunggu Approve PO level 1.</a:t>
             </a:r>
             <a:endParaRPr lang="en-US" dirty="0"/>
           </a:p>
@@ -1517,7 +1339,7 @@
           <a:p>
             <a:r>
               <a:rPr lang="en-US" dirty="0"/>
-              <a:t>Klik + Buat PO; form selalu mulai kosong. Pilih vendor dari daftar SAP, satu PO untuk satu vendor. Isi barang dengan Salin dari PUR (semua barang yang masih bersisa, qty sama dengan sisa), Cari barang PUR untuk menambah satu per satu, atau Tempel dari Excel. Gunakan filter dek bila PO ingin dibuat per dek.</a:t>
+              <a:t>Selama belum final, admin purchase yang mengelola PO. Mengubah PO yang menunggu approval membuat approval mulai lagi dari level 1. PO ditolak menampilkan alasan merah dan diperbaiki lewat Ubah &amp; ajukan ulang. PO final tidak bisa diubah atau dibatalkan dari web. Satu PUR boleh dipecah ke beberapa vendor.</a:t>
             </a:r>
             <a:endParaRPr lang="en-US" dirty="0"/>
           </a:p>
@@ -1605,7 +1427,7 @@
           <a:p>
             <a:r>
               <a:rPr lang="en-US" dirty="0"/>
-              <a:t>Periksa setiap baris: qty tidak boleh melebihi sisa, harga beli terisi dari PO final terakhir vendor itu dan bisa diubah, pajak bisa diubah per baris. Tambahkan catatan bila perlu dan periksa total di kiri bawah. Simpan draft hanya menyimpan di web dan mencadangkan qty; Ajukan approval mengirim PO ke SAP sebagai Draft dan menunggu Approve PO level 1.</a:t>
+              <a:t>Penyetuju membuka tab Giliran saya; permintaan berstatus Approval PO · Draft SAP sedang menunggu. Buka permintaannya, cari kartu PO yang menunggu approval di level Anda, lalu klik Lihat dan periksa vendor, harga, pajak, qty, dek, dan catatan pengiriman.</a:t>
             </a:r>
             <a:endParaRPr lang="en-US" dirty="0"/>
           </a:p>
@@ -1693,7 +1515,7 @@
           <a:p>
             <a:r>
               <a:rPr lang="en-US" dirty="0"/>
-              <a:t>Selama belum final, admin purchase yang mengelola PO. Mengubah PO yang menunggu approval membuat approval mulai lagi dari level 1. PO ditolak menampilkan alasan merah dan diperbaiki lewat Ubah &amp; ajukan ulang. PO final tidak bisa diubah atau dibatalkan dari web. Satu PUR boleh dipecah ke beberapa vendor.</a:t>
+              <a:t>Klik Setujui untuk menaikkan PO ke level berikutnya. Di level terakhir, Draft SAP yang sama menjadi PO final dan nomor PO tampil di web. Untuk menolak, isi catatan alasannya lalu klik Tolak; Draft SAP dihapus dan admin purchase bisa mengubah lalu mengajukan ulang. Bila pembuatan PO di SAP gagal, klik Setujui lagi setelah penyebabnya diatasi.</a:t>
             </a:r>
             <a:endParaRPr lang="en-US" dirty="0"/>
           </a:p>
@@ -2497,2296 +2319,6 @@
                   <a:schemeClr val="tx2"/>
                 </a:solidFill>
               </a:rPr>
-              <a:t>Approve PO · Temukan, periksa, putuskan</a:t>
-            </a:r>
-            <a:endParaRPr lang="en-US" sz="2800" dirty="0"/>
-          </a:p>
-        </p:txBody>
-      </p:sp>
-      <p:sp>
-        <p:nvSpPr>
-          <p:cNvPr id="3" name="PO menunggu approval bingkai"/>
-          <p:cNvSpPr/>
-          <p:nvPr/>
-        </p:nvSpPr>
-        <p:spPr>
-          <a:xfrm>
-            <a:off x="621792" y="1678432"/>
-            <a:ext cx="5248656" cy="3684016"/>
-          </a:xfrm>
-          <a:prstGeom prst="roundRect">
-            <a:avLst>
-              <a:gd name="adj" fmla="val 2482"/>
-            </a:avLst>
-          </a:prstGeom>
-          <a:solidFill>
-            <a:srgbClr val="E4EAF4"/>
-          </a:solidFill>
-          <a:ln w="9525">
-            <a:solidFill>
-              <a:srgbClr val="E4EAF4"/>
-            </a:solidFill>
-            <a:prstDash val="solid"/>
-          </a:ln>
-          <a:effectLst>
-            <a:outerShdw sx="100000" sy="100000" kx="0" ky="0" algn="bl" rotWithShape="0" blurRad="101600" dist="25400" dir="5400000">
-              <a:srgbClr val="274289">
-                <a:alpha val="12000"/>
-              </a:srgbClr>
-            </a:outerShdw>
-          </a:effectLst>
-        </p:spPr>
-      </p:sp>
-      <p:pic>
-        <p:nvPicPr>
-          <p:cNvPr id="4" name="PO menunggu approval" descr="Layar PID POS: PO menunggu approval">    </p:cNvPr>
-          <p:cNvPicPr>
-            <a:picLocks noChangeAspect="1"/>
-          </p:cNvPicPr>
-          <p:nvPr/>
-        </p:nvPicPr>
-        <p:blipFill>
-          <a:blip r:embed="rId1"/>
-          <a:stretch>
-            <a:fillRect/>
-          </a:stretch>
-        </p:blipFill>
-        <p:spPr>
-          <a:xfrm>
-            <a:off x="685800" y="1742440"/>
-            <a:ext cx="5120640" cy="3556000"/>
-          </a:xfrm>
-          <a:prstGeom prst="rect">
-            <a:avLst/>
-          </a:prstGeom>
-        </p:spPr>
-      </p:pic>
-      <p:sp>
-        <p:nvSpPr>
-          <p:cNvPr id="5" name="Sorotan PO menunggu approval 1"/>
-          <p:cNvSpPr/>
-          <p:nvPr/>
-        </p:nvSpPr>
-        <p:spPr>
-          <a:xfrm>
-            <a:off x="734229" y="2238925"/>
-            <a:ext cx="581152" cy="197104"/>
-          </a:xfrm>
-          <a:prstGeom prst="roundRect">
-            <a:avLst>
-              <a:gd name="adj" fmla="val 23196"/>
-            </a:avLst>
-          </a:prstGeom>
-          <a:ln w="28575">
-            <a:solidFill>
-              <a:srgbClr val="F2762E"/>
-            </a:solidFill>
-            <a:prstDash val="solid"/>
-          </a:ln>
-        </p:spPr>
-      </p:sp>
-      <p:sp>
-        <p:nvSpPr>
-          <p:cNvPr id="6" name="Nomor 1"/>
-          <p:cNvSpPr/>
-          <p:nvPr/>
-        </p:nvSpPr>
-        <p:spPr>
-          <a:xfrm>
-            <a:off x="606213" y="2110909"/>
-            <a:ext cx="292608" cy="292608"/>
-          </a:xfrm>
-          <a:prstGeom prst="ellipse">
-            <a:avLst/>
-          </a:prstGeom>
-          <a:solidFill>
-            <a:srgbClr val="F2762E"/>
-          </a:solidFill>
-          <a:ln w="19050">
-            <a:solidFill>
-              <a:srgbClr val="FFFFFF"/>
-            </a:solidFill>
-            <a:prstDash val="solid"/>
-          </a:ln>
-        </p:spPr>
-      </p:sp>
-      <p:sp>
-        <p:nvSpPr>
-          <p:cNvPr id="7" name="Text 4"/>
-          <p:cNvSpPr txBox="1"/>
-          <p:nvPr/>
-        </p:nvSpPr>
-        <p:spPr>
-          <a:xfrm>
-            <a:off x="606213" y="2110909"/>
-            <a:ext cx="292608" cy="292608"/>
-          </a:xfrm>
-          <a:prstGeom prst="rect">
-            <a:avLst/>
-          </a:prstGeom>
-          <a:noFill/>
-          <a:ln/>
-        </p:spPr>
-        <p:txBody>
-          <a:bodyPr wrap="square" lIns="0" tIns="0" rIns="0" bIns="0" rtlCol="0" anchor="ctr"/>
-          <a:lstStyle/>
-          <a:p>
-            <a:pPr algn="ctr" indent="0" marL="0">
-              <a:buNone/>
-            </a:pPr>
-            <a:r>
-              <a:rPr lang="en-US" sz="1100" b="1" dirty="0">
-                <a:solidFill>
-                  <a:srgbClr val="FFFFFF"/>
-                </a:solidFill>
-              </a:rPr>
-              <a:t>1</a:t>
-            </a:r>
-            <a:endParaRPr lang="en-US" sz="1100" dirty="0"/>
-          </a:p>
-        </p:txBody>
-      </p:sp>
-      <p:sp>
-        <p:nvSpPr>
-          <p:cNvPr id="8" name="Sorotan PO menunggu approval 2"/>
-          <p:cNvSpPr/>
-          <p:nvPr/>
-        </p:nvSpPr>
-        <p:spPr>
-          <a:xfrm>
-            <a:off x="734229" y="2988056"/>
-            <a:ext cx="1439333" cy="408093"/>
-          </a:xfrm>
-          <a:prstGeom prst="roundRect">
-            <a:avLst>
-              <a:gd name="adj" fmla="val 11203"/>
-            </a:avLst>
-          </a:prstGeom>
-          <a:ln w="28575">
-            <a:solidFill>
-              <a:srgbClr val="F2762E"/>
-            </a:solidFill>
-            <a:prstDash val="solid"/>
-          </a:ln>
-        </p:spPr>
-      </p:sp>
-      <p:sp>
-        <p:nvSpPr>
-          <p:cNvPr id="9" name="Nomor 2"/>
-          <p:cNvSpPr/>
-          <p:nvPr/>
-        </p:nvSpPr>
-        <p:spPr>
-          <a:xfrm>
-            <a:off x="606213" y="2860040"/>
-            <a:ext cx="292608" cy="292608"/>
-          </a:xfrm>
-          <a:prstGeom prst="ellipse">
-            <a:avLst/>
-          </a:prstGeom>
-          <a:solidFill>
-            <a:srgbClr val="F2762E"/>
-          </a:solidFill>
-          <a:ln w="19050">
-            <a:solidFill>
-              <a:srgbClr val="FFFFFF"/>
-            </a:solidFill>
-            <a:prstDash val="solid"/>
-          </a:ln>
-        </p:spPr>
-      </p:sp>
-      <p:sp>
-        <p:nvSpPr>
-          <p:cNvPr id="10" name="Text 7"/>
-          <p:cNvSpPr txBox="1"/>
-          <p:nvPr/>
-        </p:nvSpPr>
-        <p:spPr>
-          <a:xfrm>
-            <a:off x="606213" y="2860040"/>
-            <a:ext cx="292608" cy="292608"/>
-          </a:xfrm>
-          <a:prstGeom prst="rect">
-            <a:avLst/>
-          </a:prstGeom>
-          <a:noFill/>
-          <a:ln/>
-        </p:spPr>
-        <p:txBody>
-          <a:bodyPr wrap="square" lIns="0" tIns="0" rIns="0" bIns="0" rtlCol="0" anchor="ctr"/>
-          <a:lstStyle/>
-          <a:p>
-            <a:pPr algn="ctr" indent="0" marL="0">
-              <a:buNone/>
-            </a:pPr>
-            <a:r>
-              <a:rPr lang="en-US" sz="1100" b="1" dirty="0">
-                <a:solidFill>
-                  <a:srgbClr val="FFFFFF"/>
-                </a:solidFill>
-              </a:rPr>
-              <a:t>2</a:t>
-            </a:r>
-            <a:endParaRPr lang="en-US" sz="1100" dirty="0"/>
-          </a:p>
-        </p:txBody>
-      </p:sp>
-      <p:sp>
-        <p:nvSpPr>
-          <p:cNvPr id="11" name="Sorotan PO menunggu approval 3"/>
-          <p:cNvSpPr/>
-          <p:nvPr/>
-        </p:nvSpPr>
-        <p:spPr>
-          <a:xfrm>
-            <a:off x="2315464" y="4761315"/>
-            <a:ext cx="3302677" cy="564557"/>
-          </a:xfrm>
-          <a:prstGeom prst="roundRect">
-            <a:avLst>
-              <a:gd name="adj" fmla="val 8098"/>
-            </a:avLst>
-          </a:prstGeom>
-          <a:ln w="28575">
-            <a:solidFill>
-              <a:srgbClr val="F2762E"/>
-            </a:solidFill>
-            <a:prstDash val="solid"/>
-          </a:ln>
-        </p:spPr>
-      </p:sp>
-      <p:sp>
-        <p:nvSpPr>
-          <p:cNvPr id="12" name="Nomor 3"/>
-          <p:cNvSpPr/>
-          <p:nvPr/>
-        </p:nvSpPr>
-        <p:spPr>
-          <a:xfrm>
-            <a:off x="2187448" y="4633299"/>
-            <a:ext cx="292608" cy="292608"/>
-          </a:xfrm>
-          <a:prstGeom prst="ellipse">
-            <a:avLst/>
-          </a:prstGeom>
-          <a:solidFill>
-            <a:srgbClr val="F2762E"/>
-          </a:solidFill>
-          <a:ln w="19050">
-            <a:solidFill>
-              <a:srgbClr val="FFFFFF"/>
-            </a:solidFill>
-            <a:prstDash val="solid"/>
-          </a:ln>
-        </p:spPr>
-      </p:sp>
-      <p:sp>
-        <p:nvSpPr>
-          <p:cNvPr id="13" name="Text 10"/>
-          <p:cNvSpPr txBox="1"/>
-          <p:nvPr/>
-        </p:nvSpPr>
-        <p:spPr>
-          <a:xfrm>
-            <a:off x="2187448" y="4633299"/>
-            <a:ext cx="292608" cy="292608"/>
-          </a:xfrm>
-          <a:prstGeom prst="rect">
-            <a:avLst/>
-          </a:prstGeom>
-          <a:noFill/>
-          <a:ln/>
-        </p:spPr>
-        <p:txBody>
-          <a:bodyPr wrap="square" lIns="0" tIns="0" rIns="0" bIns="0" rtlCol="0" anchor="ctr"/>
-          <a:lstStyle/>
-          <a:p>
-            <a:pPr algn="ctr" indent="0" marL="0">
-              <a:buNone/>
-            </a:pPr>
-            <a:r>
-              <a:rPr lang="en-US" sz="1100" b="1" dirty="0">
-                <a:solidFill>
-                  <a:srgbClr val="FFFFFF"/>
-                </a:solidFill>
-              </a:rPr>
-              <a:t>3</a:t>
-            </a:r>
-            <a:endParaRPr lang="en-US" sz="1100" dirty="0"/>
-          </a:p>
-        </p:txBody>
-      </p:sp>
-      <p:sp>
-        <p:nvSpPr>
-          <p:cNvPr id="14" name="Langkah 1"/>
-          <p:cNvSpPr/>
-          <p:nvPr/>
-        </p:nvSpPr>
-        <p:spPr>
-          <a:xfrm>
-            <a:off x="6126480" y="1783080"/>
-            <a:ext cx="329184" cy="329184"/>
-          </a:xfrm>
-          <a:prstGeom prst="ellipse">
-            <a:avLst/>
-          </a:prstGeom>
-          <a:solidFill>
-            <a:srgbClr val="274289"/>
-          </a:solidFill>
-          <a:ln w="12700">
-            <a:solidFill>
-              <a:srgbClr val="274289"/>
-            </a:solidFill>
-            <a:prstDash val="solid"/>
-          </a:ln>
-        </p:spPr>
-      </p:sp>
-      <p:sp>
-        <p:nvSpPr>
-          <p:cNvPr id="15" name="Text 12"/>
-          <p:cNvSpPr txBox="1"/>
-          <p:nvPr/>
-        </p:nvSpPr>
-        <p:spPr>
-          <a:xfrm>
-            <a:off x="6126480" y="1783080"/>
-            <a:ext cx="329184" cy="329184"/>
-          </a:xfrm>
-          <a:prstGeom prst="rect">
-            <a:avLst/>
-          </a:prstGeom>
-          <a:noFill/>
-          <a:ln/>
-        </p:spPr>
-        <p:txBody>
-          <a:bodyPr wrap="square" lIns="0" tIns="0" rIns="0" bIns="0" rtlCol="0" anchor="ctr"/>
-          <a:lstStyle/>
-          <a:p>
-            <a:pPr algn="ctr" indent="0" marL="0">
-              <a:buNone/>
-            </a:pPr>
-            <a:r>
-              <a:rPr lang="en-US" sz="1200" b="1" dirty="0">
-                <a:solidFill>
-                  <a:srgbClr val="FFFFFF"/>
-                </a:solidFill>
-              </a:rPr>
-              <a:t>1</a:t>
-            </a:r>
-            <a:endParaRPr lang="en-US" sz="1200" dirty="0"/>
-          </a:p>
-        </p:txBody>
-      </p:sp>
-      <p:sp>
-        <p:nvSpPr>
-          <p:cNvPr id="16" name="Text 13"/>
-          <p:cNvSpPr txBox="1"/>
-          <p:nvPr/>
-        </p:nvSpPr>
-        <p:spPr>
-          <a:xfrm>
-            <a:off x="6583680" y="1764792"/>
-            <a:ext cx="4937760" cy="566928"/>
-          </a:xfrm>
-          <a:prstGeom prst="rect">
-            <a:avLst/>
-          </a:prstGeom>
-          <a:noFill/>
-          <a:ln/>
-        </p:spPr>
-        <p:txBody>
-          <a:bodyPr wrap="square" lIns="0" tIns="0" rIns="0" bIns="0" rtlCol="0" anchor="t"/>
-          <a:lstStyle/>
-          <a:p>
-            <a:pPr indent="0" marL="0">
-              <a:buNone/>
-            </a:pPr>
-            <a:r>
-              <a:rPr lang="en-US" sz="1300" b="1" dirty="0">
-                <a:solidFill>
-                  <a:srgbClr val="274289"/>
-                </a:solidFill>
-              </a:rPr>
-              <a:t>Tab Giliran saya</a:t>
-            </a:r>
-            <a:endParaRPr lang="en-US" sz="1300" dirty="0"/>
-          </a:p>
-          <a:p>
-            <a:pPr indent="0" marL="0">
-              <a:buNone/>
-            </a:pPr>
-            <a:r>
-              <a:rPr lang="en-US" sz="1300" dirty="0">
-                <a:solidFill>
-                  <a:srgbClr val="1B2437"/>
-                </a:solidFill>
-              </a:rPr>
-              <a:t>Permintaan berstatus Approval PO · Draft SAP menunggu Anda (angka di tab = jumlahnya).</a:t>
-            </a:r>
-            <a:endParaRPr lang="en-US" sz="1300" dirty="0"/>
-          </a:p>
-        </p:txBody>
-      </p:sp>
-      <p:sp>
-        <p:nvSpPr>
-          <p:cNvPr id="17" name="Langkah 2"/>
-          <p:cNvSpPr/>
-          <p:nvPr/>
-        </p:nvSpPr>
-        <p:spPr>
-          <a:xfrm>
-            <a:off x="6126480" y="2441448"/>
-            <a:ext cx="329184" cy="329184"/>
-          </a:xfrm>
-          <a:prstGeom prst="ellipse">
-            <a:avLst/>
-          </a:prstGeom>
-          <a:solidFill>
-            <a:srgbClr val="274289"/>
-          </a:solidFill>
-          <a:ln w="12700">
-            <a:solidFill>
-              <a:srgbClr val="274289"/>
-            </a:solidFill>
-            <a:prstDash val="solid"/>
-          </a:ln>
-        </p:spPr>
-      </p:sp>
-      <p:sp>
-        <p:nvSpPr>
-          <p:cNvPr id="18" name="Text 15"/>
-          <p:cNvSpPr txBox="1"/>
-          <p:nvPr/>
-        </p:nvSpPr>
-        <p:spPr>
-          <a:xfrm>
-            <a:off x="6126480" y="2441448"/>
-            <a:ext cx="329184" cy="329184"/>
-          </a:xfrm>
-          <a:prstGeom prst="rect">
-            <a:avLst/>
-          </a:prstGeom>
-          <a:noFill/>
-          <a:ln/>
-        </p:spPr>
-        <p:txBody>
-          <a:bodyPr wrap="square" lIns="0" tIns="0" rIns="0" bIns="0" rtlCol="0" anchor="ctr"/>
-          <a:lstStyle/>
-          <a:p>
-            <a:pPr algn="ctr" indent="0" marL="0">
-              <a:buNone/>
-            </a:pPr>
-            <a:r>
-              <a:rPr lang="en-US" sz="1200" b="1" dirty="0">
-                <a:solidFill>
-                  <a:srgbClr val="FFFFFF"/>
-                </a:solidFill>
-              </a:rPr>
-              <a:t>2</a:t>
-            </a:r>
-            <a:endParaRPr lang="en-US" sz="1200" dirty="0"/>
-          </a:p>
-        </p:txBody>
-      </p:sp>
-      <p:sp>
-        <p:nvSpPr>
-          <p:cNvPr id="19" name="Text 16"/>
-          <p:cNvSpPr txBox="1"/>
-          <p:nvPr/>
-        </p:nvSpPr>
-        <p:spPr>
-          <a:xfrm>
-            <a:off x="6583680" y="2423160"/>
-            <a:ext cx="4937760" cy="566928"/>
-          </a:xfrm>
-          <a:prstGeom prst="rect">
-            <a:avLst/>
-          </a:prstGeom>
-          <a:noFill/>
-          <a:ln/>
-        </p:spPr>
-        <p:txBody>
-          <a:bodyPr wrap="square" lIns="0" tIns="0" rIns="0" bIns="0" rtlCol="0" anchor="t"/>
-          <a:lstStyle/>
-          <a:p>
-            <a:pPr indent="0" marL="0">
-              <a:buNone/>
-            </a:pPr>
-            <a:r>
-              <a:rPr lang="en-US" sz="1300" b="1" dirty="0">
-                <a:solidFill>
-                  <a:srgbClr val="274289"/>
-                </a:solidFill>
-              </a:rPr>
-              <a:t>Buka permintaannya</a:t>
-            </a:r>
-            <a:endParaRPr lang="en-US" sz="1300" dirty="0"/>
-          </a:p>
-          <a:p>
-            <a:pPr indent="0" marL="0">
-              <a:buNone/>
-            </a:pPr>
-            <a:r>
-              <a:rPr lang="en-US" sz="1300" dirty="0">
-                <a:solidFill>
-                  <a:srgbClr val="1B2437"/>
-                </a:solidFill>
-              </a:rPr>
-              <a:t>Kotak Approval PO hanya muncul bila level itu giliran Anda.</a:t>
-            </a:r>
-            <a:endParaRPr lang="en-US" sz="1300" dirty="0"/>
-          </a:p>
-        </p:txBody>
-      </p:sp>
-      <p:sp>
-        <p:nvSpPr>
-          <p:cNvPr id="20" name="Langkah 3"/>
-          <p:cNvSpPr/>
-          <p:nvPr/>
-        </p:nvSpPr>
-        <p:spPr>
-          <a:xfrm>
-            <a:off x="6126480" y="3099816"/>
-            <a:ext cx="329184" cy="329184"/>
-          </a:xfrm>
-          <a:prstGeom prst="ellipse">
-            <a:avLst/>
-          </a:prstGeom>
-          <a:solidFill>
-            <a:srgbClr val="274289"/>
-          </a:solidFill>
-          <a:ln w="12700">
-            <a:solidFill>
-              <a:srgbClr val="274289"/>
-            </a:solidFill>
-            <a:prstDash val="solid"/>
-          </a:ln>
-        </p:spPr>
-      </p:sp>
-      <p:sp>
-        <p:nvSpPr>
-          <p:cNvPr id="21" name="Text 18"/>
-          <p:cNvSpPr txBox="1"/>
-          <p:nvPr/>
-        </p:nvSpPr>
-        <p:spPr>
-          <a:xfrm>
-            <a:off x="6126480" y="3099816"/>
-            <a:ext cx="329184" cy="329184"/>
-          </a:xfrm>
-          <a:prstGeom prst="rect">
-            <a:avLst/>
-          </a:prstGeom>
-          <a:noFill/>
-          <a:ln/>
-        </p:spPr>
-        <p:txBody>
-          <a:bodyPr wrap="square" lIns="0" tIns="0" rIns="0" bIns="0" rtlCol="0" anchor="ctr"/>
-          <a:lstStyle/>
-          <a:p>
-            <a:pPr algn="ctr" indent="0" marL="0">
-              <a:buNone/>
-            </a:pPr>
-            <a:r>
-              <a:rPr lang="en-US" sz="1200" b="1" dirty="0">
-                <a:solidFill>
-                  <a:srgbClr val="FFFFFF"/>
-                </a:solidFill>
-              </a:rPr>
-              <a:t>3</a:t>
-            </a:r>
-            <a:endParaRPr lang="en-US" sz="1200" dirty="0"/>
-          </a:p>
-        </p:txBody>
-      </p:sp>
-      <p:sp>
-        <p:nvSpPr>
-          <p:cNvPr id="22" name="Text 19"/>
-          <p:cNvSpPr txBox="1"/>
-          <p:nvPr/>
-        </p:nvSpPr>
-        <p:spPr>
-          <a:xfrm>
-            <a:off x="6583680" y="3081528"/>
-            <a:ext cx="4937760" cy="502920"/>
-          </a:xfrm>
-          <a:prstGeom prst="rect">
-            <a:avLst/>
-          </a:prstGeom>
-          <a:noFill/>
-          <a:ln/>
-        </p:spPr>
-        <p:txBody>
-          <a:bodyPr wrap="square" lIns="0" tIns="0" rIns="0" bIns="0" rtlCol="0" anchor="t"/>
-          <a:lstStyle/>
-          <a:p>
-            <a:pPr indent="0" marL="0">
-              <a:buNone/>
-            </a:pPr>
-            <a:r>
-              <a:rPr lang="en-US" sz="1300" b="1" dirty="0">
-                <a:solidFill>
-                  <a:srgbClr val="274289"/>
-                </a:solidFill>
-              </a:rPr>
-              <a:t>Kartu “Menunggu approval · level n” → Lihat</a:t>
-            </a:r>
-            <a:endParaRPr lang="en-US" sz="1300" dirty="0"/>
-          </a:p>
-          <a:p>
-            <a:pPr indent="0" marL="0">
-              <a:buNone/>
-            </a:pPr>
-            <a:r>
-              <a:rPr lang="en-US" sz="1300" dirty="0">
-                <a:solidFill>
-                  <a:srgbClr val="1B2437"/>
-                </a:solidFill>
-              </a:rPr>
-              <a:t>Periksa sebelum memutuskan:</a:t>
-            </a:r>
-            <a:endParaRPr lang="en-US" sz="1300" dirty="0"/>
-          </a:p>
-        </p:txBody>
-      </p:sp>
-      <p:sp>
-        <p:nvSpPr>
-          <p:cNvPr id="23" name="Text 20"/>
-          <p:cNvSpPr txBox="1"/>
-          <p:nvPr/>
-        </p:nvSpPr>
-        <p:spPr>
-          <a:xfrm>
-            <a:off x="6583680" y="3657600"/>
-            <a:ext cx="4937760" cy="1463040"/>
-          </a:xfrm>
-          <a:prstGeom prst="rect">
-            <a:avLst/>
-          </a:prstGeom>
-          <a:noFill/>
-          <a:ln/>
-        </p:spPr>
-        <p:txBody>
-          <a:bodyPr wrap="square" lIns="0" tIns="0" rIns="0" bIns="0" rtlCol="0" anchor="t"/>
-          <a:lstStyle/>
-          <a:p>
-            <a:pPr indent="0" marL="0">
-              <a:spcAft>
-                <a:spcPts val="200"/>
-              </a:spcAft>
-              <a:buNone/>
-            </a:pPr>
-            <a:r>
-              <a:rPr lang="en-US" sz="1250" dirty="0">
-                <a:solidFill>
-                  <a:srgbClr val="1B2437"/>
-                </a:solidFill>
-              </a:rPr>
-              <a:t>✓  Vendor benar dan aktif di SAP</a:t>
-            </a:r>
-            <a:endParaRPr lang="en-US" sz="1250" dirty="0"/>
-          </a:p>
-          <a:p>
-            <a:pPr indent="0" marL="0">
-              <a:spcAft>
-                <a:spcPts val="200"/>
-              </a:spcAft>
-              <a:buNone/>
-            </a:pPr>
-            <a:r>
-              <a:rPr lang="en-US" sz="1250" dirty="0">
-                <a:solidFill>
-                  <a:srgbClr val="1B2437"/>
-                </a:solidFill>
-              </a:rPr>
-              <a:t>✓  Harga beli wajar dibanding PO sebelumnya</a:t>
-            </a:r>
-            <a:endParaRPr lang="en-US" sz="1250" dirty="0"/>
-          </a:p>
-          <a:p>
-            <a:pPr indent="0" marL="0">
-              <a:spcAft>
-                <a:spcPts val="200"/>
-              </a:spcAft>
-              <a:buNone/>
-            </a:pPr>
-            <a:r>
-              <a:rPr lang="en-US" sz="1250" dirty="0">
-                <a:solidFill>
-                  <a:srgbClr val="1B2437"/>
-                </a:solidFill>
-              </a:rPr>
-              <a:t>✓  Pajak per baris sesuai (mis. VAT I-E 11%, VAT I-C 0%)</a:t>
-            </a:r>
-            <a:endParaRPr lang="en-US" sz="1250" dirty="0"/>
-          </a:p>
-          <a:p>
-            <a:pPr indent="0" marL="0">
-              <a:spcAft>
-                <a:spcPts val="200"/>
-              </a:spcAft>
-              <a:buNone/>
-            </a:pPr>
-            <a:r>
-              <a:rPr lang="en-US" sz="1250" dirty="0">
-                <a:solidFill>
-                  <a:srgbClr val="1B2437"/>
-                </a:solidFill>
-              </a:rPr>
-              <a:t>✓  Qty dan dek sesuai permintaan kapal</a:t>
-            </a:r>
-            <a:endParaRPr lang="en-US" sz="1250" dirty="0"/>
-          </a:p>
-          <a:p>
-            <a:pPr indent="0" marL="0">
-              <a:spcAft>
-                <a:spcPts val="200"/>
-              </a:spcAft>
-              <a:buNone/>
-            </a:pPr>
-            <a:r>
-              <a:rPr lang="en-US" sz="1250" dirty="0">
-                <a:solidFill>
-                  <a:srgbClr val="1B2437"/>
-                </a:solidFill>
-              </a:rPr>
-              <a:t>✓  Catatan pengiriman (tanggal, DC tujuan) jelas</a:t>
-            </a:r>
-            <a:endParaRPr lang="en-US" sz="1250" dirty="0"/>
-          </a:p>
-        </p:txBody>
-      </p:sp>
-      <p:sp>
-        <p:nvSpPr>
-          <p:cNvPr id="24" name="Kotak Approval PO bingkai"/>
-          <p:cNvSpPr/>
-          <p:nvPr/>
-        </p:nvSpPr>
-        <p:spPr>
-          <a:xfrm>
-            <a:off x="621792" y="5389972"/>
-            <a:ext cx="5248656" cy="1198695"/>
-          </a:xfrm>
-          <a:prstGeom prst="roundRect">
-            <a:avLst>
-              <a:gd name="adj" fmla="val 7628"/>
-            </a:avLst>
-          </a:prstGeom>
-          <a:solidFill>
-            <a:srgbClr val="E4EAF4"/>
-          </a:solidFill>
-          <a:ln w="9525">
-            <a:solidFill>
-              <a:srgbClr val="E4EAF4"/>
-            </a:solidFill>
-            <a:prstDash val="solid"/>
-          </a:ln>
-          <a:effectLst>
-            <a:outerShdw sx="100000" sy="100000" kx="0" ky="0" algn="bl" rotWithShape="0" blurRad="101600" dist="25400" dir="5400000">
-              <a:srgbClr val="274289">
-                <a:alpha val="12000"/>
-              </a:srgbClr>
-            </a:outerShdw>
-          </a:effectLst>
-        </p:spPr>
-      </p:sp>
-      <p:pic>
-        <p:nvPicPr>
-          <p:cNvPr id="25" name="Kotak Approval PO" descr="Layar PID POS: Kotak Approval PO">    </p:cNvPr>
-          <p:cNvPicPr>
-            <a:picLocks noChangeAspect="1"/>
-          </p:cNvPicPr>
-          <p:nvPr/>
-        </p:nvPicPr>
-        <p:blipFill>
-          <a:blip r:embed="rId2"/>
-          <a:stretch>
-            <a:fillRect/>
-          </a:stretch>
-        </p:blipFill>
-        <p:spPr>
-          <a:xfrm>
-            <a:off x="685800" y="5453980"/>
-            <a:ext cx="5120640" cy="1070679"/>
-          </a:xfrm>
-          <a:prstGeom prst="rect">
-            <a:avLst/>
-          </a:prstGeom>
-        </p:spPr>
-      </p:pic>
-      <p:sp>
-        <p:nvSpPr>
-          <p:cNvPr id="26" name="Sorotan Kotak Approval PO 1"/>
-          <p:cNvSpPr/>
-          <p:nvPr/>
-        </p:nvSpPr>
-        <p:spPr>
-          <a:xfrm>
-            <a:off x="5173841" y="6140335"/>
-            <a:ext cx="570807" cy="330292"/>
-          </a:xfrm>
-          <a:prstGeom prst="roundRect">
-            <a:avLst>
-              <a:gd name="adj" fmla="val 13842"/>
-            </a:avLst>
-          </a:prstGeom>
-          <a:ln w="28575">
-            <a:solidFill>
-              <a:srgbClr val="F2762E"/>
-            </a:solidFill>
-            <a:prstDash val="solid"/>
-          </a:ln>
-        </p:spPr>
-      </p:sp>
-      <p:sp>
-        <p:nvSpPr>
-          <p:cNvPr id="27" name="Sorotan Kotak Approval PO 2"/>
-          <p:cNvSpPr/>
-          <p:nvPr/>
-        </p:nvSpPr>
-        <p:spPr>
-          <a:xfrm>
-            <a:off x="743712" y="6140335"/>
-            <a:ext cx="497101" cy="330292"/>
-          </a:xfrm>
-          <a:prstGeom prst="roundRect">
-            <a:avLst>
-              <a:gd name="adj" fmla="val 13842"/>
-            </a:avLst>
-          </a:prstGeom>
-          <a:ln w="28575">
-            <a:solidFill>
-              <a:srgbClr val="F2762E"/>
-            </a:solidFill>
-            <a:prstDash val="solid"/>
-          </a:ln>
-        </p:spPr>
-      </p:sp>
-      <p:sp>
-        <p:nvSpPr>
-          <p:cNvPr id="25" name="Slide Number Placeholder 0"/>
-          <p:cNvSpPr>
-            <a:spLocks noGrp="1"/>
-          </p:cNvSpPr>
-          <p:nvPr>
-            <p:ph type="sldNum" sz="quarter" idx="4294967295"/>
-          </p:nvPr>
-        </p:nvSpPr>
-        <p:spPr>
-          <a:xfrm>
-            <a:off x="11109960" y="6309360"/>
-            <a:ext cx="457200" cy="274320"/>
-          </a:xfrm>
-          <a:prstGeom prst="rect">
-            <a:avLst/>
-          </a:prstGeom>
-          <a:extLst>
-            <a:ext uri="{C572A759-6A51-4108-AA02-DFA0A04FC94B}">
-              <ma14:wrappingTextBoxFlag xmlns:ma14="http://schemas.microsoft.com/office/mac/drawingml/2011/main" val="0"/>
-            </a:ext>
-          </a:extLst>
-        </p:spPr>
-        <p:txBody>
-          <a:bodyPr/>
-          <a:lstStyle>
-            <a:lvl1pPr>
-              <a:defRPr sz="1000">
-                <a:solidFill>
-                  <a:srgbClr val="5B6B86"/>
-                </a:solidFill>
-              </a:defRPr>
-            </a:lvl1pPr>
-          </a:lstStyle>
-          <a:p>
-            <a:pPr algn="r"/>
-            <a:fld id="{F7021451-1387-4CA6-816F-3879F97B5CBC}" type="slidenum">
-              <a:rPr b="0" lang="en-US"/>
-              <a:t>10</a:t>
-            </a:fld>
-            <a:endParaRPr lang="en-US"/>
-          </a:p>
-        </p:txBody>
-      </p:sp>
-    </p:spTree>
-  </p:cSld>
-  <p:clrMapOvr>
-    <a:masterClrMapping/>
-  </p:clrMapOvr>
-</p:sld>
-</file>
-
-<file path=ppt/slides/slide11.xml><?xml version="1.0" encoding="utf-8"?>
-<p:sld xmlns:a="http://schemas.openxmlformats.org/drawingml/2006/main" xmlns:r="http://schemas.openxmlformats.org/officeDocument/2006/relationships" xmlns:p="http://schemas.openxmlformats.org/presentationml/2006/main">
-  <p:cSld name="Slide 11">
-    <p:spTree>
-      <p:nvGrpSpPr>
-        <p:cNvPr id="1" name=""/>
-        <p:cNvGrpSpPr/>
-        <p:nvPr/>
-      </p:nvGrpSpPr>
-      <p:grpSpPr>
-        <a:xfrm>
-          <a:off x="0" y="0"/>
-          <a:ext cx="0" cy="0"/>
-          <a:chOff x="0" y="0"/>
-          <a:chExt cx="0" cy="0"/>
-        </a:xfrm>
-      </p:grpSpPr>
-      <p:sp>
-        <p:nvSpPr>
-          <p:cNvPr id="2" name="Text 0"/>
-          <p:cNvSpPr/>
-          <p:nvPr>
-            <p:ph idx="100" type="title" hasCustomPrompt="1"/>
-          </p:nvPr>
-        </p:nvSpPr>
-        <p:spPr>
-          <a:xfrm>
-            <a:off x="685800" y="914400"/>
-            <a:ext cx="10835640" cy="640080"/>
-          </a:xfrm>
-          <a:prstGeom prst="rect">
-            <a:avLst/>
-          </a:prstGeom>
-          <a:noFill/>
-          <a:ln/>
-        </p:spPr>
-        <p:txBody>
-          <a:bodyPr wrap="square" lIns="0" tIns="0" rIns="0" bIns="0" rtlCol="0" anchor="ctr"/>
-          <a:lstStyle/>
-          <a:p>
-            <a:pPr algn="l" indent="0" marL="0">
-              <a:buNone/>
-            </a:pPr>
-            <a:r>
-              <a:rPr lang="en-US" sz="2800" b="1" dirty="0">
-                <a:solidFill>
-                  <a:schemeClr val="tx2"/>
-                </a:solidFill>
-              </a:rPr>
-              <a:t>Approve PO · Setujui atau tolak</a:t>
-            </a:r>
-            <a:endParaRPr lang="en-US" sz="2800" dirty="0"/>
-          </a:p>
-        </p:txBody>
-      </p:sp>
-      <p:sp>
-        <p:nvSpPr>
-          <p:cNvPr id="3" name="Kotak Approval PO bingkai"/>
-          <p:cNvSpPr/>
-          <p:nvPr/>
-        </p:nvSpPr>
-        <p:spPr>
-          <a:xfrm>
-            <a:off x="1557064" y="1673352"/>
-            <a:ext cx="9093112" cy="2002536"/>
-          </a:xfrm>
-          <a:prstGeom prst="roundRect">
-            <a:avLst>
-              <a:gd name="adj" fmla="val 4566"/>
-            </a:avLst>
-          </a:prstGeom>
-          <a:solidFill>
-            <a:srgbClr val="E4EAF4"/>
-          </a:solidFill>
-          <a:ln w="9525">
-            <a:solidFill>
-              <a:srgbClr val="E4EAF4"/>
-            </a:solidFill>
-            <a:prstDash val="solid"/>
-          </a:ln>
-          <a:effectLst>
-            <a:outerShdw sx="100000" sy="100000" kx="0" ky="0" algn="bl" rotWithShape="0" blurRad="101600" dist="25400" dir="5400000">
-              <a:srgbClr val="274289">
-                <a:alpha val="12000"/>
-              </a:srgbClr>
-            </a:outerShdw>
-          </a:effectLst>
-        </p:spPr>
-      </p:sp>
-      <p:pic>
-        <p:nvPicPr>
-          <p:cNvPr id="4" name="Kotak Approval PO" descr="Layar PID POS: Kotak Approval PO">    </p:cNvPr>
-          <p:cNvPicPr>
-            <a:picLocks noChangeAspect="1"/>
-          </p:cNvPicPr>
-          <p:nvPr/>
-        </p:nvPicPr>
-        <p:blipFill>
-          <a:blip r:embed="rId1"/>
-          <a:stretch>
-            <a:fillRect/>
-          </a:stretch>
-        </p:blipFill>
-        <p:spPr>
-          <a:xfrm>
-            <a:off x="1621072" y="1737360"/>
-            <a:ext cx="8965096" cy="1874520"/>
-          </a:xfrm>
-          <a:prstGeom prst="rect">
-            <a:avLst/>
-          </a:prstGeom>
-        </p:spPr>
-      </p:pic>
-      <p:sp>
-        <p:nvSpPr>
-          <p:cNvPr id="5" name="Sorotan Kotak Approval PO 1"/>
-          <p:cNvSpPr/>
-          <p:nvPr/>
-        </p:nvSpPr>
-        <p:spPr>
-          <a:xfrm>
-            <a:off x="9499225" y="2959608"/>
-            <a:ext cx="958165" cy="537077"/>
-          </a:xfrm>
-          <a:prstGeom prst="roundRect">
-            <a:avLst>
-              <a:gd name="adj" fmla="val 8513"/>
-            </a:avLst>
-          </a:prstGeom>
-          <a:ln w="28575">
-            <a:solidFill>
-              <a:srgbClr val="F2762E"/>
-            </a:solidFill>
-            <a:prstDash val="solid"/>
-          </a:ln>
-        </p:spPr>
-      </p:sp>
-      <p:sp>
-        <p:nvSpPr>
-          <p:cNvPr id="6" name="Nomor 1"/>
-          <p:cNvSpPr/>
-          <p:nvPr/>
-        </p:nvSpPr>
-        <p:spPr>
-          <a:xfrm>
-            <a:off x="9371209" y="2831592"/>
-            <a:ext cx="292608" cy="292608"/>
-          </a:xfrm>
-          <a:prstGeom prst="ellipse">
-            <a:avLst/>
-          </a:prstGeom>
-          <a:solidFill>
-            <a:srgbClr val="F2762E"/>
-          </a:solidFill>
-          <a:ln w="19050">
-            <a:solidFill>
-              <a:srgbClr val="FFFFFF"/>
-            </a:solidFill>
-            <a:prstDash val="solid"/>
-          </a:ln>
-        </p:spPr>
-      </p:sp>
-      <p:sp>
-        <p:nvSpPr>
-          <p:cNvPr id="7" name="Text 4"/>
-          <p:cNvSpPr txBox="1"/>
-          <p:nvPr/>
-        </p:nvSpPr>
-        <p:spPr>
-          <a:xfrm>
-            <a:off x="9371209" y="2831592"/>
-            <a:ext cx="292608" cy="292608"/>
-          </a:xfrm>
-          <a:prstGeom prst="rect">
-            <a:avLst/>
-          </a:prstGeom>
-          <a:noFill/>
-          <a:ln/>
-        </p:spPr>
-        <p:txBody>
-          <a:bodyPr wrap="square" lIns="0" tIns="0" rIns="0" bIns="0" rtlCol="0" anchor="ctr"/>
-          <a:lstStyle/>
-          <a:p>
-            <a:pPr algn="ctr" indent="0" marL="0">
-              <a:buNone/>
-            </a:pPr>
-            <a:r>
-              <a:rPr lang="en-US" sz="1100" b="1" dirty="0">
-                <a:solidFill>
-                  <a:srgbClr val="FFFFFF"/>
-                </a:solidFill>
-              </a:rPr>
-              <a:t>1</a:t>
-            </a:r>
-            <a:endParaRPr lang="en-US" sz="1100" dirty="0"/>
-          </a:p>
-        </p:txBody>
-      </p:sp>
-      <p:sp>
-        <p:nvSpPr>
-          <p:cNvPr id="8" name="Sorotan Kotak Approval PO 2"/>
-          <p:cNvSpPr/>
-          <p:nvPr/>
-        </p:nvSpPr>
-        <p:spPr>
-          <a:xfrm>
-            <a:off x="1743058" y="2470603"/>
-            <a:ext cx="8714331" cy="516702"/>
-          </a:xfrm>
-          <a:prstGeom prst="roundRect">
-            <a:avLst>
-              <a:gd name="adj" fmla="val 8848"/>
-            </a:avLst>
-          </a:prstGeom>
-          <a:ln w="28575">
-            <a:solidFill>
-              <a:srgbClr val="F2762E"/>
-            </a:solidFill>
-            <a:prstDash val="solid"/>
-          </a:ln>
-        </p:spPr>
-      </p:sp>
-      <p:sp>
-        <p:nvSpPr>
-          <p:cNvPr id="9" name="Nomor 2"/>
-          <p:cNvSpPr/>
-          <p:nvPr/>
-        </p:nvSpPr>
-        <p:spPr>
-          <a:xfrm>
-            <a:off x="1615042" y="2342587"/>
-            <a:ext cx="292608" cy="292608"/>
-          </a:xfrm>
-          <a:prstGeom prst="ellipse">
-            <a:avLst/>
-          </a:prstGeom>
-          <a:solidFill>
-            <a:srgbClr val="F2762E"/>
-          </a:solidFill>
-          <a:ln w="19050">
-            <a:solidFill>
-              <a:srgbClr val="FFFFFF"/>
-            </a:solidFill>
-            <a:prstDash val="solid"/>
-          </a:ln>
-        </p:spPr>
-      </p:sp>
-      <p:sp>
-        <p:nvSpPr>
-          <p:cNvPr id="10" name="Text 7"/>
-          <p:cNvSpPr txBox="1"/>
-          <p:nvPr/>
-        </p:nvSpPr>
-        <p:spPr>
-          <a:xfrm>
-            <a:off x="1615042" y="2342587"/>
-            <a:ext cx="292608" cy="292608"/>
-          </a:xfrm>
-          <a:prstGeom prst="rect">
-            <a:avLst/>
-          </a:prstGeom>
-          <a:noFill/>
-          <a:ln/>
-        </p:spPr>
-        <p:txBody>
-          <a:bodyPr wrap="square" lIns="0" tIns="0" rIns="0" bIns="0" rtlCol="0" anchor="ctr"/>
-          <a:lstStyle/>
-          <a:p>
-            <a:pPr algn="ctr" indent="0" marL="0">
-              <a:buNone/>
-            </a:pPr>
-            <a:r>
-              <a:rPr lang="en-US" sz="1100" b="1" dirty="0">
-                <a:solidFill>
-                  <a:srgbClr val="FFFFFF"/>
-                </a:solidFill>
-              </a:rPr>
-              <a:t>2</a:t>
-            </a:r>
-            <a:endParaRPr lang="en-US" sz="1100" dirty="0"/>
-          </a:p>
-        </p:txBody>
-      </p:sp>
-      <p:sp>
-        <p:nvSpPr>
-          <p:cNvPr id="11" name="Sorotan Kotak Approval PO 3"/>
-          <p:cNvSpPr/>
-          <p:nvPr/>
-        </p:nvSpPr>
-        <p:spPr>
-          <a:xfrm>
-            <a:off x="1743058" y="2959608"/>
-            <a:ext cx="829122" cy="537077"/>
-          </a:xfrm>
-          <a:prstGeom prst="roundRect">
-            <a:avLst>
-              <a:gd name="adj" fmla="val 8513"/>
-            </a:avLst>
-          </a:prstGeom>
-          <a:ln w="28575">
-            <a:solidFill>
-              <a:srgbClr val="F2762E"/>
-            </a:solidFill>
-            <a:prstDash val="solid"/>
-          </a:ln>
-        </p:spPr>
-      </p:sp>
-      <p:sp>
-        <p:nvSpPr>
-          <p:cNvPr id="12" name="Nomor 3"/>
-          <p:cNvSpPr/>
-          <p:nvPr/>
-        </p:nvSpPr>
-        <p:spPr>
-          <a:xfrm>
-            <a:off x="1615042" y="2831592"/>
-            <a:ext cx="292608" cy="292608"/>
-          </a:xfrm>
-          <a:prstGeom prst="ellipse">
-            <a:avLst/>
-          </a:prstGeom>
-          <a:solidFill>
-            <a:srgbClr val="F2762E"/>
-          </a:solidFill>
-          <a:ln w="19050">
-            <a:solidFill>
-              <a:srgbClr val="FFFFFF"/>
-            </a:solidFill>
-            <a:prstDash val="solid"/>
-          </a:ln>
-        </p:spPr>
-      </p:sp>
-      <p:sp>
-        <p:nvSpPr>
-          <p:cNvPr id="13" name="Text 10"/>
-          <p:cNvSpPr txBox="1"/>
-          <p:nvPr/>
-        </p:nvSpPr>
-        <p:spPr>
-          <a:xfrm>
-            <a:off x="1615042" y="2831592"/>
-            <a:ext cx="292608" cy="292608"/>
-          </a:xfrm>
-          <a:prstGeom prst="rect">
-            <a:avLst/>
-          </a:prstGeom>
-          <a:noFill/>
-          <a:ln/>
-        </p:spPr>
-        <p:txBody>
-          <a:bodyPr wrap="square" lIns="0" tIns="0" rIns="0" bIns="0" rtlCol="0" anchor="ctr"/>
-          <a:lstStyle/>
-          <a:p>
-            <a:pPr algn="ctr" indent="0" marL="0">
-              <a:buNone/>
-            </a:pPr>
-            <a:r>
-              <a:rPr lang="en-US" sz="1100" b="1" dirty="0">
-                <a:solidFill>
-                  <a:srgbClr val="FFFFFF"/>
-                </a:solidFill>
-              </a:rPr>
-              <a:t>3</a:t>
-            </a:r>
-            <a:endParaRPr lang="en-US" sz="1100" dirty="0"/>
-          </a:p>
-        </p:txBody>
-      </p:sp>
-      <p:graphicFrame>
-        <p:nvGraphicFramePr>
-          <p:cNvPr id="12" name="Table 0"/>
-          <p:cNvGraphicFramePr>
-            <a:graphicFrameLocks noGrp="1"/>
-          </p:cNvGraphicFramePr>
-          <p:nvPr>
-            <p:extLst>
-              <p:ext uri="{D42A27DB-BD31-4B8C-83A1-F6EECF244321}">
-                <p14:modId xmlns:p14="http://schemas.microsoft.com/office/powerpoint/2010/main" val="1579011935"/>
-              </p:ext>
-            </p:extLst>
-          </p:nvPr>
-        </p:nvGraphicFramePr>
-        <p:xfrm>
-          <a:off x="685800" y="3794760"/>
-          <a:ext cx="10835640" cy="914400"/>
-        </p:xfrm>
-        <a:graphic>
-          <a:graphicData uri="http://schemas.openxmlformats.org/drawingml/2006/table">
-            <a:tbl>
-              <a:tblPr/>
-              <a:tblGrid>
-                <a:gridCol w="2743200"/>
-                <a:gridCol w="2743200"/>
-                <a:gridCol w="5349240"/>
-              </a:tblGrid>
-              <a:tr h="0">
-                <a:tc>
-                  <a:txBody>
-                    <a:bodyPr/>
-                    <a:lstStyle/>
-                    <a:p>
-                      <a:pPr indent="0" marL="0">
-                        <a:buNone/>
-                      </a:pPr>
-                      <a:r>
-                        <a:rPr lang="en-US" sz="1250" b="1" dirty="0">
-                          <a:solidFill>
-                            <a:srgbClr val="FFFFFF"/>
-                          </a:solidFill>
-                          <a:latin typeface="Calibri" pitchFamily="34" charset="0"/>
-                          <a:ea typeface="Calibri" pitchFamily="34" charset="-122"/>
-                          <a:cs typeface="Calibri" pitchFamily="34" charset="-120"/>
-                        </a:rPr>
-                        <a:t>Tindakan</a:t>
-                      </a:r>
-                      <a:endParaRPr lang="en-US" sz="1250" dirty="0">
-                        <a:latin typeface="Calibri" charset="0"/>
-                        <a:ea typeface="Calibri" charset="0"/>
-                        <a:cs typeface="Calibri" charset="0"/>
-                      </a:endParaRPr>
-                    </a:p>
-                  </a:txBody>
-                  <a:tcPr marL="91440" marR="91440" marT="54864" marB="54864" anchor="ctr">
-                    <a:lnL w="9525" cap="flat" cmpd="sng" algn="ctr">
-                      <a:solidFill>
-                        <a:srgbClr val="D5DEEC"/>
-                      </a:solidFill>
-                      <a:prstDash val="solid"/>
-                      <a:round/>
-                      <a:headEnd type="none" w="med" len="med"/>
-                      <a:tailEnd type="none" w="med" len="med"/>
-                    </a:lnL>
-                    <a:lnR w="9525" cap="flat" cmpd="sng" algn="ctr">
-                      <a:solidFill>
-                        <a:srgbClr val="D5DEEC"/>
-                      </a:solidFill>
-                      <a:prstDash val="solid"/>
-                      <a:round/>
-                      <a:headEnd type="none" w="med" len="med"/>
-                      <a:tailEnd type="none" w="med" len="med"/>
-                    </a:lnR>
-                    <a:lnT w="9525" cap="flat" cmpd="sng" algn="ctr">
-                      <a:solidFill>
-                        <a:srgbClr val="D5DEEC"/>
-                      </a:solidFill>
-                      <a:prstDash val="solid"/>
-                      <a:round/>
-                      <a:headEnd type="none" w="med" len="med"/>
-                      <a:tailEnd type="none" w="med" len="med"/>
-                    </a:lnT>
-                    <a:lnB w="9525" cap="flat" cmpd="sng" algn="ctr">
-                      <a:solidFill>
-                        <a:srgbClr val="D5DEEC"/>
-                      </a:solidFill>
-                      <a:prstDash val="solid"/>
-                      <a:round/>
-                      <a:headEnd type="none" w="med" len="med"/>
-                      <a:tailEnd type="none" w="med" len="med"/>
-                    </a:lnB>
-                    <a:solidFill>
-                      <a:srgbClr val="274289"/>
-                    </a:solidFill>
-                  </a:tcPr>
-                </a:tc>
-                <a:tc>
-                  <a:txBody>
-                    <a:bodyPr/>
-                    <a:lstStyle/>
-                    <a:p>
-                      <a:pPr indent="0" marL="0">
-                        <a:buNone/>
-                      </a:pPr>
-                      <a:r>
-                        <a:rPr lang="en-US" sz="1250" b="1" dirty="0">
-                          <a:solidFill>
-                            <a:srgbClr val="FFFFFF"/>
-                          </a:solidFill>
-                          <a:latin typeface="Calibri" pitchFamily="34" charset="0"/>
-                          <a:ea typeface="Calibri" pitchFamily="34" charset="-122"/>
-                          <a:cs typeface="Calibri" pitchFamily="34" charset="-120"/>
-                        </a:rPr>
-                        <a:t>Cara</a:t>
-                      </a:r>
-                      <a:endParaRPr lang="en-US" sz="1250" dirty="0">
-                        <a:latin typeface="Calibri" charset="0"/>
-                        <a:ea typeface="Calibri" charset="0"/>
-                        <a:cs typeface="Calibri" charset="0"/>
-                      </a:endParaRPr>
-                    </a:p>
-                  </a:txBody>
-                  <a:tcPr marL="91440" marR="91440" marT="54864" marB="54864" anchor="ctr">
-                    <a:lnL w="9525" cap="flat" cmpd="sng" algn="ctr">
-                      <a:solidFill>
-                        <a:srgbClr val="D5DEEC"/>
-                      </a:solidFill>
-                      <a:prstDash val="solid"/>
-                      <a:round/>
-                      <a:headEnd type="none" w="med" len="med"/>
-                      <a:tailEnd type="none" w="med" len="med"/>
-                    </a:lnL>
-                    <a:lnR w="9525" cap="flat" cmpd="sng" algn="ctr">
-                      <a:solidFill>
-                        <a:srgbClr val="D5DEEC"/>
-                      </a:solidFill>
-                      <a:prstDash val="solid"/>
-                      <a:round/>
-                      <a:headEnd type="none" w="med" len="med"/>
-                      <a:tailEnd type="none" w="med" len="med"/>
-                    </a:lnR>
-                    <a:lnT w="9525" cap="flat" cmpd="sng" algn="ctr">
-                      <a:solidFill>
-                        <a:srgbClr val="D5DEEC"/>
-                      </a:solidFill>
-                      <a:prstDash val="solid"/>
-                      <a:round/>
-                      <a:headEnd type="none" w="med" len="med"/>
-                      <a:tailEnd type="none" w="med" len="med"/>
-                    </a:lnT>
-                    <a:lnB w="9525" cap="flat" cmpd="sng" algn="ctr">
-                      <a:solidFill>
-                        <a:srgbClr val="D5DEEC"/>
-                      </a:solidFill>
-                      <a:prstDash val="solid"/>
-                      <a:round/>
-                      <a:headEnd type="none" w="med" len="med"/>
-                      <a:tailEnd type="none" w="med" len="med"/>
-                    </a:lnB>
-                    <a:solidFill>
-                      <a:srgbClr val="274289"/>
-                    </a:solidFill>
-                  </a:tcPr>
-                </a:tc>
-                <a:tc>
-                  <a:txBody>
-                    <a:bodyPr/>
-                    <a:lstStyle/>
-                    <a:p>
-                      <a:pPr indent="0" marL="0">
-                        <a:buNone/>
-                      </a:pPr>
-                      <a:r>
-                        <a:rPr lang="en-US" sz="1250" b="1" dirty="0">
-                          <a:solidFill>
-                            <a:srgbClr val="FFFFFF"/>
-                          </a:solidFill>
-                          <a:latin typeface="Calibri" pitchFamily="34" charset="0"/>
-                          <a:ea typeface="Calibri" pitchFamily="34" charset="-122"/>
-                          <a:cs typeface="Calibri" pitchFamily="34" charset="-120"/>
-                        </a:rPr>
-                        <a:t>Hasil</a:t>
-                      </a:r>
-                      <a:endParaRPr lang="en-US" sz="1250" dirty="0">
-                        <a:latin typeface="Calibri" charset="0"/>
-                        <a:ea typeface="Calibri" charset="0"/>
-                        <a:cs typeface="Calibri" charset="0"/>
-                      </a:endParaRPr>
-                    </a:p>
-                  </a:txBody>
-                  <a:tcPr marL="91440" marR="91440" marT="54864" marB="54864" anchor="ctr">
-                    <a:lnL w="9525" cap="flat" cmpd="sng" algn="ctr">
-                      <a:solidFill>
-                        <a:srgbClr val="D5DEEC"/>
-                      </a:solidFill>
-                      <a:prstDash val="solid"/>
-                      <a:round/>
-                      <a:headEnd type="none" w="med" len="med"/>
-                      <a:tailEnd type="none" w="med" len="med"/>
-                    </a:lnL>
-                    <a:lnR w="9525" cap="flat" cmpd="sng" algn="ctr">
-                      <a:solidFill>
-                        <a:srgbClr val="D5DEEC"/>
-                      </a:solidFill>
-                      <a:prstDash val="solid"/>
-                      <a:round/>
-                      <a:headEnd type="none" w="med" len="med"/>
-                      <a:tailEnd type="none" w="med" len="med"/>
-                    </a:lnR>
-                    <a:lnT w="9525" cap="flat" cmpd="sng" algn="ctr">
-                      <a:solidFill>
-                        <a:srgbClr val="D5DEEC"/>
-                      </a:solidFill>
-                      <a:prstDash val="solid"/>
-                      <a:round/>
-                      <a:headEnd type="none" w="med" len="med"/>
-                      <a:tailEnd type="none" w="med" len="med"/>
-                    </a:lnT>
-                    <a:lnB w="9525" cap="flat" cmpd="sng" algn="ctr">
-                      <a:solidFill>
-                        <a:srgbClr val="D5DEEC"/>
-                      </a:solidFill>
-                      <a:prstDash val="solid"/>
-                      <a:round/>
-                      <a:headEnd type="none" w="med" len="med"/>
-                      <a:tailEnd type="none" w="med" len="med"/>
-                    </a:lnB>
-                    <a:solidFill>
-                      <a:srgbClr val="274289"/>
-                    </a:solidFill>
-                  </a:tcPr>
-                </a:tc>
-              </a:tr>
-              <a:tr h="0">
-                <a:tc>
-                  <a:txBody>
-                    <a:bodyPr/>
-                    <a:lstStyle/>
-                    <a:p>
-                      <a:pPr indent="0" marL="0">
-                        <a:buNone/>
-                      </a:pPr>
-                      <a:r>
-                        <a:rPr lang="en-US" sz="1250" b="1" dirty="0">
-                          <a:solidFill>
-                            <a:srgbClr val="274289"/>
-                          </a:solidFill>
-                          <a:latin typeface="Calibri" pitchFamily="34" charset="0"/>
-                          <a:ea typeface="Calibri" pitchFamily="34" charset="-122"/>
-                          <a:cs typeface="Calibri" pitchFamily="34" charset="-120"/>
-                        </a:rPr>
-                        <a:t>1 Setujui (belum level terakhir)</a:t>
-                      </a:r>
-                      <a:endParaRPr lang="en-US" sz="1250" dirty="0">
-                        <a:latin typeface="Calibri" charset="0"/>
-                        <a:ea typeface="Calibri" charset="0"/>
-                        <a:cs typeface="Calibri" charset="0"/>
-                      </a:endParaRPr>
-                    </a:p>
-                  </a:txBody>
-                  <a:tcPr marL="91440" marR="91440" marT="54864" marB="54864" anchor="ctr">
-                    <a:lnL w="9525" cap="flat" cmpd="sng" algn="ctr">
-                      <a:solidFill>
-                        <a:srgbClr val="D5DEEC"/>
-                      </a:solidFill>
-                      <a:prstDash val="solid"/>
-                      <a:round/>
-                      <a:headEnd type="none" w="med" len="med"/>
-                      <a:tailEnd type="none" w="med" len="med"/>
-                    </a:lnL>
-                    <a:lnR w="9525" cap="flat" cmpd="sng" algn="ctr">
-                      <a:solidFill>
-                        <a:srgbClr val="D5DEEC"/>
-                      </a:solidFill>
-                      <a:prstDash val="solid"/>
-                      <a:round/>
-                      <a:headEnd type="none" w="med" len="med"/>
-                      <a:tailEnd type="none" w="med" len="med"/>
-                    </a:lnR>
-                    <a:lnT w="9525" cap="flat" cmpd="sng" algn="ctr">
-                      <a:solidFill>
-                        <a:srgbClr val="D5DEEC"/>
-                      </a:solidFill>
-                      <a:prstDash val="solid"/>
-                      <a:round/>
-                      <a:headEnd type="none" w="med" len="med"/>
-                      <a:tailEnd type="none" w="med" len="med"/>
-                    </a:lnT>
-                    <a:lnB w="9525" cap="flat" cmpd="sng" algn="ctr">
-                      <a:solidFill>
-                        <a:srgbClr val="D5DEEC"/>
-                      </a:solidFill>
-                      <a:prstDash val="solid"/>
-                      <a:round/>
-                      <a:headEnd type="none" w="med" len="med"/>
-                      <a:tailEnd type="none" w="med" len="med"/>
-                    </a:lnB>
-                    <a:solidFill>
-                      <a:srgbClr val="FFFFFF"/>
-                    </a:solidFill>
-                  </a:tcPr>
-                </a:tc>
-                <a:tc>
-                  <a:txBody>
-                    <a:bodyPr/>
-                    <a:lstStyle/>
-                    <a:p>
-                      <a:pPr indent="0" marL="0">
-                        <a:buNone/>
-                      </a:pPr>
-                      <a:r>
-                        <a:rPr lang="en-US" sz="1250" dirty="0">
-                          <a:solidFill>
-                            <a:srgbClr val="1B2437"/>
-                          </a:solidFill>
-                          <a:latin typeface="Calibri" pitchFamily="34" charset="0"/>
-                          <a:ea typeface="Calibri" pitchFamily="34" charset="-122"/>
-                          <a:cs typeface="Calibri" pitchFamily="34" charset="-120"/>
-                        </a:rPr>
-                        <a:t>Klik Setujui; catatan opsional</a:t>
-                      </a:r>
-                      <a:endParaRPr lang="en-US" sz="1250" dirty="0">
-                        <a:latin typeface="Calibri" charset="0"/>
-                        <a:ea typeface="Calibri" charset="0"/>
-                        <a:cs typeface="Calibri" charset="0"/>
-                      </a:endParaRPr>
-                    </a:p>
-                  </a:txBody>
-                  <a:tcPr marL="91440" marR="91440" marT="54864" marB="54864" anchor="ctr">
-                    <a:lnL w="9525" cap="flat" cmpd="sng" algn="ctr">
-                      <a:solidFill>
-                        <a:srgbClr val="D5DEEC"/>
-                      </a:solidFill>
-                      <a:prstDash val="solid"/>
-                      <a:round/>
-                      <a:headEnd type="none" w="med" len="med"/>
-                      <a:tailEnd type="none" w="med" len="med"/>
-                    </a:lnL>
-                    <a:lnR w="9525" cap="flat" cmpd="sng" algn="ctr">
-                      <a:solidFill>
-                        <a:srgbClr val="D5DEEC"/>
-                      </a:solidFill>
-                      <a:prstDash val="solid"/>
-                      <a:round/>
-                      <a:headEnd type="none" w="med" len="med"/>
-                      <a:tailEnd type="none" w="med" len="med"/>
-                    </a:lnR>
-                    <a:lnT w="9525" cap="flat" cmpd="sng" algn="ctr">
-                      <a:solidFill>
-                        <a:srgbClr val="D5DEEC"/>
-                      </a:solidFill>
-                      <a:prstDash val="solid"/>
-                      <a:round/>
-                      <a:headEnd type="none" w="med" len="med"/>
-                      <a:tailEnd type="none" w="med" len="med"/>
-                    </a:lnT>
-                    <a:lnB w="9525" cap="flat" cmpd="sng" algn="ctr">
-                      <a:solidFill>
-                        <a:srgbClr val="D5DEEC"/>
-                      </a:solidFill>
-                      <a:prstDash val="solid"/>
-                      <a:round/>
-                      <a:headEnd type="none" w="med" len="med"/>
-                      <a:tailEnd type="none" w="med" len="med"/>
-                    </a:lnB>
-                    <a:solidFill>
-                      <a:srgbClr val="FFFFFF"/>
-                    </a:solidFill>
-                  </a:tcPr>
-                </a:tc>
-                <a:tc>
-                  <a:txBody>
-                    <a:bodyPr/>
-                    <a:lstStyle/>
-                    <a:p>
-                      <a:pPr indent="0" marL="0">
-                        <a:buNone/>
-                      </a:pPr>
-                      <a:r>
-                        <a:rPr lang="en-US" sz="1250" dirty="0">
-                          <a:solidFill>
-                            <a:srgbClr val="1B2437"/>
-                          </a:solidFill>
-                          <a:latin typeface="Calibri" pitchFamily="34" charset="0"/>
-                          <a:ea typeface="Calibri" pitchFamily="34" charset="-122"/>
-                          <a:cs typeface="Calibri" pitchFamily="34" charset="-120"/>
-                        </a:rPr>
-                        <a:t>PO naik ke level berikutnya</a:t>
-                      </a:r>
-                      <a:endParaRPr lang="en-US" sz="1250" dirty="0">
-                        <a:latin typeface="Calibri" charset="0"/>
-                        <a:ea typeface="Calibri" charset="0"/>
-                        <a:cs typeface="Calibri" charset="0"/>
-                      </a:endParaRPr>
-                    </a:p>
-                  </a:txBody>
-                  <a:tcPr marL="91440" marR="91440" marT="54864" marB="54864" anchor="ctr">
-                    <a:lnL w="9525" cap="flat" cmpd="sng" algn="ctr">
-                      <a:solidFill>
-                        <a:srgbClr val="D5DEEC"/>
-                      </a:solidFill>
-                      <a:prstDash val="solid"/>
-                      <a:round/>
-                      <a:headEnd type="none" w="med" len="med"/>
-                      <a:tailEnd type="none" w="med" len="med"/>
-                    </a:lnL>
-                    <a:lnR w="9525" cap="flat" cmpd="sng" algn="ctr">
-                      <a:solidFill>
-                        <a:srgbClr val="D5DEEC"/>
-                      </a:solidFill>
-                      <a:prstDash val="solid"/>
-                      <a:round/>
-                      <a:headEnd type="none" w="med" len="med"/>
-                      <a:tailEnd type="none" w="med" len="med"/>
-                    </a:lnR>
-                    <a:lnT w="9525" cap="flat" cmpd="sng" algn="ctr">
-                      <a:solidFill>
-                        <a:srgbClr val="D5DEEC"/>
-                      </a:solidFill>
-                      <a:prstDash val="solid"/>
-                      <a:round/>
-                      <a:headEnd type="none" w="med" len="med"/>
-                      <a:tailEnd type="none" w="med" len="med"/>
-                    </a:lnT>
-                    <a:lnB w="9525" cap="flat" cmpd="sng" algn="ctr">
-                      <a:solidFill>
-                        <a:srgbClr val="D5DEEC"/>
-                      </a:solidFill>
-                      <a:prstDash val="solid"/>
-                      <a:round/>
-                      <a:headEnd type="none" w="med" len="med"/>
-                      <a:tailEnd type="none" w="med" len="med"/>
-                    </a:lnB>
-                    <a:solidFill>
-                      <a:srgbClr val="FFFFFF"/>
-                    </a:solidFill>
-                  </a:tcPr>
-                </a:tc>
-              </a:tr>
-              <a:tr h="0">
-                <a:tc>
-                  <a:txBody>
-                    <a:bodyPr/>
-                    <a:lstStyle/>
-                    <a:p>
-                      <a:pPr indent="0" marL="0">
-                        <a:buNone/>
-                      </a:pPr>
-                      <a:r>
-                        <a:rPr lang="en-US" sz="1250" b="1" dirty="0">
-                          <a:solidFill>
-                            <a:srgbClr val="2E7D4F"/>
-                          </a:solidFill>
-                          <a:latin typeface="Calibri" pitchFamily="34" charset="0"/>
-                          <a:ea typeface="Calibri" pitchFamily="34" charset="-122"/>
-                          <a:cs typeface="Calibri" pitchFamily="34" charset="-120"/>
-                        </a:rPr>
-                        <a:t>1 Setujui (level terakhir)</a:t>
-                      </a:r>
-                      <a:endParaRPr lang="en-US" sz="1250" dirty="0">
-                        <a:latin typeface="Calibri" charset="0"/>
-                        <a:ea typeface="Calibri" charset="0"/>
-                        <a:cs typeface="Calibri" charset="0"/>
-                      </a:endParaRPr>
-                    </a:p>
-                  </a:txBody>
-                  <a:tcPr marL="91440" marR="91440" marT="54864" marB="54864" anchor="ctr">
-                    <a:lnL w="9525" cap="flat" cmpd="sng" algn="ctr">
-                      <a:solidFill>
-                        <a:srgbClr val="D5DEEC"/>
-                      </a:solidFill>
-                      <a:prstDash val="solid"/>
-                      <a:round/>
-                      <a:headEnd type="none" w="med" len="med"/>
-                      <a:tailEnd type="none" w="med" len="med"/>
-                    </a:lnL>
-                    <a:lnR w="9525" cap="flat" cmpd="sng" algn="ctr">
-                      <a:solidFill>
-                        <a:srgbClr val="D5DEEC"/>
-                      </a:solidFill>
-                      <a:prstDash val="solid"/>
-                      <a:round/>
-                      <a:headEnd type="none" w="med" len="med"/>
-                      <a:tailEnd type="none" w="med" len="med"/>
-                    </a:lnR>
-                    <a:lnT w="9525" cap="flat" cmpd="sng" algn="ctr">
-                      <a:solidFill>
-                        <a:srgbClr val="D5DEEC"/>
-                      </a:solidFill>
-                      <a:prstDash val="solid"/>
-                      <a:round/>
-                      <a:headEnd type="none" w="med" len="med"/>
-                      <a:tailEnd type="none" w="med" len="med"/>
-                    </a:lnT>
-                    <a:lnB w="9525" cap="flat" cmpd="sng" algn="ctr">
-                      <a:solidFill>
-                        <a:srgbClr val="D5DEEC"/>
-                      </a:solidFill>
-                      <a:prstDash val="solid"/>
-                      <a:round/>
-                      <a:headEnd type="none" w="med" len="med"/>
-                      <a:tailEnd type="none" w="med" len="med"/>
-                    </a:lnB>
-                    <a:solidFill>
-                      <a:srgbClr val="F6F8FC"/>
-                    </a:solidFill>
-                  </a:tcPr>
-                </a:tc>
-                <a:tc>
-                  <a:txBody>
-                    <a:bodyPr/>
-                    <a:lstStyle/>
-                    <a:p>
-                      <a:pPr indent="0" marL="0">
-                        <a:buNone/>
-                      </a:pPr>
-                      <a:r>
-                        <a:rPr lang="en-US" sz="1250" dirty="0">
-                          <a:solidFill>
-                            <a:srgbClr val="1B2437"/>
-                          </a:solidFill>
-                          <a:latin typeface="Calibri" pitchFamily="34" charset="0"/>
-                          <a:ea typeface="Calibri" pitchFamily="34" charset="-122"/>
-                          <a:cs typeface="Calibri" pitchFamily="34" charset="-120"/>
-                        </a:rPr>
-                        <a:t>Klik Setujui</a:t>
-                      </a:r>
-                      <a:endParaRPr lang="en-US" sz="1250" dirty="0">
-                        <a:latin typeface="Calibri" charset="0"/>
-                        <a:ea typeface="Calibri" charset="0"/>
-                        <a:cs typeface="Calibri" charset="0"/>
-                      </a:endParaRPr>
-                    </a:p>
-                  </a:txBody>
-                  <a:tcPr marL="91440" marR="91440" marT="54864" marB="54864" anchor="ctr">
-                    <a:lnL w="9525" cap="flat" cmpd="sng" algn="ctr">
-                      <a:solidFill>
-                        <a:srgbClr val="D5DEEC"/>
-                      </a:solidFill>
-                      <a:prstDash val="solid"/>
-                      <a:round/>
-                      <a:headEnd type="none" w="med" len="med"/>
-                      <a:tailEnd type="none" w="med" len="med"/>
-                    </a:lnL>
-                    <a:lnR w="9525" cap="flat" cmpd="sng" algn="ctr">
-                      <a:solidFill>
-                        <a:srgbClr val="D5DEEC"/>
-                      </a:solidFill>
-                      <a:prstDash val="solid"/>
-                      <a:round/>
-                      <a:headEnd type="none" w="med" len="med"/>
-                      <a:tailEnd type="none" w="med" len="med"/>
-                    </a:lnR>
-                    <a:lnT w="9525" cap="flat" cmpd="sng" algn="ctr">
-                      <a:solidFill>
-                        <a:srgbClr val="D5DEEC"/>
-                      </a:solidFill>
-                      <a:prstDash val="solid"/>
-                      <a:round/>
-                      <a:headEnd type="none" w="med" len="med"/>
-                      <a:tailEnd type="none" w="med" len="med"/>
-                    </a:lnT>
-                    <a:lnB w="9525" cap="flat" cmpd="sng" algn="ctr">
-                      <a:solidFill>
-                        <a:srgbClr val="D5DEEC"/>
-                      </a:solidFill>
-                      <a:prstDash val="solid"/>
-                      <a:round/>
-                      <a:headEnd type="none" w="med" len="med"/>
-                      <a:tailEnd type="none" w="med" len="med"/>
-                    </a:lnB>
-                    <a:solidFill>
-                      <a:srgbClr val="F6F8FC"/>
-                    </a:solidFill>
-                  </a:tcPr>
-                </a:tc>
-                <a:tc>
-                  <a:txBody>
-                    <a:bodyPr/>
-                    <a:lstStyle/>
-                    <a:p>
-                      <a:pPr indent="0" marL="0">
-                        <a:buNone/>
-                      </a:pPr>
-                      <a:r>
-                        <a:rPr lang="en-US" sz="1250" dirty="0">
-                          <a:solidFill>
-                            <a:srgbClr val="1B2437"/>
-                          </a:solidFill>
-                          <a:latin typeface="Calibri" pitchFamily="34" charset="0"/>
-                          <a:ea typeface="Calibri" pitchFamily="34" charset="-122"/>
-                          <a:cs typeface="Calibri" pitchFamily="34" charset="-120"/>
-                        </a:rPr>
-                        <a:t>Draft SAP dipromosikan menjadi PO final; nomor PO SAP tampil di kartu; PO pindah ke tab GRPO</a:t>
-                      </a:r>
-                      <a:endParaRPr lang="en-US" sz="1250" dirty="0">
-                        <a:latin typeface="Calibri" charset="0"/>
-                        <a:ea typeface="Calibri" charset="0"/>
-                        <a:cs typeface="Calibri" charset="0"/>
-                      </a:endParaRPr>
-                    </a:p>
-                  </a:txBody>
-                  <a:tcPr marL="91440" marR="91440" marT="54864" marB="54864" anchor="ctr">
-                    <a:lnL w="9525" cap="flat" cmpd="sng" algn="ctr">
-                      <a:solidFill>
-                        <a:srgbClr val="D5DEEC"/>
-                      </a:solidFill>
-                      <a:prstDash val="solid"/>
-                      <a:round/>
-                      <a:headEnd type="none" w="med" len="med"/>
-                      <a:tailEnd type="none" w="med" len="med"/>
-                    </a:lnL>
-                    <a:lnR w="9525" cap="flat" cmpd="sng" algn="ctr">
-                      <a:solidFill>
-                        <a:srgbClr val="D5DEEC"/>
-                      </a:solidFill>
-                      <a:prstDash val="solid"/>
-                      <a:round/>
-                      <a:headEnd type="none" w="med" len="med"/>
-                      <a:tailEnd type="none" w="med" len="med"/>
-                    </a:lnR>
-                    <a:lnT w="9525" cap="flat" cmpd="sng" algn="ctr">
-                      <a:solidFill>
-                        <a:srgbClr val="D5DEEC"/>
-                      </a:solidFill>
-                      <a:prstDash val="solid"/>
-                      <a:round/>
-                      <a:headEnd type="none" w="med" len="med"/>
-                      <a:tailEnd type="none" w="med" len="med"/>
-                    </a:lnT>
-                    <a:lnB w="9525" cap="flat" cmpd="sng" algn="ctr">
-                      <a:solidFill>
-                        <a:srgbClr val="D5DEEC"/>
-                      </a:solidFill>
-                      <a:prstDash val="solid"/>
-                      <a:round/>
-                      <a:headEnd type="none" w="med" len="med"/>
-                      <a:tailEnd type="none" w="med" len="med"/>
-                    </a:lnB>
-                    <a:solidFill>
-                      <a:srgbClr val="F6F8FC"/>
-                    </a:solidFill>
-                  </a:tcPr>
-                </a:tc>
-              </a:tr>
-              <a:tr h="0">
-                <a:tc>
-                  <a:txBody>
-                    <a:bodyPr/>
-                    <a:lstStyle/>
-                    <a:p>
-                      <a:pPr indent="0" marL="0">
-                        <a:buNone/>
-                      </a:pPr>
-                      <a:r>
-                        <a:rPr lang="en-US" sz="1250" b="1" dirty="0">
-                          <a:solidFill>
-                            <a:srgbClr val="C0392B"/>
-                          </a:solidFill>
-                          <a:latin typeface="Calibri" pitchFamily="34" charset="0"/>
-                          <a:ea typeface="Calibri" pitchFamily="34" charset="-122"/>
-                          <a:cs typeface="Calibri" pitchFamily="34" charset="-120"/>
-                        </a:rPr>
-                        <a:t>2 + 3 Tolak</a:t>
-                      </a:r>
-                      <a:endParaRPr lang="en-US" sz="1250" dirty="0">
-                        <a:latin typeface="Calibri" charset="0"/>
-                        <a:ea typeface="Calibri" charset="0"/>
-                        <a:cs typeface="Calibri" charset="0"/>
-                      </a:endParaRPr>
-                    </a:p>
-                  </a:txBody>
-                  <a:tcPr marL="91440" marR="91440" marT="54864" marB="54864" anchor="ctr">
-                    <a:lnL w="9525" cap="flat" cmpd="sng" algn="ctr">
-                      <a:solidFill>
-                        <a:srgbClr val="D5DEEC"/>
-                      </a:solidFill>
-                      <a:prstDash val="solid"/>
-                      <a:round/>
-                      <a:headEnd type="none" w="med" len="med"/>
-                      <a:tailEnd type="none" w="med" len="med"/>
-                    </a:lnL>
-                    <a:lnR w="9525" cap="flat" cmpd="sng" algn="ctr">
-                      <a:solidFill>
-                        <a:srgbClr val="D5DEEC"/>
-                      </a:solidFill>
-                      <a:prstDash val="solid"/>
-                      <a:round/>
-                      <a:headEnd type="none" w="med" len="med"/>
-                      <a:tailEnd type="none" w="med" len="med"/>
-                    </a:lnR>
-                    <a:lnT w="9525" cap="flat" cmpd="sng" algn="ctr">
-                      <a:solidFill>
-                        <a:srgbClr val="D5DEEC"/>
-                      </a:solidFill>
-                      <a:prstDash val="solid"/>
-                      <a:round/>
-                      <a:headEnd type="none" w="med" len="med"/>
-                      <a:tailEnd type="none" w="med" len="med"/>
-                    </a:lnT>
-                    <a:lnB w="9525" cap="flat" cmpd="sng" algn="ctr">
-                      <a:solidFill>
-                        <a:srgbClr val="D5DEEC"/>
-                      </a:solidFill>
-                      <a:prstDash val="solid"/>
-                      <a:round/>
-                      <a:headEnd type="none" w="med" len="med"/>
-                      <a:tailEnd type="none" w="med" len="med"/>
-                    </a:lnB>
-                    <a:solidFill>
-                      <a:srgbClr val="FFFFFF"/>
-                    </a:solidFill>
-                  </a:tcPr>
-                </a:tc>
-                <a:tc>
-                  <a:txBody>
-                    <a:bodyPr/>
-                    <a:lstStyle/>
-                    <a:p>
-                      <a:pPr indent="0" marL="0">
-                        <a:buNone/>
-                      </a:pPr>
-                      <a:r>
-                        <a:rPr lang="en-US" sz="1250" dirty="0">
-                          <a:solidFill>
-                            <a:srgbClr val="1B2437"/>
-                          </a:solidFill>
-                          <a:latin typeface="Calibri" pitchFamily="34" charset="0"/>
-                          <a:ea typeface="Calibri" pitchFamily="34" charset="-122"/>
-                          <a:cs typeface="Calibri" pitchFamily="34" charset="-120"/>
-                        </a:rPr>
-                        <a:t>Isi Catatan (wajib), klik Tolak</a:t>
-                      </a:r>
-                      <a:endParaRPr lang="en-US" sz="1250" dirty="0">
-                        <a:latin typeface="Calibri" charset="0"/>
-                        <a:ea typeface="Calibri" charset="0"/>
-                        <a:cs typeface="Calibri" charset="0"/>
-                      </a:endParaRPr>
-                    </a:p>
-                  </a:txBody>
-                  <a:tcPr marL="91440" marR="91440" marT="54864" marB="54864" anchor="ctr">
-                    <a:lnL w="9525" cap="flat" cmpd="sng" algn="ctr">
-                      <a:solidFill>
-                        <a:srgbClr val="D5DEEC"/>
-                      </a:solidFill>
-                      <a:prstDash val="solid"/>
-                      <a:round/>
-                      <a:headEnd type="none" w="med" len="med"/>
-                      <a:tailEnd type="none" w="med" len="med"/>
-                    </a:lnL>
-                    <a:lnR w="9525" cap="flat" cmpd="sng" algn="ctr">
-                      <a:solidFill>
-                        <a:srgbClr val="D5DEEC"/>
-                      </a:solidFill>
-                      <a:prstDash val="solid"/>
-                      <a:round/>
-                      <a:headEnd type="none" w="med" len="med"/>
-                      <a:tailEnd type="none" w="med" len="med"/>
-                    </a:lnR>
-                    <a:lnT w="9525" cap="flat" cmpd="sng" algn="ctr">
-                      <a:solidFill>
-                        <a:srgbClr val="D5DEEC"/>
-                      </a:solidFill>
-                      <a:prstDash val="solid"/>
-                      <a:round/>
-                      <a:headEnd type="none" w="med" len="med"/>
-                      <a:tailEnd type="none" w="med" len="med"/>
-                    </a:lnT>
-                    <a:lnB w="9525" cap="flat" cmpd="sng" algn="ctr">
-                      <a:solidFill>
-                        <a:srgbClr val="D5DEEC"/>
-                      </a:solidFill>
-                      <a:prstDash val="solid"/>
-                      <a:round/>
-                      <a:headEnd type="none" w="med" len="med"/>
-                      <a:tailEnd type="none" w="med" len="med"/>
-                    </a:lnB>
-                    <a:solidFill>
-                      <a:srgbClr val="FFFFFF"/>
-                    </a:solidFill>
-                  </a:tcPr>
-                </a:tc>
-                <a:tc>
-                  <a:txBody>
-                    <a:bodyPr/>
-                    <a:lstStyle/>
-                    <a:p>
-                      <a:pPr indent="0" marL="0">
-                        <a:buNone/>
-                      </a:pPr>
-                      <a:r>
-                        <a:rPr lang="en-US" sz="1250" dirty="0">
-                          <a:solidFill>
-                            <a:srgbClr val="1B2437"/>
-                          </a:solidFill>
-                          <a:latin typeface="Calibri" pitchFamily="34" charset="0"/>
-                          <a:ea typeface="Calibri" pitchFamily="34" charset="-122"/>
-                          <a:cs typeface="Calibri" pitchFamily="34" charset="-120"/>
-                        </a:rPr>
-                        <a:t>Draft SAP dihapus, status Ditolak, qty kembali menjadi sisa; alasan tampil untuk admin purchase</a:t>
-                      </a:r>
-                      <a:endParaRPr lang="en-US" sz="1250" dirty="0">
-                        <a:latin typeface="Calibri" charset="0"/>
-                        <a:ea typeface="Calibri" charset="0"/>
-                        <a:cs typeface="Calibri" charset="0"/>
-                      </a:endParaRPr>
-                    </a:p>
-                  </a:txBody>
-                  <a:tcPr marL="91440" marR="91440" marT="54864" marB="54864" anchor="ctr">
-                    <a:lnL w="9525" cap="flat" cmpd="sng" algn="ctr">
-                      <a:solidFill>
-                        <a:srgbClr val="D5DEEC"/>
-                      </a:solidFill>
-                      <a:prstDash val="solid"/>
-                      <a:round/>
-                      <a:headEnd type="none" w="med" len="med"/>
-                      <a:tailEnd type="none" w="med" len="med"/>
-                    </a:lnL>
-                    <a:lnR w="9525" cap="flat" cmpd="sng" algn="ctr">
-                      <a:solidFill>
-                        <a:srgbClr val="D5DEEC"/>
-                      </a:solidFill>
-                      <a:prstDash val="solid"/>
-                      <a:round/>
-                      <a:headEnd type="none" w="med" len="med"/>
-                      <a:tailEnd type="none" w="med" len="med"/>
-                    </a:lnR>
-                    <a:lnT w="9525" cap="flat" cmpd="sng" algn="ctr">
-                      <a:solidFill>
-                        <a:srgbClr val="D5DEEC"/>
-                      </a:solidFill>
-                      <a:prstDash val="solid"/>
-                      <a:round/>
-                      <a:headEnd type="none" w="med" len="med"/>
-                      <a:tailEnd type="none" w="med" len="med"/>
-                    </a:lnT>
-                    <a:lnB w="9525" cap="flat" cmpd="sng" algn="ctr">
-                      <a:solidFill>
-                        <a:srgbClr val="D5DEEC"/>
-                      </a:solidFill>
-                      <a:prstDash val="solid"/>
-                      <a:round/>
-                      <a:headEnd type="none" w="med" len="med"/>
-                      <a:tailEnd type="none" w="med" len="med"/>
-                    </a:lnB>
-                    <a:solidFill>
-                      <a:srgbClr val="FFFFFF"/>
-                    </a:solidFill>
-                  </a:tcPr>
-                </a:tc>
-              </a:tr>
-            </a:tbl>
-          </a:graphicData>
-        </a:graphic>
-      </p:graphicFrame>
-      <p:sp>
-        <p:nvSpPr>
-          <p:cNvPr id="15" name="Text 11"/>
-          <p:cNvSpPr txBox="1"/>
-          <p:nvPr/>
-        </p:nvSpPr>
-        <p:spPr>
-          <a:xfrm>
-            <a:off x="1600200" y="5669280"/>
-            <a:ext cx="9921240" cy="457200"/>
-          </a:xfrm>
-          <a:prstGeom prst="rect">
-            <a:avLst/>
-          </a:prstGeom>
-          <a:noFill/>
-          <a:ln/>
-        </p:spPr>
-        <p:txBody>
-          <a:bodyPr wrap="square" lIns="0" tIns="0" rIns="0" bIns="0" rtlCol="0" anchor="t"/>
-          <a:lstStyle/>
-          <a:p>
-            <a:pPr indent="0" marL="0">
-              <a:buNone/>
-            </a:pPr>
-            <a:r>
-              <a:rPr lang="en-US" sz="1250" b="1" dirty="0">
-                <a:solidFill>
-                  <a:srgbClr val="274289"/>
-                </a:solidFill>
-              </a:rPr>
-              <a:t>Bila pembuatan PO di SAP gagal: </a:t>
-            </a:r>
-            <a:pPr indent="0" marL="0">
-              <a:buNone/>
-            </a:pPr>
-            <a:r>
-              <a:rPr lang="en-US" sz="1250" dirty="0">
-                <a:solidFill>
-                  <a:srgbClr val="1B2437"/>
-                </a:solidFill>
-              </a:rPr>
-              <a:t>status kartu menjadi Gagal kirim ke SAP. Setelah penyebabnya diatasi (mis. koneksi SAP pulih), klik Setujui lagi; PO tidak terbuat dobel.</a:t>
-            </a:r>
-            <a:endParaRPr lang="en-US" sz="1250" dirty="0"/>
-          </a:p>
-        </p:txBody>
-      </p:sp>
-      <p:sp>
-        <p:nvSpPr>
-          <p:cNvPr id="25" name="Slide Number Placeholder 0"/>
-          <p:cNvSpPr>
-            <a:spLocks noGrp="1"/>
-          </p:cNvSpPr>
-          <p:nvPr>
-            <p:ph type="sldNum" sz="quarter" idx="4294967295"/>
-          </p:nvPr>
-        </p:nvSpPr>
-        <p:spPr>
-          <a:xfrm>
-            <a:off x="11109960" y="6309360"/>
-            <a:ext cx="457200" cy="274320"/>
-          </a:xfrm>
-          <a:prstGeom prst="rect">
-            <a:avLst/>
-          </a:prstGeom>
-          <a:extLst>
-            <a:ext uri="{C572A759-6A51-4108-AA02-DFA0A04FC94B}">
-              <ma14:wrappingTextBoxFlag xmlns:ma14="http://schemas.microsoft.com/office/mac/drawingml/2011/main" val="0"/>
-            </a:ext>
-          </a:extLst>
-        </p:spPr>
-        <p:txBody>
-          <a:bodyPr/>
-          <a:lstStyle>
-            <a:lvl1pPr>
-              <a:defRPr sz="1000">
-                <a:solidFill>
-                  <a:srgbClr val="5B6B86"/>
-                </a:solidFill>
-              </a:defRPr>
-            </a:lvl1pPr>
-          </a:lstStyle>
-          <a:p>
-            <a:pPr algn="r"/>
-            <a:fld id="{F7021451-1387-4CA6-816F-3879F97B5CBC}" type="slidenum">
-              <a:rPr b="0" lang="en-US"/>
-              <a:t>11</a:t>
-            </a:fld>
-            <a:endParaRPr lang="en-US"/>
-          </a:p>
-        </p:txBody>
-      </p:sp>
-    </p:spTree>
-  </p:cSld>
-  <p:clrMapOvr>
-    <a:masterClrMapping/>
-  </p:clrMapOvr>
-</p:sld>
-</file>
-
-<file path=ppt/slides/slide12.xml><?xml version="1.0" encoding="utf-8"?>
-<p:sld xmlns:a="http://schemas.openxmlformats.org/drawingml/2006/main" xmlns:r="http://schemas.openxmlformats.org/officeDocument/2006/relationships" xmlns:p="http://schemas.openxmlformats.org/presentationml/2006/main">
-  <p:cSld name="Slide 12">
-    <p:spTree>
-      <p:nvGrpSpPr>
-        <p:cNvPr id="1" name=""/>
-        <p:cNvGrpSpPr/>
-        <p:nvPr/>
-      </p:nvGrpSpPr>
-      <p:grpSpPr>
-        <a:xfrm>
-          <a:off x="0" y="0"/>
-          <a:ext cx="0" cy="0"/>
-          <a:chOff x="0" y="0"/>
-          <a:chExt cx="0" cy="0"/>
-        </a:xfrm>
-      </p:grpSpPr>
-      <p:sp>
-        <p:nvSpPr>
-          <p:cNvPr id="2" name="Text 0"/>
-          <p:cNvSpPr/>
-          <p:nvPr>
-            <p:ph idx="100" type="title" hasCustomPrompt="1"/>
-          </p:nvPr>
-        </p:nvSpPr>
-        <p:spPr>
-          <a:xfrm>
-            <a:off x="685800" y="914400"/>
-            <a:ext cx="10835640" cy="640080"/>
-          </a:xfrm>
-          <a:prstGeom prst="rect">
-            <a:avLst/>
-          </a:prstGeom>
-          <a:noFill/>
-          <a:ln/>
-        </p:spPr>
-        <p:txBody>
-          <a:bodyPr wrap="square" lIns="0" tIns="0" rIns="0" bIns="0" rtlCol="0" anchor="ctr"/>
-          <a:lstStyle/>
-          <a:p>
-            <a:pPr algn="l" indent="0" marL="0">
-              <a:buNone/>
-            </a:pPr>
-            <a:r>
-              <a:rPr lang="en-US" sz="2800" b="1" dirty="0">
-                <a:solidFill>
-                  <a:schemeClr val="tx2"/>
-                </a:solidFill>
-              </a:rPr>
               <a:t>Pesan galat dan cara mengatasinya</a:t>
             </a:r>
             <a:endParaRPr lang="en-US" sz="2800" dirty="0"/>
@@ -4795,7 +2327,7 @@
       </p:sp>
       <p:graphicFrame>
         <p:nvGraphicFramePr>
-          <p:cNvPr id="13" name="Table 0"/>
+          <p:cNvPr id="11" name="Table 0"/>
           <p:cNvGraphicFramePr>
             <a:graphicFrameLocks noGrp="1"/>
           </p:cNvGraphicFramePr>
@@ -5868,212 +3400,6 @@
                           <a:ea typeface="Calibri" pitchFamily="34" charset="-122"/>
                           <a:cs typeface="Calibri" pitchFamily="34" charset="-120"/>
                         </a:rPr>
-                        <a:t>“Purchase Request ini sudah ditutup/dibatalkan di SAP”</a:t>
-                      </a:r>
-                      <a:endParaRPr lang="en-US" sz="1250" dirty="0">
-                        <a:latin typeface="Calibri" charset="0"/>
-                        <a:ea typeface="Calibri" charset="0"/>
-                        <a:cs typeface="Calibri" charset="0"/>
-                      </a:endParaRPr>
-                    </a:p>
-                  </a:txBody>
-                  <a:tcPr marL="91440" marR="91440" marT="54864" marB="54864" anchor="ctr">
-                    <a:lnL w="9525" cap="flat" cmpd="sng" algn="ctr">
-                      <a:solidFill>
-                        <a:srgbClr val="D5DEEC"/>
-                      </a:solidFill>
-                      <a:prstDash val="solid"/>
-                      <a:round/>
-                      <a:headEnd type="none" w="med" len="med"/>
-                      <a:tailEnd type="none" w="med" len="med"/>
-                    </a:lnL>
-                    <a:lnR w="9525" cap="flat" cmpd="sng" algn="ctr">
-                      <a:solidFill>
-                        <a:srgbClr val="D5DEEC"/>
-                      </a:solidFill>
-                      <a:prstDash val="solid"/>
-                      <a:round/>
-                      <a:headEnd type="none" w="med" len="med"/>
-                      <a:tailEnd type="none" w="med" len="med"/>
-                    </a:lnR>
-                    <a:lnT w="9525" cap="flat" cmpd="sng" algn="ctr">
-                      <a:solidFill>
-                        <a:srgbClr val="D5DEEC"/>
-                      </a:solidFill>
-                      <a:prstDash val="solid"/>
-                      <a:round/>
-                      <a:headEnd type="none" w="med" len="med"/>
-                      <a:tailEnd type="none" w="med" len="med"/>
-                    </a:lnT>
-                    <a:lnB w="9525" cap="flat" cmpd="sng" algn="ctr">
-                      <a:solidFill>
-                        <a:srgbClr val="D5DEEC"/>
-                      </a:solidFill>
-                      <a:prstDash val="solid"/>
-                      <a:round/>
-                      <a:headEnd type="none" w="med" len="med"/>
-                      <a:tailEnd type="none" w="med" len="med"/>
-                    </a:lnB>
-                    <a:solidFill>
-                      <a:srgbClr val="FFFFFF"/>
-                    </a:solidFill>
-                  </a:tcPr>
-                </a:tc>
-                <a:tc>
-                  <a:txBody>
-                    <a:bodyPr/>
-                    <a:lstStyle/>
-                    <a:p>
-                      <a:pPr indent="0" marL="0">
-                        <a:buNone/>
-                      </a:pPr>
-                      <a:r>
-                        <a:rPr lang="en-US" sz="1250" dirty="0">
-                          <a:solidFill>
-                            <a:srgbClr val="1B2437"/>
-                          </a:solidFill>
-                          <a:latin typeface="Calibri" pitchFamily="34" charset="0"/>
-                          <a:ea typeface="Calibri" pitchFamily="34" charset="-122"/>
-                          <a:cs typeface="Calibri" pitchFamily="34" charset="-120"/>
-                        </a:rPr>
-                        <a:t>PUR diproses langsung di SAP</a:t>
-                      </a:r>
-                      <a:endParaRPr lang="en-US" sz="1250" dirty="0">
-                        <a:latin typeface="Calibri" charset="0"/>
-                        <a:ea typeface="Calibri" charset="0"/>
-                        <a:cs typeface="Calibri" charset="0"/>
-                      </a:endParaRPr>
-                    </a:p>
-                  </a:txBody>
-                  <a:tcPr marL="91440" marR="91440" marT="54864" marB="54864" anchor="ctr">
-                    <a:lnL w="9525" cap="flat" cmpd="sng" algn="ctr">
-                      <a:solidFill>
-                        <a:srgbClr val="D5DEEC"/>
-                      </a:solidFill>
-                      <a:prstDash val="solid"/>
-                      <a:round/>
-                      <a:headEnd type="none" w="med" len="med"/>
-                      <a:tailEnd type="none" w="med" len="med"/>
-                    </a:lnL>
-                    <a:lnR w="9525" cap="flat" cmpd="sng" algn="ctr">
-                      <a:solidFill>
-                        <a:srgbClr val="D5DEEC"/>
-                      </a:solidFill>
-                      <a:prstDash val="solid"/>
-                      <a:round/>
-                      <a:headEnd type="none" w="med" len="med"/>
-                      <a:tailEnd type="none" w="med" len="med"/>
-                    </a:lnR>
-                    <a:lnT w="9525" cap="flat" cmpd="sng" algn="ctr">
-                      <a:solidFill>
-                        <a:srgbClr val="D5DEEC"/>
-                      </a:solidFill>
-                      <a:prstDash val="solid"/>
-                      <a:round/>
-                      <a:headEnd type="none" w="med" len="med"/>
-                      <a:tailEnd type="none" w="med" len="med"/>
-                    </a:lnT>
-                    <a:lnB w="9525" cap="flat" cmpd="sng" algn="ctr">
-                      <a:solidFill>
-                        <a:srgbClr val="D5DEEC"/>
-                      </a:solidFill>
-                      <a:prstDash val="solid"/>
-                      <a:round/>
-                      <a:headEnd type="none" w="med" len="med"/>
-                      <a:tailEnd type="none" w="med" len="med"/>
-                    </a:lnB>
-                    <a:solidFill>
-                      <a:srgbClr val="FFFFFF"/>
-                    </a:solidFill>
-                  </a:tcPr>
-                </a:tc>
-                <a:tc>
-                  <a:txBody>
-                    <a:bodyPr/>
-                    <a:lstStyle/>
-                    <a:p>
-                      <a:pPr indent="0" marL="0">
-                        <a:buNone/>
-                      </a:pPr>
-                      <a:r>
-                        <a:rPr lang="en-US" sz="1250" dirty="0">
-                          <a:solidFill>
-                            <a:srgbClr val="1B2437"/>
-                          </a:solidFill>
-                          <a:latin typeface="Calibri" pitchFamily="34" charset="0"/>
-                          <a:ea typeface="Calibri" pitchFamily="34" charset="-122"/>
-                          <a:cs typeface="Calibri" pitchFamily="34" charset="-120"/>
-                        </a:rPr>
-                        <a:t>Barangnya diterima lewat tab PO dari SAP</a:t>
-                      </a:r>
-                      <a:endParaRPr lang="en-US" sz="1250" dirty="0">
-                        <a:latin typeface="Calibri" charset="0"/>
-                        <a:ea typeface="Calibri" charset="0"/>
-                        <a:cs typeface="Calibri" charset="0"/>
-                      </a:endParaRPr>
-                    </a:p>
-                  </a:txBody>
-                  <a:tcPr marL="91440" marR="91440" marT="54864" marB="54864" anchor="ctr">
-                    <a:lnL w="9525" cap="flat" cmpd="sng" algn="ctr">
-                      <a:solidFill>
-                        <a:srgbClr val="D5DEEC"/>
-                      </a:solidFill>
-                      <a:prstDash val="solid"/>
-                      <a:round/>
-                      <a:headEnd type="none" w="med" len="med"/>
-                      <a:tailEnd type="none" w="med" len="med"/>
-                    </a:lnL>
-                    <a:lnR w="9525" cap="flat" cmpd="sng" algn="ctr">
-                      <a:solidFill>
-                        <a:srgbClr val="D5DEEC"/>
-                      </a:solidFill>
-                      <a:prstDash val="solid"/>
-                      <a:round/>
-                      <a:headEnd type="none" w="med" len="med"/>
-                      <a:tailEnd type="none" w="med" len="med"/>
-                    </a:lnR>
-                    <a:lnT w="9525" cap="flat" cmpd="sng" algn="ctr">
-                      <a:solidFill>
-                        <a:srgbClr val="D5DEEC"/>
-                      </a:solidFill>
-                      <a:prstDash val="solid"/>
-                      <a:round/>
-                      <a:headEnd type="none" w="med" len="med"/>
-                      <a:tailEnd type="none" w="med" len="med"/>
-                    </a:lnT>
-                    <a:lnB w="9525" cap="flat" cmpd="sng" algn="ctr">
-                      <a:solidFill>
-                        <a:srgbClr val="D5DEEC"/>
-                      </a:solidFill>
-                      <a:prstDash val="solid"/>
-                      <a:round/>
-                      <a:headEnd type="none" w="med" len="med"/>
-                      <a:tailEnd type="none" w="med" len="med"/>
-                    </a:lnB>
-                    <a:solidFill>
-                      <a:srgbClr val="FFFFFF"/>
-                    </a:solidFill>
-                  </a:tcPr>
-                </a:tc>
-              </a:tr>
-              <a:tr h="0">
-                <a:tc>
-                  <a:txBody>
-                    <a:bodyPr/>
-                    <a:lstStyle/>
-                    <a:p>
-                      <a:pPr indent="0" marL="0">
-                        <a:buNone/>
-                      </a:pPr>
-                      <a:r>
-                        <a:rPr lang="en-US" sz="1250" dirty="0">
-                          <a:solidFill>
-                            <a:srgbClr val="1B2437"/>
-                          </a:solidFill>
-                          <a:latin typeface="Calibri" pitchFamily="34" charset="0"/>
-                          <a:ea typeface="Calibri" pitchFamily="34" charset="-122"/>
-                          <a:cs typeface="Calibri" pitchFamily="34" charset="-120"/>
-                        </a:rPr>
                         <a:t>“Daftar vendor tidak bisa dibaca dari SAP”</a:t>
                       </a:r>
                       <a:endParaRPr lang="en-US" sz="1250" dirty="0">
@@ -6121,7 +3447,7 @@
                       <a:tailEnd type="none" w="med" len="med"/>
                     </a:lnB>
                     <a:solidFill>
-                      <a:srgbClr val="F6F8FC"/>
+                      <a:srgbClr val="FFFFFF"/>
                     </a:solidFill>
                   </a:tcPr>
                 </a:tc>
@@ -6189,7 +3515,7 @@
                       <a:tailEnd type="none" w="med" len="med"/>
                     </a:lnB>
                     <a:solidFill>
-                      <a:srgbClr val="F6F8FC"/>
+                      <a:srgbClr val="FFFFFF"/>
                     </a:solidFill>
                   </a:tcPr>
                 </a:tc>
@@ -6257,7 +3583,7 @@
                       <a:tailEnd type="none" w="med" len="med"/>
                     </a:lnB>
                     <a:solidFill>
-                      <a:srgbClr val="F6F8FC"/>
+                      <a:srgbClr val="FFFFFF"/>
                     </a:solidFill>
                   </a:tcPr>
                 </a:tc>
@@ -6327,7 +3653,7 @@
                       <a:tailEnd type="none" w="med" len="med"/>
                     </a:lnB>
                     <a:solidFill>
-                      <a:srgbClr val="FFFFFF"/>
+                      <a:srgbClr val="F6F8FC"/>
                     </a:solidFill>
                   </a:tcPr>
                 </a:tc>
@@ -6395,7 +3721,7 @@
                       <a:tailEnd type="none" w="med" len="med"/>
                     </a:lnB>
                     <a:solidFill>
-                      <a:srgbClr val="FFFFFF"/>
+                      <a:srgbClr val="F6F8FC"/>
                     </a:solidFill>
                   </a:tcPr>
                 </a:tc>
@@ -6463,7 +3789,7 @@
                       <a:tailEnd type="none" w="med" len="med"/>
                     </a:lnB>
                     <a:solidFill>
-                      <a:srgbClr val="FFFFFF"/>
+                      <a:srgbClr val="F6F8FC"/>
                     </a:solidFill>
                   </a:tcPr>
                 </a:tc>
@@ -6511,7 +3837,7 @@
             <a:pPr algn="r"/>
             <a:fld id="{F7021451-1387-4CA6-816F-3879F97B5CBC}" type="slidenum">
               <a:rPr b="0" lang="en-US"/>
-              <a:t>12</a:t>
+              <a:t>10</a:t>
             </a:fld>
             <a:endParaRPr lang="en-US"/>
           </a:p>
@@ -6525,9 +3851,9 @@
 </p:sld>
 </file>
 
-<file path=ppt/slides/slide13.xml><?xml version="1.0" encoding="utf-8"?>
+<file path=ppt/slides/slide11.xml><?xml version="1.0" encoding="utf-8"?>
 <p:sld xmlns:a="http://schemas.openxmlformats.org/drawingml/2006/main" xmlns:r="http://schemas.openxmlformats.org/officeDocument/2006/relationships" xmlns:p="http://schemas.openxmlformats.org/presentationml/2006/main">
-  <p:cSld name="Slide 13">
+  <p:cSld name="Slide 11">
     <p:spTree>
       <p:nvGrpSpPr>
         <p:cNvPr id="1" name=""/>
@@ -6742,7 +4068,7 @@
                   <a:srgbClr val="1B2437"/>
                 </a:solidFill>
               </a:rPr>
-              <a:t>Bawaannya dari master barang SAP. Ubah per baris, atau minta admin menambah aturan VAT I-B → VAT I-E.</a:t>
+              <a:t>Bawaannya dari master barang SAP. Ubah kolom Pajak per baris bila tidak sesuai.</a:t>
             </a:r>
             <a:endParaRPr lang="en-US" sz="1350" dirty="0"/>
           </a:p>
@@ -7064,7 +4390,7 @@
                   <a:srgbClr val="274289"/>
                 </a:solidFill>
               </a:rPr>
-              <a:t>Di mana menerima barang setelah PO final?</a:t>
+              <a:t>Bisakah satu PUR dibagi ke beberapa vendor?</a:t>
             </a:r>
             <a:endParaRPr lang="en-US" sz="1350" dirty="0"/>
           </a:p>
@@ -7078,7 +4404,7 @@
                   <a:srgbClr val="1B2437"/>
                 </a:solidFill>
               </a:rPr>
-              <a:t>Tab GRPO (admin DC), dijelaskan di panduan GRPO.</a:t>
+              <a:t>Bisa: buat PO pertama, lalu + Buat PO lagi untuk sisanya. Qty tidak bisa dobel.</a:t>
             </a:r>
             <a:endParaRPr lang="en-US" sz="1350" dirty="0"/>
           </a:p>
@@ -7123,7 +4449,7 @@
             <a:pPr algn="r"/>
             <a:fld id="{F7021451-1387-4CA6-816F-3879F97B5CBC}" type="slidenum">
               <a:rPr b="0" lang="en-US"/>
-              <a:t>13</a:t>
+              <a:t>11</a:t>
             </a:fld>
             <a:endParaRPr lang="en-US"/>
           </a:p>
@@ -7137,9 +4463,9 @@
 </p:sld>
 </file>
 
-<file path=ppt/slides/slide14.xml><?xml version="1.0" encoding="utf-8"?>
+<file path=ppt/slides/slide12.xml><?xml version="1.0" encoding="utf-8"?>
 <p:sld xmlns:a="http://schemas.openxmlformats.org/drawingml/2006/main" xmlns:r="http://schemas.openxmlformats.org/officeDocument/2006/relationships" xmlns:p="http://schemas.openxmlformats.org/presentationml/2006/main">
-  <p:cSld name="Slide 14">
+  <p:cSld name="Slide 12">
     <p:spTree>
       <p:nvGrpSpPr>
         <p:cNvPr id="1" name=""/>
@@ -7222,7 +4548,7 @@
                   <a:srgbClr val="FFFFFF"/>
                 </a:solidFill>
               </a:rPr>
-              <a:t>Video tutorial dan manual book tersedia untuk dipelajari ulang.</a:t>
+              <a:t>Video tutorial tersedia untuk dipelajari ulang.</a:t>
             </a:r>
             <a:endParaRPr lang="en-US" sz="1800" dirty="0"/>
           </a:p>
@@ -7899,7 +5225,7 @@
                   <a:srgbClr val="5B6B86"/>
                 </a:solidFill>
               </a:rPr>
-              <a:t> (semua permintaan di tahap PO). Akun admin boleh melakukan semua tahap.</a:t>
+              <a:t> (semua permintaan di tahap PO).</a:t>
             </a:r>
             <a:endParaRPr lang="en-US" sz="1300" dirty="0"/>
           </a:p>
@@ -8423,14 +5749,230 @@
       </p:sp>
       <p:sp>
         <p:nvSpPr>
-          <p:cNvPr id="14" name="Panah"/>
+          <p:cNvPr id="14" name="Text 12"/>
+          <p:cNvSpPr txBox="1"/>
+          <p:nvPr/>
+        </p:nvSpPr>
+        <p:spPr>
+          <a:xfrm>
+            <a:off x="4453128" y="1755648"/>
+            <a:ext cx="1097280" cy="274320"/>
+          </a:xfrm>
+          <a:prstGeom prst="rect">
+            <a:avLst/>
+          </a:prstGeom>
+          <a:noFill/>
+          <a:ln/>
+        </p:spPr>
+        <p:txBody>
+          <a:bodyPr wrap="square" lIns="0" tIns="0" rIns="0" bIns="0" rtlCol="0" anchor="t"/>
+          <a:lstStyle/>
+          <a:p>
+            <a:pPr algn="ctr" indent="0" marL="0">
+              <a:buNone/>
+            </a:pPr>
+            <a:r>
+              <a:rPr lang="en-US" sz="1100" dirty="0">
+                <a:solidFill>
+                  <a:srgbClr val="5B6B86"/>
+                </a:solidFill>
+              </a:rPr>
+              <a:t>Ajukan</a:t>
+            </a:r>
+            <a:endParaRPr lang="en-US" sz="1100" dirty="0"/>
+          </a:p>
+        </p:txBody>
+      </p:sp>
+      <p:sp>
+        <p:nvSpPr>
+          <p:cNvPr id="15" name="Text 13"/>
+          <p:cNvSpPr txBox="1"/>
+          <p:nvPr/>
+        </p:nvSpPr>
+        <p:spPr>
+          <a:xfrm>
+            <a:off x="6400800" y="1755648"/>
+            <a:ext cx="1920240" cy="274320"/>
+          </a:xfrm>
+          <a:prstGeom prst="rect">
+            <a:avLst/>
+          </a:prstGeom>
+          <a:noFill/>
+          <a:ln/>
+        </p:spPr>
+        <p:txBody>
+          <a:bodyPr wrap="square" lIns="0" tIns="0" rIns="0" bIns="0" rtlCol="0" anchor="t"/>
+          <a:lstStyle/>
+          <a:p>
+            <a:pPr algn="ctr" indent="0" marL="0">
+              <a:buNone/>
+            </a:pPr>
+            <a:r>
+              <a:rPr lang="en-US" sz="1100" dirty="0">
+                <a:solidFill>
+                  <a:srgbClr val="5B6B86"/>
+                </a:solidFill>
+              </a:rPr>
+              <a:t>Setujui level terakhir</a:t>
+            </a:r>
+            <a:endParaRPr lang="en-US" sz="1100" dirty="0"/>
+          </a:p>
+        </p:txBody>
+      </p:sp>
+      <p:sp>
+        <p:nvSpPr>
+          <p:cNvPr id="16" name="Status Ditolak"/>
           <p:cNvSpPr/>
           <p:nvPr/>
         </p:nvSpPr>
         <p:spPr>
           <a:xfrm>
-            <a:off x="9345168" y="2514600"/>
-            <a:ext cx="201168" cy="0"/>
+            <a:off x="5129784" y="3703320"/>
+            <a:ext cx="1965960" cy="914400"/>
+          </a:xfrm>
+          <a:prstGeom prst="roundRect">
+            <a:avLst>
+              <a:gd name="adj" fmla="val 10000"/>
+            </a:avLst>
+          </a:prstGeom>
+          <a:solidFill>
+            <a:srgbClr val="FBECEA"/>
+          </a:solidFill>
+          <a:ln w="9525">
+            <a:solidFill>
+              <a:srgbClr val="FBECEA"/>
+            </a:solidFill>
+            <a:prstDash val="solid"/>
+          </a:ln>
+          <a:effectLst>
+            <a:outerShdw sx="100000" sy="100000" kx="0" ky="0" algn="bl" rotWithShape="0" blurRad="101600" dist="25400" dir="5400000">
+              <a:srgbClr val="274289">
+                <a:alpha val="12000"/>
+              </a:srgbClr>
+            </a:outerShdw>
+          </a:effectLst>
+        </p:spPr>
+      </p:sp>
+      <p:sp>
+        <p:nvSpPr>
+          <p:cNvPr id="17" name="Text 15"/>
+          <p:cNvSpPr txBox="1"/>
+          <p:nvPr/>
+        </p:nvSpPr>
+        <p:spPr>
+          <a:xfrm>
+            <a:off x="5202936" y="3776472"/>
+            <a:ext cx="1819656" cy="768096"/>
+          </a:xfrm>
+          <a:prstGeom prst="rect">
+            <a:avLst/>
+          </a:prstGeom>
+          <a:noFill/>
+          <a:ln/>
+        </p:spPr>
+        <p:txBody>
+          <a:bodyPr wrap="square" lIns="0" tIns="0" rIns="0" bIns="0" rtlCol="0" anchor="ctr"/>
+          <a:lstStyle/>
+          <a:p>
+            <a:pPr algn="ctr" indent="0" marL="0">
+              <a:buNone/>
+            </a:pPr>
+            <a:r>
+              <a:rPr lang="en-US" sz="1500" b="1" dirty="0">
+                <a:solidFill>
+                  <a:srgbClr val="C0392B"/>
+                </a:solidFill>
+              </a:rPr>
+              <a:t>Ditolak</a:t>
+            </a:r>
+            <a:endParaRPr lang="en-US" sz="1500" dirty="0"/>
+          </a:p>
+          <a:p>
+            <a:pPr algn="ctr" indent="0" marL="0">
+              <a:buNone/>
+            </a:pPr>
+            <a:r>
+              <a:rPr lang="en-US" sz="1150" dirty="0">
+                <a:solidFill>
+                  <a:srgbClr val="5B6B86"/>
+                </a:solidFill>
+              </a:rPr>
+              <a:t>Draft SAP dihapus, qty kembali</a:t>
+            </a:r>
+            <a:endParaRPr lang="en-US" sz="1500" dirty="0"/>
+          </a:p>
+        </p:txBody>
+      </p:sp>
+      <p:sp>
+        <p:nvSpPr>
+          <p:cNvPr id="18" name="Ke ditolak"/>
+          <p:cNvSpPr/>
+          <p:nvPr/>
+        </p:nvSpPr>
+        <p:spPr>
+          <a:xfrm>
+            <a:off x="6112764" y="2999232"/>
+            <a:ext cx="0" cy="676656"/>
+          </a:xfrm>
+          <a:prstGeom prst="line">
+            <a:avLst/>
+          </a:prstGeom>
+          <a:noFill/>
+          <a:ln w="25400">
+            <a:solidFill>
+              <a:srgbClr val="C0392B"/>
+            </a:solidFill>
+            <a:prstDash val="dash"/>
+            <a:tailEnd type="triangle"/>
+          </a:ln>
+        </p:spPr>
+      </p:sp>
+      <p:sp>
+        <p:nvSpPr>
+          <p:cNvPr id="19" name="Text 17"/>
+          <p:cNvSpPr txBox="1"/>
+          <p:nvPr/>
+        </p:nvSpPr>
+        <p:spPr>
+          <a:xfrm>
+            <a:off x="6204204" y="3200400"/>
+            <a:ext cx="1463040" cy="274320"/>
+          </a:xfrm>
+          <a:prstGeom prst="rect">
+            <a:avLst/>
+          </a:prstGeom>
+          <a:noFill/>
+          <a:ln/>
+        </p:spPr>
+        <p:txBody>
+          <a:bodyPr wrap="square" lIns="0" tIns="0" rIns="0" bIns="0" rtlCol="0" anchor="t"/>
+          <a:lstStyle/>
+          <a:p>
+            <a:pPr indent="0" marL="0">
+              <a:buNone/>
+            </a:pPr>
+            <a:r>
+              <a:rPr lang="en-US" sz="1100" dirty="0">
+                <a:solidFill>
+                  <a:srgbClr val="C0392B"/>
+                </a:solidFill>
+              </a:rPr>
+              <a:t>Tolak + alasan</a:t>
+            </a:r>
+            <a:endParaRPr lang="en-US" sz="1100" dirty="0"/>
+          </a:p>
+        </p:txBody>
+      </p:sp>
+      <p:sp>
+        <p:nvSpPr>
+          <p:cNvPr id="20" name="Ajukan ulang"/>
+          <p:cNvSpPr/>
+          <p:nvPr/>
+        </p:nvSpPr>
+        <p:spPr>
+          <a:xfrm>
+            <a:off x="3890772" y="4160520"/>
+            <a:ext cx="1239012" cy="0"/>
           </a:xfrm>
           <a:prstGeom prst="line">
             <a:avLst/>
@@ -8440,20 +5982,79 @@
             <a:solidFill>
               <a:srgbClr val="3D6FC2"/>
             </a:solidFill>
-            <a:prstDash val="solid"/>
-            <a:tailEnd type="triangle"/>
+            <a:prstDash val="dash"/>
+            <a:headEnd type="triangle"/>
           </a:ln>
         </p:spPr>
       </p:sp>
       <p:sp>
         <p:nvSpPr>
-          <p:cNvPr id="15" name="Status Terima barang"/>
+          <p:cNvPr id="21" name="Ajukan ulang naik"/>
           <p:cNvSpPr/>
           <p:nvPr/>
         </p:nvSpPr>
         <p:spPr>
           <a:xfrm>
-            <a:off x="9573768" y="2057400"/>
+            <a:off x="3890772" y="2999232"/>
+            <a:ext cx="0" cy="1161288"/>
+          </a:xfrm>
+          <a:prstGeom prst="line">
+            <a:avLst/>
+          </a:prstGeom>
+          <a:noFill/>
+          <a:ln w="25400">
+            <a:solidFill>
+              <a:srgbClr val="3D6FC2"/>
+            </a:solidFill>
+            <a:prstDash val="dash"/>
+          </a:ln>
+        </p:spPr>
+      </p:sp>
+      <p:sp>
+        <p:nvSpPr>
+          <p:cNvPr id="22" name="Text 20"/>
+          <p:cNvSpPr txBox="1"/>
+          <p:nvPr/>
+        </p:nvSpPr>
+        <p:spPr>
+          <a:xfrm>
+            <a:off x="3963924" y="4233672"/>
+            <a:ext cx="1051560" cy="274320"/>
+          </a:xfrm>
+          <a:prstGeom prst="rect">
+            <a:avLst/>
+          </a:prstGeom>
+          <a:noFill/>
+          <a:ln/>
+        </p:spPr>
+        <p:txBody>
+          <a:bodyPr wrap="square" lIns="0" tIns="0" rIns="0" bIns="0" rtlCol="0" anchor="t"/>
+          <a:lstStyle/>
+          <a:p>
+            <a:pPr indent="0" marL="0">
+              <a:buNone/>
+            </a:pPr>
+            <a:r>
+              <a:rPr lang="en-US" sz="1000" dirty="0">
+                <a:solidFill>
+                  <a:srgbClr val="3D6FC2"/>
+                </a:solidFill>
+              </a:rPr>
+              <a:t>Ubah &amp; ajukan ulang</a:t>
+            </a:r>
+            <a:endParaRPr lang="en-US" sz="1000" dirty="0"/>
+          </a:p>
+        </p:txBody>
+      </p:sp>
+      <p:sp>
+        <p:nvSpPr>
+          <p:cNvPr id="23" name="Status Dibatalkan"/>
+          <p:cNvSpPr/>
+          <p:nvPr/>
+        </p:nvSpPr>
+        <p:spPr>
+          <a:xfrm>
+            <a:off x="685800" y="3703320"/>
             <a:ext cx="1965960" cy="914400"/>
           </a:xfrm>
           <a:prstGeom prst="roundRect">
@@ -8481,13 +6082,13 @@
       </p:sp>
       <p:sp>
         <p:nvSpPr>
-          <p:cNvPr id="16" name="Text 14"/>
+          <p:cNvPr id="24" name="Text 22"/>
           <p:cNvSpPr txBox="1"/>
           <p:nvPr/>
         </p:nvSpPr>
         <p:spPr>
           <a:xfrm>
-            <a:off x="9646920" y="2130552"/>
+            <a:off x="758952" y="3776472"/>
             <a:ext cx="1819656" cy="768096"/>
           </a:xfrm>
           <a:prstGeom prst="rect">
@@ -8506,10 +6107,10 @@
             <a:r>
               <a:rPr lang="en-US" sz="1500" b="1" dirty="0">
                 <a:solidFill>
-                  <a:srgbClr val="274289"/>
+                  <a:srgbClr val="5B6B86"/>
                 </a:solidFill>
               </a:rPr>
-              <a:t>Terima barang</a:t>
+              <a:t>Dibatalkan</a:t>
             </a:r>
             <a:endParaRPr lang="en-US" sz="1500" dirty="0"/>
           </a:p>
@@ -8523,7 +6124,7 @@
                   <a:srgbClr val="5B6B86"/>
                 </a:solidFill>
               </a:rPr>
-              <a:t>GRPO (panduan terpisah)</a:t>
+              <a:t>qty kembali ke sisa PUR</a:t>
             </a:r>
             <a:endParaRPr lang="en-US" sz="1500" dirty="0"/>
           </a:p>
@@ -8531,13 +6132,37 @@
       </p:sp>
       <p:sp>
         <p:nvSpPr>
-          <p:cNvPr id="17" name="Text 15"/>
+          <p:cNvPr id="25" name="Ke dibatalkan"/>
+          <p:cNvSpPr/>
+          <p:nvPr/>
+        </p:nvSpPr>
+        <p:spPr>
+          <a:xfrm>
+            <a:off x="1668780" y="2999232"/>
+            <a:ext cx="0" cy="676656"/>
+          </a:xfrm>
+          <a:prstGeom prst="line">
+            <a:avLst/>
+          </a:prstGeom>
+          <a:noFill/>
+          <a:ln w="19050">
+            <a:solidFill>
+              <a:srgbClr val="5B6B86"/>
+            </a:solidFill>
+            <a:prstDash val="dash"/>
+            <a:tailEnd type="triangle"/>
+          </a:ln>
+        </p:spPr>
+      </p:sp>
+      <p:sp>
+        <p:nvSpPr>
+          <p:cNvPr id="26" name="Text 24"/>
           <p:cNvSpPr txBox="1"/>
           <p:nvPr/>
         </p:nvSpPr>
         <p:spPr>
           <a:xfrm>
-            <a:off x="4453128" y="1755648"/>
+            <a:off x="1760220" y="3200400"/>
             <a:ext cx="1097280" cy="274320"/>
           </a:xfrm>
           <a:prstGeom prst="rect">
@@ -8550,7 +6175,7 @@
           <a:bodyPr wrap="square" lIns="0" tIns="0" rIns="0" bIns="0" rtlCol="0" anchor="t"/>
           <a:lstStyle/>
           <a:p>
-            <a:pPr algn="ctr" indent="0" marL="0">
+            <a:pPr indent="0" marL="0">
               <a:buNone/>
             </a:pPr>
             <a:r>
@@ -8559,7 +6184,7 @@
                   <a:srgbClr val="5B6B86"/>
                 </a:solidFill>
               </a:rPr>
-              <a:t>Ajukan</a:t>
+              <a:t>Batalkan</a:t>
             </a:r>
             <a:endParaRPr lang="en-US" sz="1100" dirty="0"/>
           </a:p>
@@ -8567,281 +6192,18 @@
       </p:sp>
       <p:sp>
         <p:nvSpPr>
-          <p:cNvPr id="18" name="Text 16"/>
-          <p:cNvSpPr txBox="1"/>
-          <p:nvPr/>
-        </p:nvSpPr>
-        <p:spPr>
-          <a:xfrm>
-            <a:off x="6400800" y="1755648"/>
-            <a:ext cx="1920240" cy="274320"/>
-          </a:xfrm>
-          <a:prstGeom prst="rect">
-            <a:avLst/>
-          </a:prstGeom>
-          <a:noFill/>
-          <a:ln/>
-        </p:spPr>
-        <p:txBody>
-          <a:bodyPr wrap="square" lIns="0" tIns="0" rIns="0" bIns="0" rtlCol="0" anchor="t"/>
-          <a:lstStyle/>
-          <a:p>
-            <a:pPr algn="ctr" indent="0" marL="0">
-              <a:buNone/>
-            </a:pPr>
-            <a:r>
-              <a:rPr lang="en-US" sz="1100" dirty="0">
-                <a:solidFill>
-                  <a:srgbClr val="5B6B86"/>
-                </a:solidFill>
-              </a:rPr>
-              <a:t>Setujui level terakhir</a:t>
-            </a:r>
-            <a:endParaRPr lang="en-US" sz="1100" dirty="0"/>
-          </a:p>
-        </p:txBody>
-      </p:sp>
-      <p:sp>
-        <p:nvSpPr>
-          <p:cNvPr id="19" name="Status Ditolak"/>
+          <p:cNvPr id="27" name="Catatan final"/>
           <p:cNvSpPr/>
           <p:nvPr/>
         </p:nvSpPr>
         <p:spPr>
           <a:xfrm>
-            <a:off x="5129784" y="3703320"/>
-            <a:ext cx="1965960" cy="914400"/>
+            <a:off x="9555480" y="2057400"/>
+            <a:ext cx="1965960" cy="2560320"/>
           </a:xfrm>
           <a:prstGeom prst="roundRect">
             <a:avLst>
-              <a:gd name="adj" fmla="val 10000"/>
-            </a:avLst>
-          </a:prstGeom>
-          <a:solidFill>
-            <a:srgbClr val="FBECEA"/>
-          </a:solidFill>
-          <a:ln w="9525">
-            <a:solidFill>
-              <a:srgbClr val="FBECEA"/>
-            </a:solidFill>
-            <a:prstDash val="solid"/>
-          </a:ln>
-          <a:effectLst>
-            <a:outerShdw sx="100000" sy="100000" kx="0" ky="0" algn="bl" rotWithShape="0" blurRad="101600" dist="25400" dir="5400000">
-              <a:srgbClr val="274289">
-                <a:alpha val="12000"/>
-              </a:srgbClr>
-            </a:outerShdw>
-          </a:effectLst>
-        </p:spPr>
-      </p:sp>
-      <p:sp>
-        <p:nvSpPr>
-          <p:cNvPr id="20" name="Text 18"/>
-          <p:cNvSpPr txBox="1"/>
-          <p:nvPr/>
-        </p:nvSpPr>
-        <p:spPr>
-          <a:xfrm>
-            <a:off x="5202936" y="3776472"/>
-            <a:ext cx="1819656" cy="768096"/>
-          </a:xfrm>
-          <a:prstGeom prst="rect">
-            <a:avLst/>
-          </a:prstGeom>
-          <a:noFill/>
-          <a:ln/>
-        </p:spPr>
-        <p:txBody>
-          <a:bodyPr wrap="square" lIns="0" tIns="0" rIns="0" bIns="0" rtlCol="0" anchor="ctr"/>
-          <a:lstStyle/>
-          <a:p>
-            <a:pPr algn="ctr" indent="0" marL="0">
-              <a:buNone/>
-            </a:pPr>
-            <a:r>
-              <a:rPr lang="en-US" sz="1500" b="1" dirty="0">
-                <a:solidFill>
-                  <a:srgbClr val="C0392B"/>
-                </a:solidFill>
-              </a:rPr>
-              <a:t>Ditolak</a:t>
-            </a:r>
-            <a:endParaRPr lang="en-US" sz="1500" dirty="0"/>
-          </a:p>
-          <a:p>
-            <a:pPr algn="ctr" indent="0" marL="0">
-              <a:buNone/>
-            </a:pPr>
-            <a:r>
-              <a:rPr lang="en-US" sz="1150" dirty="0">
-                <a:solidFill>
-                  <a:srgbClr val="5B6B86"/>
-                </a:solidFill>
-              </a:rPr>
-              <a:t>Draft SAP dihapus, qty kembali</a:t>
-            </a:r>
-            <a:endParaRPr lang="en-US" sz="1500" dirty="0"/>
-          </a:p>
-        </p:txBody>
-      </p:sp>
-      <p:sp>
-        <p:nvSpPr>
-          <p:cNvPr id="21" name="Ke ditolak"/>
-          <p:cNvSpPr/>
-          <p:nvPr/>
-        </p:nvSpPr>
-        <p:spPr>
-          <a:xfrm>
-            <a:off x="6112764" y="2999232"/>
-            <a:ext cx="0" cy="676656"/>
-          </a:xfrm>
-          <a:prstGeom prst="line">
-            <a:avLst/>
-          </a:prstGeom>
-          <a:noFill/>
-          <a:ln w="25400">
-            <a:solidFill>
-              <a:srgbClr val="C0392B"/>
-            </a:solidFill>
-            <a:prstDash val="dash"/>
-            <a:tailEnd type="triangle"/>
-          </a:ln>
-        </p:spPr>
-      </p:sp>
-      <p:sp>
-        <p:nvSpPr>
-          <p:cNvPr id="22" name="Text 20"/>
-          <p:cNvSpPr txBox="1"/>
-          <p:nvPr/>
-        </p:nvSpPr>
-        <p:spPr>
-          <a:xfrm>
-            <a:off x="6204204" y="3200400"/>
-            <a:ext cx="1463040" cy="274320"/>
-          </a:xfrm>
-          <a:prstGeom prst="rect">
-            <a:avLst/>
-          </a:prstGeom>
-          <a:noFill/>
-          <a:ln/>
-        </p:spPr>
-        <p:txBody>
-          <a:bodyPr wrap="square" lIns="0" tIns="0" rIns="0" bIns="0" rtlCol="0" anchor="t"/>
-          <a:lstStyle/>
-          <a:p>
-            <a:pPr indent="0" marL="0">
-              <a:buNone/>
-            </a:pPr>
-            <a:r>
-              <a:rPr lang="en-US" sz="1100" dirty="0">
-                <a:solidFill>
-                  <a:srgbClr val="C0392B"/>
-                </a:solidFill>
-              </a:rPr>
-              <a:t>Tolak + alasan</a:t>
-            </a:r>
-            <a:endParaRPr lang="en-US" sz="1100" dirty="0"/>
-          </a:p>
-        </p:txBody>
-      </p:sp>
-      <p:sp>
-        <p:nvSpPr>
-          <p:cNvPr id="23" name="Ajukan ulang"/>
-          <p:cNvSpPr/>
-          <p:nvPr/>
-        </p:nvSpPr>
-        <p:spPr>
-          <a:xfrm>
-            <a:off x="3890772" y="4160520"/>
-            <a:ext cx="1239012" cy="0"/>
-          </a:xfrm>
-          <a:prstGeom prst="line">
-            <a:avLst/>
-          </a:prstGeom>
-          <a:noFill/>
-          <a:ln w="25400">
-            <a:solidFill>
-              <a:srgbClr val="3D6FC2"/>
-            </a:solidFill>
-            <a:prstDash val="dash"/>
-            <a:headEnd type="triangle"/>
-          </a:ln>
-        </p:spPr>
-      </p:sp>
-      <p:sp>
-        <p:nvSpPr>
-          <p:cNvPr id="24" name="Ajukan ulang naik"/>
-          <p:cNvSpPr/>
-          <p:nvPr/>
-        </p:nvSpPr>
-        <p:spPr>
-          <a:xfrm>
-            <a:off x="3890772" y="2999232"/>
-            <a:ext cx="0" cy="1161288"/>
-          </a:xfrm>
-          <a:prstGeom prst="line">
-            <a:avLst/>
-          </a:prstGeom>
-          <a:noFill/>
-          <a:ln w="25400">
-            <a:solidFill>
-              <a:srgbClr val="3D6FC2"/>
-            </a:solidFill>
-            <a:prstDash val="dash"/>
-          </a:ln>
-        </p:spPr>
-      </p:sp>
-      <p:sp>
-        <p:nvSpPr>
-          <p:cNvPr id="25" name="Text 23"/>
-          <p:cNvSpPr txBox="1"/>
-          <p:nvPr/>
-        </p:nvSpPr>
-        <p:spPr>
-          <a:xfrm>
-            <a:off x="3963924" y="4233672"/>
-            <a:ext cx="1051560" cy="274320"/>
-          </a:xfrm>
-          <a:prstGeom prst="rect">
-            <a:avLst/>
-          </a:prstGeom>
-          <a:noFill/>
-          <a:ln/>
-        </p:spPr>
-        <p:txBody>
-          <a:bodyPr wrap="square" lIns="0" tIns="0" rIns="0" bIns="0" rtlCol="0" anchor="t"/>
-          <a:lstStyle/>
-          <a:p>
-            <a:pPr indent="0" marL="0">
-              <a:buNone/>
-            </a:pPr>
-            <a:r>
-              <a:rPr lang="en-US" sz="1000" dirty="0">
-                <a:solidFill>
-                  <a:srgbClr val="3D6FC2"/>
-                </a:solidFill>
-              </a:rPr>
-              <a:t>Ubah &amp; ajukan ulang</a:t>
-            </a:r>
-            <a:endParaRPr lang="en-US" sz="1000" dirty="0"/>
-          </a:p>
-        </p:txBody>
-      </p:sp>
-      <p:sp>
-        <p:nvSpPr>
-          <p:cNvPr id="26" name="Status Dibatalkan"/>
-          <p:cNvSpPr/>
-          <p:nvPr/>
-        </p:nvSpPr>
-        <p:spPr>
-          <a:xfrm>
-            <a:off x="685800" y="3703320"/>
-            <a:ext cx="1965960" cy="914400"/>
-          </a:xfrm>
-          <a:prstGeom prst="roundRect">
-            <a:avLst>
-              <a:gd name="adj" fmla="val 10000"/>
+              <a:gd name="adj" fmla="val 4651"/>
             </a:avLst>
           </a:prstGeom>
           <a:solidFill>
@@ -8864,158 +6226,14 @@
       </p:sp>
       <p:sp>
         <p:nvSpPr>
-          <p:cNvPr id="27" name="Text 25"/>
+          <p:cNvPr id="28" name="Text 26"/>
           <p:cNvSpPr txBox="1"/>
           <p:nvPr/>
         </p:nvSpPr>
         <p:spPr>
           <a:xfrm>
-            <a:off x="758952" y="3776472"/>
-            <a:ext cx="1819656" cy="768096"/>
-          </a:xfrm>
-          <a:prstGeom prst="rect">
-            <a:avLst/>
-          </a:prstGeom>
-          <a:noFill/>
-          <a:ln/>
-        </p:spPr>
-        <p:txBody>
-          <a:bodyPr wrap="square" lIns="0" tIns="0" rIns="0" bIns="0" rtlCol="0" anchor="ctr"/>
-          <a:lstStyle/>
-          <a:p>
-            <a:pPr algn="ctr" indent="0" marL="0">
-              <a:buNone/>
-            </a:pPr>
-            <a:r>
-              <a:rPr lang="en-US" sz="1500" b="1" dirty="0">
-                <a:solidFill>
-                  <a:srgbClr val="5B6B86"/>
-                </a:solidFill>
-              </a:rPr>
-              <a:t>Dibatalkan</a:t>
-            </a:r>
-            <a:endParaRPr lang="en-US" sz="1500" dirty="0"/>
-          </a:p>
-          <a:p>
-            <a:pPr algn="ctr" indent="0" marL="0">
-              <a:buNone/>
-            </a:pPr>
-            <a:r>
-              <a:rPr lang="en-US" sz="1150" dirty="0">
-                <a:solidFill>
-                  <a:srgbClr val="5B6B86"/>
-                </a:solidFill>
-              </a:rPr>
-              <a:t>qty kembali ke sisa PUR</a:t>
-            </a:r>
-            <a:endParaRPr lang="en-US" sz="1500" dirty="0"/>
-          </a:p>
-        </p:txBody>
-      </p:sp>
-      <p:sp>
-        <p:nvSpPr>
-          <p:cNvPr id="28" name="Ke dibatalkan"/>
-          <p:cNvSpPr/>
-          <p:nvPr/>
-        </p:nvSpPr>
-        <p:spPr>
-          <a:xfrm>
-            <a:off x="1668780" y="2999232"/>
-            <a:ext cx="0" cy="676656"/>
-          </a:xfrm>
-          <a:prstGeom prst="line">
-            <a:avLst/>
-          </a:prstGeom>
-          <a:noFill/>
-          <a:ln w="19050">
-            <a:solidFill>
-              <a:srgbClr val="5B6B86"/>
-            </a:solidFill>
-            <a:prstDash val="dash"/>
-            <a:tailEnd type="triangle"/>
-          </a:ln>
-        </p:spPr>
-      </p:sp>
-      <p:sp>
-        <p:nvSpPr>
-          <p:cNvPr id="29" name="Text 27"/>
-          <p:cNvSpPr txBox="1"/>
-          <p:nvPr/>
-        </p:nvSpPr>
-        <p:spPr>
-          <a:xfrm>
-            <a:off x="1760220" y="3200400"/>
-            <a:ext cx="1097280" cy="274320"/>
-          </a:xfrm>
-          <a:prstGeom prst="rect">
-            <a:avLst/>
-          </a:prstGeom>
-          <a:noFill/>
-          <a:ln/>
-        </p:spPr>
-        <p:txBody>
-          <a:bodyPr wrap="square" lIns="0" tIns="0" rIns="0" bIns="0" rtlCol="0" anchor="t"/>
-          <a:lstStyle/>
-          <a:p>
-            <a:pPr indent="0" marL="0">
-              <a:buNone/>
-            </a:pPr>
-            <a:r>
-              <a:rPr lang="en-US" sz="1100" dirty="0">
-                <a:solidFill>
-                  <a:srgbClr val="5B6B86"/>
-                </a:solidFill>
-              </a:rPr>
-              <a:t>Batalkan</a:t>
-            </a:r>
-            <a:endParaRPr lang="en-US" sz="1100" dirty="0"/>
-          </a:p>
-        </p:txBody>
-      </p:sp>
-      <p:sp>
-        <p:nvSpPr>
-          <p:cNvPr id="30" name="Catatan final"/>
-          <p:cNvSpPr/>
-          <p:nvPr/>
-        </p:nvSpPr>
-        <p:spPr>
-          <a:xfrm>
-            <a:off x="9098280" y="3703320"/>
-            <a:ext cx="2423160" cy="1143000"/>
-          </a:xfrm>
-          <a:prstGeom prst="roundRect">
-            <a:avLst>
-              <a:gd name="adj" fmla="val 8000"/>
-            </a:avLst>
-          </a:prstGeom>
-          <a:solidFill>
-            <a:srgbClr val="EEF3FA"/>
-          </a:solidFill>
-          <a:ln w="9525">
-            <a:solidFill>
-              <a:srgbClr val="EEF3FA"/>
-            </a:solidFill>
-            <a:prstDash val="solid"/>
-          </a:ln>
-          <a:effectLst>
-            <a:outerShdw sx="100000" sy="100000" kx="0" ky="0" algn="bl" rotWithShape="0" blurRad="101600" dist="25400" dir="5400000">
-              <a:srgbClr val="274289">
-                <a:alpha val="12000"/>
-              </a:srgbClr>
-            </a:outerShdw>
-          </a:effectLst>
-        </p:spPr>
-      </p:sp>
-      <p:sp>
-        <p:nvSpPr>
-          <p:cNvPr id="31" name="Text 29"/>
-          <p:cNvSpPr txBox="1"/>
-          <p:nvPr/>
-        </p:nvSpPr>
-        <p:spPr>
-          <a:xfrm>
-            <a:off x="9235440" y="3794760"/>
-            <a:ext cx="2194560" cy="1005840"/>
+            <a:off x="9692640" y="2194560"/>
+            <a:ext cx="1691640" cy="2286000"/>
           </a:xfrm>
           <a:prstGeom prst="rect">
             <a:avLst/>
@@ -9158,7 +6376,7 @@
                   <a:schemeClr val="tx2"/>
                 </a:solidFill>
               </a:rPr>
-              <a:t>Persiapan (admin, sekali): Level approval</a:t>
+              <a:t>Admin purchase · 1. Menemukan permintaan yang siap di-PO</a:t>
             </a:r>
             <a:endParaRPr lang="en-US" sz="2800" dirty="0"/>
           </a:p>
@@ -9166,18 +6384,18 @@
       </p:sp>
       <p:sp>
         <p:nvSpPr>
-          <p:cNvPr id="3" name="Level approval, tab Admin purchase bingkai"/>
+          <p:cNvPr id="3" name="Tab PO dan panel Purchase Order bingkai"/>
           <p:cNvSpPr/>
           <p:nvPr/>
         </p:nvSpPr>
         <p:spPr>
           <a:xfrm>
-            <a:off x="621792" y="1740428"/>
-            <a:ext cx="5385816" cy="3102824"/>
+            <a:off x="621792" y="1677162"/>
+            <a:ext cx="6437376" cy="4509516"/>
           </a:xfrm>
           <a:prstGeom prst="roundRect">
             <a:avLst>
-              <a:gd name="adj" fmla="val 2947"/>
+              <a:gd name="adj" fmla="val 2028"/>
             </a:avLst>
           </a:prstGeom>
           <a:solidFill>
@@ -9200,7 +6418,7 @@
       </p:sp>
       <p:pic>
         <p:nvPicPr>
-          <p:cNvPr id="4" name="Level approval, tab Admin purchase" descr="Layar PID POS: Level approval, tab Admin purchase">    </p:cNvPr>
+          <p:cNvPr id="4" name="Tab PO dan panel Purchase Order" descr="Layar PID POS: Tab PO dan panel Purchase Order">    </p:cNvPr>
           <p:cNvPicPr>
             <a:picLocks noChangeAspect="1"/>
           </p:cNvPicPr>
@@ -9214,8 +6432,8 @@
         </p:blipFill>
         <p:spPr>
           <a:xfrm>
-            <a:off x="685800" y="1804436"/>
-            <a:ext cx="5257800" cy="2974808"/>
+            <a:off x="685800" y="1741170"/>
+            <a:ext cx="6309360" cy="4381500"/>
           </a:xfrm>
           <a:prstGeom prst="rect">
             <a:avLst/>
@@ -9224,18 +6442,18 @@
       </p:pic>
       <p:sp>
         <p:nvSpPr>
-          <p:cNvPr id="5" name="Sorotan Level approval, tab Admin purchase 1"/>
+          <p:cNvPr id="5" name="Sorotan Tab PO dan panel Purchase Order 1"/>
           <p:cNvSpPr/>
           <p:nvPr/>
         </p:nvSpPr>
         <p:spPr>
           <a:xfrm>
-            <a:off x="2364847" y="2238215"/>
-            <a:ext cx="958837" cy="322366"/>
+            <a:off x="3334004" y="2359279"/>
+            <a:ext cx="455041" cy="230124"/>
           </a:xfrm>
           <a:prstGeom prst="roundRect">
             <a:avLst>
-              <a:gd name="adj" fmla="val 14183"/>
+              <a:gd name="adj" fmla="val 19868"/>
             </a:avLst>
           </a:prstGeom>
           <a:ln w="28575">
@@ -9254,7 +6472,7 @@
         </p:nvSpPr>
         <p:spPr>
           <a:xfrm>
-            <a:off x="2236831" y="2110199"/>
+            <a:off x="3205988" y="2231263"/>
             <a:ext cx="292608" cy="292608"/>
           </a:xfrm>
           <a:prstGeom prst="ellipse">
@@ -9279,7 +6497,7 @@
         </p:nvSpPr>
         <p:spPr>
           <a:xfrm>
-            <a:off x="2236831" y="2110199"/>
+            <a:off x="3205988" y="2231263"/>
             <a:ext cx="292608" cy="292608"/>
           </a:xfrm>
           <a:prstGeom prst="rect">
@@ -9309,18 +6527,18 @@
       </p:sp>
       <p:sp>
         <p:nvSpPr>
-          <p:cNvPr id="8" name="Sorotan Level approval, tab Admin purchase 2"/>
+          <p:cNvPr id="8" name="Sorotan Tab PO dan panel Purchase Order 2"/>
           <p:cNvSpPr/>
           <p:nvPr/>
         </p:nvSpPr>
         <p:spPr>
           <a:xfrm>
-            <a:off x="732162" y="3492707"/>
-            <a:ext cx="2259450" cy="608317"/>
+            <a:off x="751840" y="3282315"/>
+            <a:ext cx="1760728" cy="490093"/>
           </a:xfrm>
           <a:prstGeom prst="roundRect">
             <a:avLst>
-              <a:gd name="adj" fmla="val 7516"/>
+              <a:gd name="adj" fmla="val 9329"/>
             </a:avLst>
           </a:prstGeom>
           <a:ln w="28575">
@@ -9339,7 +6557,7 @@
         </p:nvSpPr>
         <p:spPr>
           <a:xfrm>
-            <a:off x="604146" y="3364691"/>
+            <a:off x="623824" y="3154299"/>
             <a:ext cx="292608" cy="292608"/>
           </a:xfrm>
           <a:prstGeom prst="ellipse">
@@ -9364,7 +6582,7 @@
         </p:nvSpPr>
         <p:spPr>
           <a:xfrm>
-            <a:off x="604146" y="3364691"/>
+            <a:off x="623824" y="3154299"/>
             <a:ext cx="292608" cy="292608"/>
           </a:xfrm>
           <a:prstGeom prst="rect">
@@ -9394,76 +6612,18 @@
       </p:sp>
       <p:sp>
         <p:nvSpPr>
-          <p:cNvPr id="11" name="Level approval, tab Approval PO bingkai"/>
+          <p:cNvPr id="11" name="Sorotan Tab PO dan panel Purchase Order 3"/>
           <p:cNvSpPr/>
           <p:nvPr/>
         </p:nvSpPr>
         <p:spPr>
           <a:xfrm>
-            <a:off x="6199632" y="1809610"/>
-            <a:ext cx="5385816" cy="2964461"/>
+            <a:off x="2700147" y="4263771"/>
+            <a:ext cx="4056634" cy="431673"/>
           </a:xfrm>
           <a:prstGeom prst="roundRect">
             <a:avLst>
-              <a:gd name="adj" fmla="val 3085"/>
-            </a:avLst>
-          </a:prstGeom>
-          <a:solidFill>
-            <a:srgbClr val="E4EAF4"/>
-          </a:solidFill>
-          <a:ln w="9525">
-            <a:solidFill>
-              <a:srgbClr val="E4EAF4"/>
-            </a:solidFill>
-            <a:prstDash val="solid"/>
-          </a:ln>
-          <a:effectLst>
-            <a:outerShdw sx="100000" sy="100000" kx="0" ky="0" algn="bl" rotWithShape="0" blurRad="101600" dist="25400" dir="5400000">
-              <a:srgbClr val="274289">
-                <a:alpha val="12000"/>
-              </a:srgbClr>
-            </a:outerShdw>
-          </a:effectLst>
-        </p:spPr>
-      </p:sp>
-      <p:pic>
-        <p:nvPicPr>
-          <p:cNvPr id="12" name="Level approval, tab Approval PO" descr="Layar PID POS: Level approval, tab Approval PO">    </p:cNvPr>
-          <p:cNvPicPr>
-            <a:picLocks noChangeAspect="1"/>
-          </p:cNvPicPr>
-          <p:nvPr/>
-        </p:nvPicPr>
-        <p:blipFill>
-          <a:blip r:embed="rId2"/>
-          <a:stretch>
-            <a:fillRect/>
-          </a:stretch>
-        </p:blipFill>
-        <p:spPr>
-          <a:xfrm>
-            <a:off x="6263640" y="1873618"/>
-            <a:ext cx="5257800" cy="2836445"/>
-          </a:xfrm>
-          <a:prstGeom prst="rect">
-            <a:avLst/>
-          </a:prstGeom>
-        </p:spPr>
-      </p:pic>
-      <p:sp>
-        <p:nvSpPr>
-          <p:cNvPr id="13" name="Sorotan Level approval, tab Approval PO 1"/>
-          <p:cNvSpPr/>
-          <p:nvPr/>
-        </p:nvSpPr>
-        <p:spPr>
-          <a:xfrm>
-            <a:off x="8865108" y="2307396"/>
-            <a:ext cx="811249" cy="322366"/>
-          </a:xfrm>
-          <a:prstGeom prst="roundRect">
-            <a:avLst>
-              <a:gd name="adj" fmla="val 14183"/>
+              <a:gd name="adj" fmla="val 10591"/>
             </a:avLst>
           </a:prstGeom>
           <a:ln w="28575">
@@ -9476,13 +6636,13 @@
       </p:sp>
       <p:sp>
         <p:nvSpPr>
-          <p:cNvPr id="14" name="Nomor 3"/>
+          <p:cNvPr id="12" name="Nomor 3"/>
           <p:cNvSpPr/>
           <p:nvPr/>
         </p:nvSpPr>
         <p:spPr>
           <a:xfrm>
-            <a:off x="8737092" y="2179380"/>
+            <a:off x="2572131" y="4135755"/>
             <a:ext cx="292608" cy="292608"/>
           </a:xfrm>
           <a:prstGeom prst="ellipse">
@@ -9501,13 +6661,13 @@
       </p:sp>
       <p:sp>
         <p:nvSpPr>
-          <p:cNvPr id="15" name="Text 11"/>
+          <p:cNvPr id="13" name="Text 10"/>
           <p:cNvSpPr txBox="1"/>
           <p:nvPr/>
         </p:nvSpPr>
         <p:spPr>
           <a:xfrm>
-            <a:off x="8737092" y="2179380"/>
+            <a:off x="2572131" y="4135755"/>
             <a:ext cx="292608" cy="292608"/>
           </a:xfrm>
           <a:prstGeom prst="rect">
@@ -9537,18 +6697,18 @@
       </p:sp>
       <p:sp>
         <p:nvSpPr>
-          <p:cNvPr id="16" name="Sorotan Level approval, tab Approval PO 2"/>
+          <p:cNvPr id="14" name="Sorotan Tab PO dan panel Purchase Order 4"/>
           <p:cNvSpPr/>
           <p:nvPr/>
         </p:nvSpPr>
         <p:spPr>
           <a:xfrm>
-            <a:off x="6374571" y="4221420"/>
-            <a:ext cx="1161769" cy="377711"/>
+            <a:off x="6237478" y="3992118"/>
+            <a:ext cx="519303" cy="235966"/>
           </a:xfrm>
           <a:prstGeom prst="roundRect">
             <a:avLst>
-              <a:gd name="adj" fmla="val 12104"/>
+              <a:gd name="adj" fmla="val 19376"/>
             </a:avLst>
           </a:prstGeom>
           <a:ln w="28575">
@@ -9561,13 +6721,13 @@
       </p:sp>
       <p:sp>
         <p:nvSpPr>
-          <p:cNvPr id="17" name="Nomor 4"/>
+          <p:cNvPr id="15" name="Nomor 4"/>
           <p:cNvSpPr/>
           <p:nvPr/>
         </p:nvSpPr>
         <p:spPr>
           <a:xfrm>
-            <a:off x="6246555" y="4093404"/>
+            <a:off x="6109462" y="3864102"/>
             <a:ext cx="292608" cy="292608"/>
           </a:xfrm>
           <a:prstGeom prst="ellipse">
@@ -9586,13 +6746,13 @@
       </p:sp>
       <p:sp>
         <p:nvSpPr>
-          <p:cNvPr id="18" name="Text 14"/>
+          <p:cNvPr id="16" name="Text 13"/>
           <p:cNvSpPr txBox="1"/>
           <p:nvPr/>
         </p:nvSpPr>
         <p:spPr>
           <a:xfrm>
-            <a:off x="6246555" y="4093404"/>
+            <a:off x="6109462" y="3864102"/>
             <a:ext cx="292608" cy="292608"/>
           </a:xfrm>
           <a:prstGeom prst="rect">
@@ -9622,1759 +6782,6 @@
       </p:sp>
       <p:sp>
         <p:nvSpPr>
-          <p:cNvPr id="19" name="Sorotan Level approval, tab Approval PO 3"/>
-          <p:cNvSpPr/>
-          <p:nvPr/>
-        </p:nvSpPr>
-        <p:spPr>
-          <a:xfrm>
-            <a:off x="10456284" y="4221420"/>
-            <a:ext cx="963449" cy="377711"/>
-          </a:xfrm>
-          <a:prstGeom prst="roundRect">
-            <a:avLst>
-              <a:gd name="adj" fmla="val 12104"/>
-            </a:avLst>
-          </a:prstGeom>
-          <a:ln w="28575">
-            <a:solidFill>
-              <a:srgbClr val="F2762E"/>
-            </a:solidFill>
-            <a:prstDash val="solid"/>
-          </a:ln>
-        </p:spPr>
-      </p:sp>
-      <p:sp>
-        <p:nvSpPr>
-          <p:cNvPr id="20" name="Nomor 5"/>
-          <p:cNvSpPr/>
-          <p:nvPr/>
-        </p:nvSpPr>
-        <p:spPr>
-          <a:xfrm>
-            <a:off x="10328268" y="4093404"/>
-            <a:ext cx="292608" cy="292608"/>
-          </a:xfrm>
-          <a:prstGeom prst="ellipse">
-            <a:avLst/>
-          </a:prstGeom>
-          <a:solidFill>
-            <a:srgbClr val="F2762E"/>
-          </a:solidFill>
-          <a:ln w="19050">
-            <a:solidFill>
-              <a:srgbClr val="FFFFFF"/>
-            </a:solidFill>
-            <a:prstDash val="solid"/>
-          </a:ln>
-        </p:spPr>
-      </p:sp>
-      <p:sp>
-        <p:nvSpPr>
-          <p:cNvPr id="21" name="Text 17"/>
-          <p:cNvSpPr txBox="1"/>
-          <p:nvPr/>
-        </p:nvSpPr>
-        <p:spPr>
-          <a:xfrm>
-            <a:off x="10328268" y="4093404"/>
-            <a:ext cx="292608" cy="292608"/>
-          </a:xfrm>
-          <a:prstGeom prst="rect">
-            <a:avLst/>
-          </a:prstGeom>
-          <a:noFill/>
-          <a:ln/>
-        </p:spPr>
-        <p:txBody>
-          <a:bodyPr wrap="square" lIns="0" tIns="0" rIns="0" bIns="0" rtlCol="0" anchor="ctr"/>
-          <a:lstStyle/>
-          <a:p>
-            <a:pPr algn="ctr" indent="0" marL="0">
-              <a:buNone/>
-            </a:pPr>
-            <a:r>
-              <a:rPr lang="en-US" sz="1100" b="1" dirty="0">
-                <a:solidFill>
-                  <a:srgbClr val="FFFFFF"/>
-                </a:solidFill>
-              </a:rPr>
-              <a:t>5</a:t>
-            </a:r>
-            <a:endParaRPr lang="en-US" sz="1100" dirty="0"/>
-          </a:p>
-        </p:txBody>
-      </p:sp>
-      <p:sp>
-        <p:nvSpPr>
-          <p:cNvPr id="22" name="Text 18"/>
-          <p:cNvSpPr txBox="1"/>
-          <p:nvPr/>
-        </p:nvSpPr>
-        <p:spPr>
-          <a:xfrm>
-            <a:off x="1600200" y="4983480"/>
-            <a:ext cx="9921240" cy="822960"/>
-          </a:xfrm>
-          <a:prstGeom prst="rect">
-            <a:avLst/>
-          </a:prstGeom>
-          <a:noFill/>
-          <a:ln/>
-        </p:spPr>
-        <p:txBody>
-          <a:bodyPr wrap="square" lIns="0" tIns="0" rIns="0" bIns="0" rtlCol="0" anchor="t"/>
-          <a:lstStyle/>
-          <a:p>
-            <a:pPr indent="0" marL="0">
-              <a:buNone/>
-            </a:pPr>
-            <a:r>
-              <a:rPr lang="en-US" sz="1300" b="1" dirty="0">
-                <a:solidFill>
-                  <a:srgbClr val="274289"/>
-                </a:solidFill>
-              </a:rPr>
-              <a:t>Permintaan DC → tombol Level approval (kanan atas).</a:t>
-            </a:r>
-            <a:endParaRPr lang="en-US" sz="1300" dirty="0"/>
-          </a:p>
-          <a:p>
-            <a:pPr indent="0" marL="0">
-              <a:buNone/>
-            </a:pPr>
-            <a:r>
-              <a:rPr lang="en-US" sz="1300" dirty="0">
-                <a:solidFill>
-                  <a:srgbClr val="1B2437"/>
-                </a:solidFill>
-              </a:rPr>
-              <a:t>1 Tab Admin purchase · 2 centang akun yang boleh membuat dan mengajukan PO (kosong = penyetuju PUR level terakhir bertindak sebagai admin purchase) · 3 Tab Approval PO · 4 Tambah level, satu baris per level · 5 Simpan level.</a:t>
-            </a:r>
-            <a:endParaRPr lang="en-US" sz="1300" dirty="0"/>
-          </a:p>
-        </p:txBody>
-      </p:sp>
-      <p:sp>
-        <p:nvSpPr>
-          <p:cNvPr id="25" name="Slide Number Placeholder 0"/>
-          <p:cNvSpPr>
-            <a:spLocks noGrp="1"/>
-          </p:cNvSpPr>
-          <p:nvPr>
-            <p:ph type="sldNum" sz="quarter" idx="4294967295"/>
-          </p:nvPr>
-        </p:nvSpPr>
-        <p:spPr>
-          <a:xfrm>
-            <a:off x="11109960" y="6309360"/>
-            <a:ext cx="457200" cy="274320"/>
-          </a:xfrm>
-          <a:prstGeom prst="rect">
-            <a:avLst/>
-          </a:prstGeom>
-          <a:extLst>
-            <a:ext uri="{C572A759-6A51-4108-AA02-DFA0A04FC94B}">
-              <ma14:wrappingTextBoxFlag xmlns:ma14="http://schemas.microsoft.com/office/mac/drawingml/2011/main" val="0"/>
-            </a:ext>
-          </a:extLst>
-        </p:spPr>
-        <p:txBody>
-          <a:bodyPr/>
-          <a:lstStyle>
-            <a:lvl1pPr>
-              <a:defRPr sz="1000">
-                <a:solidFill>
-                  <a:srgbClr val="5B6B86"/>
-                </a:solidFill>
-              </a:defRPr>
-            </a:lvl1pPr>
-          </a:lstStyle>
-          <a:p>
-            <a:pPr algn="r"/>
-            <a:fld id="{F7021451-1387-4CA6-816F-3879F97B5CBC}" type="slidenum">
-              <a:rPr b="0" lang="en-US"/>
-              <a:t>4</a:t>
-            </a:fld>
-            <a:endParaRPr lang="en-US"/>
-          </a:p>
-        </p:txBody>
-      </p:sp>
-    </p:spTree>
-  </p:cSld>
-  <p:clrMapOvr>
-    <a:masterClrMapping/>
-  </p:clrMapOvr>
-</p:sld>
-</file>
-
-<file path=ppt/slides/slide5.xml><?xml version="1.0" encoding="utf-8"?>
-<p:sld xmlns:a="http://schemas.openxmlformats.org/drawingml/2006/main" xmlns:r="http://schemas.openxmlformats.org/officeDocument/2006/relationships" xmlns:p="http://schemas.openxmlformats.org/presentationml/2006/main">
-  <p:cSld name="Slide 5">
-    <p:spTree>
-      <p:nvGrpSpPr>
-        <p:cNvPr id="1" name=""/>
-        <p:cNvGrpSpPr/>
-        <p:nvPr/>
-      </p:nvGrpSpPr>
-      <p:grpSpPr>
-        <a:xfrm>
-          <a:off x="0" y="0"/>
-          <a:ext cx="0" cy="0"/>
-          <a:chOff x="0" y="0"/>
-          <a:chExt cx="0" cy="0"/>
-        </a:xfrm>
-      </p:grpSpPr>
-      <p:sp>
-        <p:nvSpPr>
-          <p:cNvPr id="2" name="Text 0"/>
-          <p:cNvSpPr/>
-          <p:nvPr>
-            <p:ph idx="100" type="title" hasCustomPrompt="1"/>
-          </p:nvPr>
-        </p:nvSpPr>
-        <p:spPr>
-          <a:xfrm>
-            <a:off x="685800" y="914400"/>
-            <a:ext cx="10835640" cy="640080"/>
-          </a:xfrm>
-          <a:prstGeom prst="rect">
-            <a:avLst/>
-          </a:prstGeom>
-          <a:noFill/>
-          <a:ln/>
-        </p:spPr>
-        <p:txBody>
-          <a:bodyPr wrap="square" lIns="0" tIns="0" rIns="0" bIns="0" rtlCol="0" anchor="ctr"/>
-          <a:lstStyle/>
-          <a:p>
-            <a:pPr algn="l" indent="0" marL="0">
-              <a:buNone/>
-            </a:pPr>
-            <a:r>
-              <a:rPr lang="en-US" sz="2800" b="1" dirty="0">
-                <a:solidFill>
-                  <a:schemeClr val="tx2"/>
-                </a:solidFill>
-              </a:rPr>
-              <a:t>Persiapan: aturan pajak pembelian</a:t>
-            </a:r>
-            <a:endParaRPr lang="en-US" sz="2800" dirty="0"/>
-          </a:p>
-        </p:txBody>
-      </p:sp>
-      <p:sp>
-        <p:nvSpPr>
-          <p:cNvPr id="3" name="Aturan pajak pembelian bingkai"/>
-          <p:cNvSpPr/>
-          <p:nvPr/>
-        </p:nvSpPr>
-        <p:spPr>
-          <a:xfrm>
-            <a:off x="621792" y="1713187"/>
-            <a:ext cx="10963656" cy="2425786"/>
-          </a:xfrm>
-          <a:prstGeom prst="roundRect">
-            <a:avLst>
-              <a:gd name="adj" fmla="val 3769"/>
-            </a:avLst>
-          </a:prstGeom>
-          <a:solidFill>
-            <a:srgbClr val="E4EAF4"/>
-          </a:solidFill>
-          <a:ln w="9525">
-            <a:solidFill>
-              <a:srgbClr val="E4EAF4"/>
-            </a:solidFill>
-            <a:prstDash val="solid"/>
-          </a:ln>
-          <a:effectLst>
-            <a:outerShdw sx="100000" sy="100000" kx="0" ky="0" algn="bl" rotWithShape="0" blurRad="101600" dist="25400" dir="5400000">
-              <a:srgbClr val="274289">
-                <a:alpha val="12000"/>
-              </a:srgbClr>
-            </a:outerShdw>
-          </a:effectLst>
-        </p:spPr>
-      </p:sp>
-      <p:pic>
-        <p:nvPicPr>
-          <p:cNvPr id="4" name="Aturan pajak pembelian" descr="Layar PID POS: Aturan pajak pembelian">    </p:cNvPr>
-          <p:cNvPicPr>
-            <a:picLocks noChangeAspect="1"/>
-          </p:cNvPicPr>
-          <p:nvPr/>
-        </p:nvPicPr>
-        <p:blipFill>
-          <a:blip r:embed="rId1"/>
-          <a:stretch>
-            <a:fillRect/>
-          </a:stretch>
-        </p:blipFill>
-        <p:spPr>
-          <a:xfrm>
-            <a:off x="685800" y="1777195"/>
-            <a:ext cx="10835640" cy="2297770"/>
-          </a:xfrm>
-          <a:prstGeom prst="rect">
-            <a:avLst/>
-          </a:prstGeom>
-        </p:spPr>
-      </p:pic>
-      <p:graphicFrame>
-        <p:nvGraphicFramePr>
-          <p:cNvPr id="6" name="Table 0"/>
-          <p:cNvGraphicFramePr>
-            <a:graphicFrameLocks noGrp="1"/>
-          </p:cNvGraphicFramePr>
-          <p:nvPr>
-            <p:extLst>
-              <p:ext uri="{D42A27DB-BD31-4B8C-83A1-F6EECF244321}">
-                <p14:modId xmlns:p14="http://schemas.microsoft.com/office/powerpoint/2010/main" val="1579011935"/>
-              </p:ext>
-            </p:extLst>
-          </p:nvPr>
-        </p:nvGraphicFramePr>
-        <p:xfrm>
-          <a:off x="1600200" y="4206240"/>
-          <a:ext cx="9921240" cy="914400"/>
-        </p:xfrm>
-        <a:graphic>
-          <a:graphicData uri="http://schemas.openxmlformats.org/drawingml/2006/table">
-            <a:tbl>
-              <a:tblPr/>
-              <a:tblGrid>
-                <a:gridCol w="2011680"/>
-                <a:gridCol w="3749040"/>
-                <a:gridCol w="4160520"/>
-              </a:tblGrid>
-              <a:tr h="0">
-                <a:tc>
-                  <a:txBody>
-                    <a:bodyPr/>
-                    <a:lstStyle/>
-                    <a:p>
-                      <a:pPr indent="0" marL="0">
-                        <a:buNone/>
-                      </a:pPr>
-                      <a:r>
-                        <a:rPr lang="en-US" sz="1200" b="1" dirty="0">
-                          <a:solidFill>
-                            <a:srgbClr val="FFFFFF"/>
-                          </a:solidFill>
-                          <a:latin typeface="Calibri" pitchFamily="34" charset="0"/>
-                          <a:ea typeface="Calibri" pitchFamily="34" charset="-122"/>
-                          <a:cs typeface="Calibri" pitchFamily="34" charset="-120"/>
-                        </a:rPr>
-                        <a:t>Isian</a:t>
-                      </a:r>
-                      <a:endParaRPr lang="en-US" sz="1200" dirty="0">
-                        <a:latin typeface="Calibri" charset="0"/>
-                        <a:ea typeface="Calibri" charset="0"/>
-                        <a:cs typeface="Calibri" charset="0"/>
-                      </a:endParaRPr>
-                    </a:p>
-                  </a:txBody>
-                  <a:tcPr marL="91440" marR="91440" marT="54864" marB="54864" anchor="ctr">
-                    <a:lnL w="9525" cap="flat" cmpd="sng" algn="ctr">
-                      <a:solidFill>
-                        <a:srgbClr val="D5DEEC"/>
-                      </a:solidFill>
-                      <a:prstDash val="solid"/>
-                      <a:round/>
-                      <a:headEnd type="none" w="med" len="med"/>
-                      <a:tailEnd type="none" w="med" len="med"/>
-                    </a:lnL>
-                    <a:lnR w="9525" cap="flat" cmpd="sng" algn="ctr">
-                      <a:solidFill>
-                        <a:srgbClr val="D5DEEC"/>
-                      </a:solidFill>
-                      <a:prstDash val="solid"/>
-                      <a:round/>
-                      <a:headEnd type="none" w="med" len="med"/>
-                      <a:tailEnd type="none" w="med" len="med"/>
-                    </a:lnR>
-                    <a:lnT w="9525" cap="flat" cmpd="sng" algn="ctr">
-                      <a:solidFill>
-                        <a:srgbClr val="D5DEEC"/>
-                      </a:solidFill>
-                      <a:prstDash val="solid"/>
-                      <a:round/>
-                      <a:headEnd type="none" w="med" len="med"/>
-                      <a:tailEnd type="none" w="med" len="med"/>
-                    </a:lnT>
-                    <a:lnB w="9525" cap="flat" cmpd="sng" algn="ctr">
-                      <a:solidFill>
-                        <a:srgbClr val="D5DEEC"/>
-                      </a:solidFill>
-                      <a:prstDash val="solid"/>
-                      <a:round/>
-                      <a:headEnd type="none" w="med" len="med"/>
-                      <a:tailEnd type="none" w="med" len="med"/>
-                    </a:lnB>
-                    <a:solidFill>
-                      <a:srgbClr val="274289"/>
-                    </a:solidFill>
-                  </a:tcPr>
-                </a:tc>
-                <a:tc>
-                  <a:txBody>
-                    <a:bodyPr/>
-                    <a:lstStyle/>
-                    <a:p>
-                      <a:pPr indent="0" marL="0">
-                        <a:buNone/>
-                      </a:pPr>
-                      <a:r>
-                        <a:rPr lang="en-US" sz="1200" b="1" dirty="0">
-                          <a:solidFill>
-                            <a:srgbClr val="FFFFFF"/>
-                          </a:solidFill>
-                          <a:latin typeface="Calibri" pitchFamily="34" charset="0"/>
-                          <a:ea typeface="Calibri" pitchFamily="34" charset="-122"/>
-                          <a:cs typeface="Calibri" pitchFamily="34" charset="-120"/>
-                        </a:rPr>
-                        <a:t>Pilihan</a:t>
-                      </a:r>
-                      <a:endParaRPr lang="en-US" sz="1200" dirty="0">
-                        <a:latin typeface="Calibri" charset="0"/>
-                        <a:ea typeface="Calibri" charset="0"/>
-                        <a:cs typeface="Calibri" charset="0"/>
-                      </a:endParaRPr>
-                    </a:p>
-                  </a:txBody>
-                  <a:tcPr marL="91440" marR="91440" marT="54864" marB="54864" anchor="ctr">
-                    <a:lnL w="9525" cap="flat" cmpd="sng" algn="ctr">
-                      <a:solidFill>
-                        <a:srgbClr val="D5DEEC"/>
-                      </a:solidFill>
-                      <a:prstDash val="solid"/>
-                      <a:round/>
-                      <a:headEnd type="none" w="med" len="med"/>
-                      <a:tailEnd type="none" w="med" len="med"/>
-                    </a:lnL>
-                    <a:lnR w="9525" cap="flat" cmpd="sng" algn="ctr">
-                      <a:solidFill>
-                        <a:srgbClr val="D5DEEC"/>
-                      </a:solidFill>
-                      <a:prstDash val="solid"/>
-                      <a:round/>
-                      <a:headEnd type="none" w="med" len="med"/>
-                      <a:tailEnd type="none" w="med" len="med"/>
-                    </a:lnR>
-                    <a:lnT w="9525" cap="flat" cmpd="sng" algn="ctr">
-                      <a:solidFill>
-                        <a:srgbClr val="D5DEEC"/>
-                      </a:solidFill>
-                      <a:prstDash val="solid"/>
-                      <a:round/>
-                      <a:headEnd type="none" w="med" len="med"/>
-                      <a:tailEnd type="none" w="med" len="med"/>
-                    </a:lnT>
-                    <a:lnB w="9525" cap="flat" cmpd="sng" algn="ctr">
-                      <a:solidFill>
-                        <a:srgbClr val="D5DEEC"/>
-                      </a:solidFill>
-                      <a:prstDash val="solid"/>
-                      <a:round/>
-                      <a:headEnd type="none" w="med" len="med"/>
-                      <a:tailEnd type="none" w="med" len="med"/>
-                    </a:lnB>
-                    <a:solidFill>
-                      <a:srgbClr val="274289"/>
-                    </a:solidFill>
-                  </a:tcPr>
-                </a:tc>
-                <a:tc>
-                  <a:txBody>
-                    <a:bodyPr/>
-                    <a:lstStyle/>
-                    <a:p>
-                      <a:pPr indent="0" marL="0">
-                        <a:buNone/>
-                      </a:pPr>
-                      <a:r>
-                        <a:rPr lang="en-US" sz="1200" b="1" dirty="0">
-                          <a:solidFill>
-                            <a:srgbClr val="FFFFFF"/>
-                          </a:solidFill>
-                          <a:latin typeface="Calibri" pitchFamily="34" charset="0"/>
-                          <a:ea typeface="Calibri" pitchFamily="34" charset="-122"/>
-                          <a:cs typeface="Calibri" pitchFamily="34" charset="-120"/>
-                        </a:rPr>
-                        <a:t>Dipakai bila</a:t>
-                      </a:r>
-                      <a:endParaRPr lang="en-US" sz="1200" dirty="0">
-                        <a:latin typeface="Calibri" charset="0"/>
-                        <a:ea typeface="Calibri" charset="0"/>
-                        <a:cs typeface="Calibri" charset="0"/>
-                      </a:endParaRPr>
-                    </a:p>
-                  </a:txBody>
-                  <a:tcPr marL="91440" marR="91440" marT="54864" marB="54864" anchor="ctr">
-                    <a:lnL w="9525" cap="flat" cmpd="sng" algn="ctr">
-                      <a:solidFill>
-                        <a:srgbClr val="D5DEEC"/>
-                      </a:solidFill>
-                      <a:prstDash val="solid"/>
-                      <a:round/>
-                      <a:headEnd type="none" w="med" len="med"/>
-                      <a:tailEnd type="none" w="med" len="med"/>
-                    </a:lnL>
-                    <a:lnR w="9525" cap="flat" cmpd="sng" algn="ctr">
-                      <a:solidFill>
-                        <a:srgbClr val="D5DEEC"/>
-                      </a:solidFill>
-                      <a:prstDash val="solid"/>
-                      <a:round/>
-                      <a:headEnd type="none" w="med" len="med"/>
-                      <a:tailEnd type="none" w="med" len="med"/>
-                    </a:lnR>
-                    <a:lnT w="9525" cap="flat" cmpd="sng" algn="ctr">
-                      <a:solidFill>
-                        <a:srgbClr val="D5DEEC"/>
-                      </a:solidFill>
-                      <a:prstDash val="solid"/>
-                      <a:round/>
-                      <a:headEnd type="none" w="med" len="med"/>
-                      <a:tailEnd type="none" w="med" len="med"/>
-                    </a:lnT>
-                    <a:lnB w="9525" cap="flat" cmpd="sng" algn="ctr">
-                      <a:solidFill>
-                        <a:srgbClr val="D5DEEC"/>
-                      </a:solidFill>
-                      <a:prstDash val="solid"/>
-                      <a:round/>
-                      <a:headEnd type="none" w="med" len="med"/>
-                      <a:tailEnd type="none" w="med" len="med"/>
-                    </a:lnB>
-                    <a:solidFill>
-                      <a:srgbClr val="274289"/>
-                    </a:solidFill>
-                  </a:tcPr>
-                </a:tc>
-              </a:tr>
-              <a:tr h="0">
-                <a:tc>
-                  <a:txBody>
-                    <a:bodyPr/>
-                    <a:lstStyle/>
-                    <a:p>
-                      <a:pPr indent="0" marL="0">
-                        <a:buNone/>
-                      </a:pPr>
-                      <a:r>
-                        <a:rPr lang="en-US" sz="1200" dirty="0">
-                          <a:solidFill>
-                            <a:srgbClr val="1B2437"/>
-                          </a:solidFill>
-                          <a:latin typeface="Calibri" pitchFamily="34" charset="0"/>
-                          <a:ea typeface="Calibri" pitchFamily="34" charset="-122"/>
-                          <a:cs typeface="Calibri" pitchFamily="34" charset="-120"/>
-                        </a:rPr>
-                        <a:t>Sumber pajak bawaan</a:t>
-                      </a:r>
-                      <a:endParaRPr lang="en-US" sz="1200" dirty="0">
-                        <a:latin typeface="Calibri" charset="0"/>
-                        <a:ea typeface="Calibri" charset="0"/>
-                        <a:cs typeface="Calibri" charset="0"/>
-                      </a:endParaRPr>
-                    </a:p>
-                  </a:txBody>
-                  <a:tcPr marL="91440" marR="91440" marT="54864" marB="54864" anchor="ctr">
-                    <a:lnL w="9525" cap="flat" cmpd="sng" algn="ctr">
-                      <a:solidFill>
-                        <a:srgbClr val="D5DEEC"/>
-                      </a:solidFill>
-                      <a:prstDash val="solid"/>
-                      <a:round/>
-                      <a:headEnd type="none" w="med" len="med"/>
-                      <a:tailEnd type="none" w="med" len="med"/>
-                    </a:lnL>
-                    <a:lnR w="9525" cap="flat" cmpd="sng" algn="ctr">
-                      <a:solidFill>
-                        <a:srgbClr val="D5DEEC"/>
-                      </a:solidFill>
-                      <a:prstDash val="solid"/>
-                      <a:round/>
-                      <a:headEnd type="none" w="med" len="med"/>
-                      <a:tailEnd type="none" w="med" len="med"/>
-                    </a:lnR>
-                    <a:lnT w="9525" cap="flat" cmpd="sng" algn="ctr">
-                      <a:solidFill>
-                        <a:srgbClr val="D5DEEC"/>
-                      </a:solidFill>
-                      <a:prstDash val="solid"/>
-                      <a:round/>
-                      <a:headEnd type="none" w="med" len="med"/>
-                      <a:tailEnd type="none" w="med" len="med"/>
-                    </a:lnT>
-                    <a:lnB w="9525" cap="flat" cmpd="sng" algn="ctr">
-                      <a:solidFill>
-                        <a:srgbClr val="D5DEEC"/>
-                      </a:solidFill>
-                      <a:prstDash val="solid"/>
-                      <a:round/>
-                      <a:headEnd type="none" w="med" len="med"/>
-                      <a:tailEnd type="none" w="med" len="med"/>
-                    </a:lnB>
-                    <a:solidFill>
-                      <a:srgbClr val="FFFFFF"/>
-                    </a:solidFill>
-                  </a:tcPr>
-                </a:tc>
-                <a:tc>
-                  <a:txBody>
-                    <a:bodyPr/>
-                    <a:lstStyle/>
-                    <a:p>
-                      <a:pPr indent="0" marL="0">
-                        <a:buNone/>
-                      </a:pPr>
-                      <a:r>
-                        <a:rPr lang="en-US" sz="1200" b="1" dirty="0">
-                          <a:solidFill>
-                            <a:srgbClr val="274289"/>
-                          </a:solidFill>
-                          <a:latin typeface="Calibri" pitchFamily="34" charset="0"/>
-                          <a:ea typeface="Calibri" pitchFamily="34" charset="-122"/>
-                          <a:cs typeface="Calibri" pitchFamily="34" charset="-120"/>
-                        </a:rPr>
-                        <a:t>Ikut master barang SAP</a:t>
-                      </a:r>
-                      <a:endParaRPr lang="en-US" sz="1200" dirty="0">
-                        <a:latin typeface="Calibri" charset="0"/>
-                        <a:ea typeface="Calibri" charset="0"/>
-                        <a:cs typeface="Calibri" charset="0"/>
-                      </a:endParaRPr>
-                    </a:p>
-                  </a:txBody>
-                  <a:tcPr marL="91440" marR="91440" marT="54864" marB="54864" anchor="ctr">
-                    <a:lnL w="9525" cap="flat" cmpd="sng" algn="ctr">
-                      <a:solidFill>
-                        <a:srgbClr val="D5DEEC"/>
-                      </a:solidFill>
-                      <a:prstDash val="solid"/>
-                      <a:round/>
-                      <a:headEnd type="none" w="med" len="med"/>
-                      <a:tailEnd type="none" w="med" len="med"/>
-                    </a:lnL>
-                    <a:lnR w="9525" cap="flat" cmpd="sng" algn="ctr">
-                      <a:solidFill>
-                        <a:srgbClr val="D5DEEC"/>
-                      </a:solidFill>
-                      <a:prstDash val="solid"/>
-                      <a:round/>
-                      <a:headEnd type="none" w="med" len="med"/>
-                      <a:tailEnd type="none" w="med" len="med"/>
-                    </a:lnR>
-                    <a:lnT w="9525" cap="flat" cmpd="sng" algn="ctr">
-                      <a:solidFill>
-                        <a:srgbClr val="D5DEEC"/>
-                      </a:solidFill>
-                      <a:prstDash val="solid"/>
-                      <a:round/>
-                      <a:headEnd type="none" w="med" len="med"/>
-                      <a:tailEnd type="none" w="med" len="med"/>
-                    </a:lnT>
-                    <a:lnB w="9525" cap="flat" cmpd="sng" algn="ctr">
-                      <a:solidFill>
-                        <a:srgbClr val="D5DEEC"/>
-                      </a:solidFill>
-                      <a:prstDash val="solid"/>
-                      <a:round/>
-                      <a:headEnd type="none" w="med" len="med"/>
-                      <a:tailEnd type="none" w="med" len="med"/>
-                    </a:lnB>
-                    <a:solidFill>
-                      <a:srgbClr val="FFFFFF"/>
-                    </a:solidFill>
-                  </a:tcPr>
-                </a:tc>
-                <a:tc>
-                  <a:txBody>
-                    <a:bodyPr/>
-                    <a:lstStyle/>
-                    <a:p>
-                      <a:pPr indent="0" marL="0">
-                        <a:buNone/>
-                      </a:pPr>
-                      <a:r>
-                        <a:rPr lang="en-US" sz="1200" dirty="0">
-                          <a:solidFill>
-                            <a:srgbClr val="1B2437"/>
-                          </a:solidFill>
-                          <a:latin typeface="Calibri" pitchFamily="34" charset="0"/>
-                          <a:ea typeface="Calibri" pitchFamily="34" charset="-122"/>
-                          <a:cs typeface="Calibri" pitchFamily="34" charset="-120"/>
-                        </a:rPr>
-                        <a:t>Pajak pembelian di master barang sudah benar</a:t>
-                      </a:r>
-                      <a:endParaRPr lang="en-US" sz="1200" dirty="0">
-                        <a:latin typeface="Calibri" charset="0"/>
-                        <a:ea typeface="Calibri" charset="0"/>
-                        <a:cs typeface="Calibri" charset="0"/>
-                      </a:endParaRPr>
-                    </a:p>
-                  </a:txBody>
-                  <a:tcPr marL="91440" marR="91440" marT="54864" marB="54864" anchor="ctr">
-                    <a:lnL w="9525" cap="flat" cmpd="sng" algn="ctr">
-                      <a:solidFill>
-                        <a:srgbClr val="D5DEEC"/>
-                      </a:solidFill>
-                      <a:prstDash val="solid"/>
-                      <a:round/>
-                      <a:headEnd type="none" w="med" len="med"/>
-                      <a:tailEnd type="none" w="med" len="med"/>
-                    </a:lnL>
-                    <a:lnR w="9525" cap="flat" cmpd="sng" algn="ctr">
-                      <a:solidFill>
-                        <a:srgbClr val="D5DEEC"/>
-                      </a:solidFill>
-                      <a:prstDash val="solid"/>
-                      <a:round/>
-                      <a:headEnd type="none" w="med" len="med"/>
-                      <a:tailEnd type="none" w="med" len="med"/>
-                    </a:lnR>
-                    <a:lnT w="9525" cap="flat" cmpd="sng" algn="ctr">
-                      <a:solidFill>
-                        <a:srgbClr val="D5DEEC"/>
-                      </a:solidFill>
-                      <a:prstDash val="solid"/>
-                      <a:round/>
-                      <a:headEnd type="none" w="med" len="med"/>
-                      <a:tailEnd type="none" w="med" len="med"/>
-                    </a:lnT>
-                    <a:lnB w="9525" cap="flat" cmpd="sng" algn="ctr">
-                      <a:solidFill>
-                        <a:srgbClr val="D5DEEC"/>
-                      </a:solidFill>
-                      <a:prstDash val="solid"/>
-                      <a:round/>
-                      <a:headEnd type="none" w="med" len="med"/>
-                      <a:tailEnd type="none" w="med" len="med"/>
-                    </a:lnB>
-                    <a:solidFill>
-                      <a:srgbClr val="FFFFFF"/>
-                    </a:solidFill>
-                  </a:tcPr>
-                </a:tc>
-              </a:tr>
-              <a:tr h="0">
-                <a:tc>
-                  <a:txBody>
-                    <a:bodyPr/>
-                    <a:lstStyle/>
-                    <a:p>
-                      <a:pPr indent="0" marL="0">
-                        <a:buNone/>
-                      </a:pPr>
-                      <a:endParaRPr lang="en-US" sz="1200" dirty="0">
-                        <a:latin typeface="Calibri" charset="0"/>
-                        <a:ea typeface="Calibri" charset="0"/>
-                        <a:cs typeface="Calibri" charset="0"/>
-                      </a:endParaRPr>
-                    </a:p>
-                  </a:txBody>
-                  <a:tcPr marL="91440" marR="91440" marT="54864" marB="54864" anchor="ctr">
-                    <a:lnL w="9525" cap="flat" cmpd="sng" algn="ctr">
-                      <a:solidFill>
-                        <a:srgbClr val="D5DEEC"/>
-                      </a:solidFill>
-                      <a:prstDash val="solid"/>
-                      <a:round/>
-                      <a:headEnd type="none" w="med" len="med"/>
-                      <a:tailEnd type="none" w="med" len="med"/>
-                    </a:lnL>
-                    <a:lnR w="9525" cap="flat" cmpd="sng" algn="ctr">
-                      <a:solidFill>
-                        <a:srgbClr val="D5DEEC"/>
-                      </a:solidFill>
-                      <a:prstDash val="solid"/>
-                      <a:round/>
-                      <a:headEnd type="none" w="med" len="med"/>
-                      <a:tailEnd type="none" w="med" len="med"/>
-                    </a:lnR>
-                    <a:lnT w="9525" cap="flat" cmpd="sng" algn="ctr">
-                      <a:solidFill>
-                        <a:srgbClr val="D5DEEC"/>
-                      </a:solidFill>
-                      <a:prstDash val="solid"/>
-                      <a:round/>
-                      <a:headEnd type="none" w="med" len="med"/>
-                      <a:tailEnd type="none" w="med" len="med"/>
-                    </a:lnT>
-                    <a:lnB w="9525" cap="flat" cmpd="sng" algn="ctr">
-                      <a:solidFill>
-                        <a:srgbClr val="D5DEEC"/>
-                      </a:solidFill>
-                      <a:prstDash val="solid"/>
-                      <a:round/>
-                      <a:headEnd type="none" w="med" len="med"/>
-                      <a:tailEnd type="none" w="med" len="med"/>
-                    </a:lnB>
-                    <a:solidFill>
-                      <a:srgbClr val="F6F8FC"/>
-                    </a:solidFill>
-                  </a:tcPr>
-                </a:tc>
-                <a:tc>
-                  <a:txBody>
-                    <a:bodyPr/>
-                    <a:lstStyle/>
-                    <a:p>
-                      <a:pPr indent="0" marL="0">
-                        <a:buNone/>
-                      </a:pPr>
-                      <a:r>
-                        <a:rPr lang="en-US" sz="1200" b="1" dirty="0">
-                          <a:solidFill>
-                            <a:srgbClr val="274289"/>
-                          </a:solidFill>
-                          <a:latin typeface="Calibri" pitchFamily="34" charset="0"/>
-                          <a:ea typeface="Calibri" pitchFamily="34" charset="-122"/>
-                          <a:cs typeface="Calibri" pitchFamily="34" charset="-120"/>
-                        </a:rPr>
-                        <a:t>Selalu pakai pajak templat PO (VAT I-E)</a:t>
-                      </a:r>
-                      <a:endParaRPr lang="en-US" sz="1200" dirty="0">
-                        <a:latin typeface="Calibri" charset="0"/>
-                        <a:ea typeface="Calibri" charset="0"/>
-                        <a:cs typeface="Calibri" charset="0"/>
-                      </a:endParaRPr>
-                    </a:p>
-                  </a:txBody>
-                  <a:tcPr marL="91440" marR="91440" marT="54864" marB="54864" anchor="ctr">
-                    <a:lnL w="9525" cap="flat" cmpd="sng" algn="ctr">
-                      <a:solidFill>
-                        <a:srgbClr val="D5DEEC"/>
-                      </a:solidFill>
-                      <a:prstDash val="solid"/>
-                      <a:round/>
-                      <a:headEnd type="none" w="med" len="med"/>
-                      <a:tailEnd type="none" w="med" len="med"/>
-                    </a:lnL>
-                    <a:lnR w="9525" cap="flat" cmpd="sng" algn="ctr">
-                      <a:solidFill>
-                        <a:srgbClr val="D5DEEC"/>
-                      </a:solidFill>
-                      <a:prstDash val="solid"/>
-                      <a:round/>
-                      <a:headEnd type="none" w="med" len="med"/>
-                      <a:tailEnd type="none" w="med" len="med"/>
-                    </a:lnR>
-                    <a:lnT w="9525" cap="flat" cmpd="sng" algn="ctr">
-                      <a:solidFill>
-                        <a:srgbClr val="D5DEEC"/>
-                      </a:solidFill>
-                      <a:prstDash val="solid"/>
-                      <a:round/>
-                      <a:headEnd type="none" w="med" len="med"/>
-                      <a:tailEnd type="none" w="med" len="med"/>
-                    </a:lnT>
-                    <a:lnB w="9525" cap="flat" cmpd="sng" algn="ctr">
-                      <a:solidFill>
-                        <a:srgbClr val="D5DEEC"/>
-                      </a:solidFill>
-                      <a:prstDash val="solid"/>
-                      <a:round/>
-                      <a:headEnd type="none" w="med" len="med"/>
-                      <a:tailEnd type="none" w="med" len="med"/>
-                    </a:lnB>
-                    <a:solidFill>
-                      <a:srgbClr val="F6F8FC"/>
-                    </a:solidFill>
-                  </a:tcPr>
-                </a:tc>
-                <a:tc>
-                  <a:txBody>
-                    <a:bodyPr/>
-                    <a:lstStyle/>
-                    <a:p>
-                      <a:pPr indent="0" marL="0">
-                        <a:buNone/>
-                      </a:pPr>
-                      <a:r>
-                        <a:rPr lang="en-US" sz="1200" dirty="0">
-                          <a:solidFill>
-                            <a:srgbClr val="1B2437"/>
-                          </a:solidFill>
-                          <a:latin typeface="Calibri" pitchFamily="34" charset="0"/>
-                          <a:ea typeface="Calibri" pitchFamily="34" charset="-122"/>
-                          <a:cs typeface="Calibri" pitchFamily="34" charset="-120"/>
-                        </a:rPr>
-                        <a:t>Master barang belum rapi</a:t>
-                      </a:r>
-                      <a:endParaRPr lang="en-US" sz="1200" dirty="0">
-                        <a:latin typeface="Calibri" charset="0"/>
-                        <a:ea typeface="Calibri" charset="0"/>
-                        <a:cs typeface="Calibri" charset="0"/>
-                      </a:endParaRPr>
-                    </a:p>
-                  </a:txBody>
-                  <a:tcPr marL="91440" marR="91440" marT="54864" marB="54864" anchor="ctr">
-                    <a:lnL w="9525" cap="flat" cmpd="sng" algn="ctr">
-                      <a:solidFill>
-                        <a:srgbClr val="D5DEEC"/>
-                      </a:solidFill>
-                      <a:prstDash val="solid"/>
-                      <a:round/>
-                      <a:headEnd type="none" w="med" len="med"/>
-                      <a:tailEnd type="none" w="med" len="med"/>
-                    </a:lnL>
-                    <a:lnR w="9525" cap="flat" cmpd="sng" algn="ctr">
-                      <a:solidFill>
-                        <a:srgbClr val="D5DEEC"/>
-                      </a:solidFill>
-                      <a:prstDash val="solid"/>
-                      <a:round/>
-                      <a:headEnd type="none" w="med" len="med"/>
-                      <a:tailEnd type="none" w="med" len="med"/>
-                    </a:lnR>
-                    <a:lnT w="9525" cap="flat" cmpd="sng" algn="ctr">
-                      <a:solidFill>
-                        <a:srgbClr val="D5DEEC"/>
-                      </a:solidFill>
-                      <a:prstDash val="solid"/>
-                      <a:round/>
-                      <a:headEnd type="none" w="med" len="med"/>
-                      <a:tailEnd type="none" w="med" len="med"/>
-                    </a:lnT>
-                    <a:lnB w="9525" cap="flat" cmpd="sng" algn="ctr">
-                      <a:solidFill>
-                        <a:srgbClr val="D5DEEC"/>
-                      </a:solidFill>
-                      <a:prstDash val="solid"/>
-                      <a:round/>
-                      <a:headEnd type="none" w="med" len="med"/>
-                      <a:tailEnd type="none" w="med" len="med"/>
-                    </a:lnB>
-                    <a:solidFill>
-                      <a:srgbClr val="F6F8FC"/>
-                    </a:solidFill>
-                  </a:tcPr>
-                </a:tc>
-              </a:tr>
-              <a:tr h="0">
-                <a:tc>
-                  <a:txBody>
-                    <a:bodyPr/>
-                    <a:lstStyle/>
-                    <a:p>
-                      <a:pPr indent="0" marL="0">
-                        <a:buNone/>
-                      </a:pPr>
-                      <a:r>
-                        <a:rPr lang="en-US" sz="1200" dirty="0">
-                          <a:solidFill>
-                            <a:srgbClr val="1B2437"/>
-                          </a:solidFill>
-                          <a:latin typeface="Calibri" pitchFamily="34" charset="0"/>
-                          <a:ea typeface="Calibri" pitchFamily="34" charset="-122"/>
-                          <a:cs typeface="Calibri" pitchFamily="34" charset="-120"/>
-                        </a:rPr>
-                        <a:t>Ganti kode pajak</a:t>
-                      </a:r>
-                      <a:endParaRPr lang="en-US" sz="1200" dirty="0">
-                        <a:latin typeface="Calibri" charset="0"/>
-                        <a:ea typeface="Calibri" charset="0"/>
-                        <a:cs typeface="Calibri" charset="0"/>
-                      </a:endParaRPr>
-                    </a:p>
-                  </a:txBody>
-                  <a:tcPr marL="91440" marR="91440" marT="54864" marB="54864" anchor="ctr">
-                    <a:lnL w="9525" cap="flat" cmpd="sng" algn="ctr">
-                      <a:solidFill>
-                        <a:srgbClr val="D5DEEC"/>
-                      </a:solidFill>
-                      <a:prstDash val="solid"/>
-                      <a:round/>
-                      <a:headEnd type="none" w="med" len="med"/>
-                      <a:tailEnd type="none" w="med" len="med"/>
-                    </a:lnL>
-                    <a:lnR w="9525" cap="flat" cmpd="sng" algn="ctr">
-                      <a:solidFill>
-                        <a:srgbClr val="D5DEEC"/>
-                      </a:solidFill>
-                      <a:prstDash val="solid"/>
-                      <a:round/>
-                      <a:headEnd type="none" w="med" len="med"/>
-                      <a:tailEnd type="none" w="med" len="med"/>
-                    </a:lnR>
-                    <a:lnT w="9525" cap="flat" cmpd="sng" algn="ctr">
-                      <a:solidFill>
-                        <a:srgbClr val="D5DEEC"/>
-                      </a:solidFill>
-                      <a:prstDash val="solid"/>
-                      <a:round/>
-                      <a:headEnd type="none" w="med" len="med"/>
-                      <a:tailEnd type="none" w="med" len="med"/>
-                    </a:lnT>
-                    <a:lnB w="9525" cap="flat" cmpd="sng" algn="ctr">
-                      <a:solidFill>
-                        <a:srgbClr val="D5DEEC"/>
-                      </a:solidFill>
-                      <a:prstDash val="solid"/>
-                      <a:round/>
-                      <a:headEnd type="none" w="med" len="med"/>
-                      <a:tailEnd type="none" w="med" len="med"/>
-                    </a:lnB>
-                    <a:solidFill>
-                      <a:srgbClr val="FFFFFF"/>
-                    </a:solidFill>
-                  </a:tcPr>
-                </a:tc>
-                <a:tc>
-                  <a:txBody>
-                    <a:bodyPr/>
-                    <a:lstStyle/>
-                    <a:p>
-                      <a:pPr indent="0" marL="0">
-                        <a:buNone/>
-                      </a:pPr>
-                      <a:r>
-                        <a:rPr lang="en-US" sz="1200" dirty="0">
-                          <a:solidFill>
-                            <a:srgbClr val="1B2437"/>
-                          </a:solidFill>
-                          <a:latin typeface="Calibri" pitchFamily="34" charset="0"/>
-                          <a:ea typeface="Calibri" pitchFamily="34" charset="-122"/>
-                          <a:cs typeface="Calibri" pitchFamily="34" charset="-120"/>
-                        </a:rPr>
-                        <a:t>Kode kiri → kode kanan, mis. VAT I-B → VAT I-E</a:t>
-                      </a:r>
-                      <a:endParaRPr lang="en-US" sz="1200" dirty="0">
-                        <a:latin typeface="Calibri" charset="0"/>
-                        <a:ea typeface="Calibri" charset="0"/>
-                        <a:cs typeface="Calibri" charset="0"/>
-                      </a:endParaRPr>
-                    </a:p>
-                  </a:txBody>
-                  <a:tcPr marL="91440" marR="91440" marT="54864" marB="54864" anchor="ctr">
-                    <a:lnL w="9525" cap="flat" cmpd="sng" algn="ctr">
-                      <a:solidFill>
-                        <a:srgbClr val="D5DEEC"/>
-                      </a:solidFill>
-                      <a:prstDash val="solid"/>
-                      <a:round/>
-                      <a:headEnd type="none" w="med" len="med"/>
-                      <a:tailEnd type="none" w="med" len="med"/>
-                    </a:lnL>
-                    <a:lnR w="9525" cap="flat" cmpd="sng" algn="ctr">
-                      <a:solidFill>
-                        <a:srgbClr val="D5DEEC"/>
-                      </a:solidFill>
-                      <a:prstDash val="solid"/>
-                      <a:round/>
-                      <a:headEnd type="none" w="med" len="med"/>
-                      <a:tailEnd type="none" w="med" len="med"/>
-                    </a:lnR>
-                    <a:lnT w="9525" cap="flat" cmpd="sng" algn="ctr">
-                      <a:solidFill>
-                        <a:srgbClr val="D5DEEC"/>
-                      </a:solidFill>
-                      <a:prstDash val="solid"/>
-                      <a:round/>
-                      <a:headEnd type="none" w="med" len="med"/>
-                      <a:tailEnd type="none" w="med" len="med"/>
-                    </a:lnT>
-                    <a:lnB w="9525" cap="flat" cmpd="sng" algn="ctr">
-                      <a:solidFill>
-                        <a:srgbClr val="D5DEEC"/>
-                      </a:solidFill>
-                      <a:prstDash val="solid"/>
-                      <a:round/>
-                      <a:headEnd type="none" w="med" len="med"/>
-                      <a:tailEnd type="none" w="med" len="med"/>
-                    </a:lnB>
-                    <a:solidFill>
-                      <a:srgbClr val="FFFFFF"/>
-                    </a:solidFill>
-                  </a:tcPr>
-                </a:tc>
-                <a:tc>
-                  <a:txBody>
-                    <a:bodyPr/>
-                    <a:lstStyle/>
-                    <a:p>
-                      <a:pPr indent="0" marL="0">
-                        <a:buNone/>
-                      </a:pPr>
-                      <a:r>
-                        <a:rPr lang="en-US" sz="1200" dirty="0">
-                          <a:solidFill>
-                            <a:srgbClr val="1B2437"/>
-                          </a:solidFill>
-                          <a:latin typeface="Calibri" pitchFamily="34" charset="0"/>
-                          <a:ea typeface="Calibri" pitchFamily="34" charset="-122"/>
-                          <a:cs typeface="Calibri" pitchFamily="34" charset="-120"/>
-                        </a:rPr>
-                        <a:t>Master barang masih VAT I-B (10%), padahal PPN masukan 11% = VAT I-E</a:t>
-                      </a:r>
-                      <a:endParaRPr lang="en-US" sz="1200" dirty="0">
-                        <a:latin typeface="Calibri" charset="0"/>
-                        <a:ea typeface="Calibri" charset="0"/>
-                        <a:cs typeface="Calibri" charset="0"/>
-                      </a:endParaRPr>
-                    </a:p>
-                  </a:txBody>
-                  <a:tcPr marL="91440" marR="91440" marT="54864" marB="54864" anchor="ctr">
-                    <a:lnL w="9525" cap="flat" cmpd="sng" algn="ctr">
-                      <a:solidFill>
-                        <a:srgbClr val="D5DEEC"/>
-                      </a:solidFill>
-                      <a:prstDash val="solid"/>
-                      <a:round/>
-                      <a:headEnd type="none" w="med" len="med"/>
-                      <a:tailEnd type="none" w="med" len="med"/>
-                    </a:lnL>
-                    <a:lnR w="9525" cap="flat" cmpd="sng" algn="ctr">
-                      <a:solidFill>
-                        <a:srgbClr val="D5DEEC"/>
-                      </a:solidFill>
-                      <a:prstDash val="solid"/>
-                      <a:round/>
-                      <a:headEnd type="none" w="med" len="med"/>
-                      <a:tailEnd type="none" w="med" len="med"/>
-                    </a:lnR>
-                    <a:lnT w="9525" cap="flat" cmpd="sng" algn="ctr">
-                      <a:solidFill>
-                        <a:srgbClr val="D5DEEC"/>
-                      </a:solidFill>
-                      <a:prstDash val="solid"/>
-                      <a:round/>
-                      <a:headEnd type="none" w="med" len="med"/>
-                      <a:tailEnd type="none" w="med" len="med"/>
-                    </a:lnT>
-                    <a:lnB w="9525" cap="flat" cmpd="sng" algn="ctr">
-                      <a:solidFill>
-                        <a:srgbClr val="D5DEEC"/>
-                      </a:solidFill>
-                      <a:prstDash val="solid"/>
-                      <a:round/>
-                      <a:headEnd type="none" w="med" len="med"/>
-                      <a:tailEnd type="none" w="med" len="med"/>
-                    </a:lnB>
-                    <a:solidFill>
-                      <a:srgbClr val="FFFFFF"/>
-                    </a:solidFill>
-                  </a:tcPr>
-                </a:tc>
-              </a:tr>
-            </a:tbl>
-          </a:graphicData>
-        </a:graphic>
-      </p:graphicFrame>
-      <p:sp>
-        <p:nvSpPr>
-          <p:cNvPr id="6" name="Text 2"/>
-          <p:cNvSpPr txBox="1"/>
-          <p:nvPr/>
-        </p:nvSpPr>
-        <p:spPr>
-          <a:xfrm>
-            <a:off x="1600200" y="5715000"/>
-            <a:ext cx="9921240" cy="457200"/>
-          </a:xfrm>
-          <a:prstGeom prst="rect">
-            <a:avLst/>
-          </a:prstGeom>
-          <a:noFill/>
-          <a:ln/>
-        </p:spPr>
-        <p:txBody>
-          <a:bodyPr wrap="square" lIns="0" tIns="0" rIns="0" bIns="0" rtlCol="0" anchor="t"/>
-          <a:lstStyle/>
-          <a:p>
-            <a:pPr indent="0" marL="0">
-              <a:buNone/>
-            </a:pPr>
-            <a:r>
-              <a:rPr lang="en-US" sz="1250" dirty="0">
-                <a:solidFill>
-                  <a:srgbClr val="5B6B86"/>
-                </a:solidFill>
-              </a:rPr>
-              <a:t>Pengaturan → tab </a:t>
-            </a:r>
-            <a:pPr indent="0" marL="0">
-              <a:buNone/>
-            </a:pPr>
-            <a:r>
-              <a:rPr lang="en-US" sz="1250" b="1" dirty="0">
-                <a:solidFill>
-                  <a:srgbClr val="274289"/>
-                </a:solidFill>
-              </a:rPr>
-              <a:t>Templat SAP</a:t>
-            </a:r>
-            <a:pPr indent="0" marL="0">
-              <a:buNone/>
-            </a:pPr>
-            <a:r>
-              <a:rPr lang="en-US" sz="1250" dirty="0">
-                <a:solidFill>
-                  <a:srgbClr val="5B6B86"/>
-                </a:solidFill>
-              </a:rPr>
-              <a:t> → kartu </a:t>
-            </a:r>
-            <a:pPr indent="0" marL="0">
-              <a:buNone/>
-            </a:pPr>
-            <a:r>
-              <a:rPr lang="en-US" sz="1250" b="1" dirty="0">
-                <a:solidFill>
-                  <a:srgbClr val="274289"/>
-                </a:solidFill>
-              </a:rPr>
-              <a:t>Aturan pajak pembelian (PO / GRPO)</a:t>
-            </a:r>
-            <a:pPr indent="0" marL="0">
-              <a:buNone/>
-            </a:pPr>
-            <a:r>
-              <a:rPr lang="en-US" sz="1250" dirty="0">
-                <a:solidFill>
-                  <a:srgbClr val="5B6B86"/>
-                </a:solidFill>
-              </a:rPr>
-              <a:t>, lalu </a:t>
-            </a:r>
-            <a:pPr indent="0" marL="0">
-              <a:buNone/>
-            </a:pPr>
-            <a:r>
-              <a:rPr lang="en-US" sz="1250" b="1" dirty="0">
-                <a:solidFill>
-                  <a:srgbClr val="274289"/>
-                </a:solidFill>
-              </a:rPr>
-              <a:t>Simpan aturan pajak</a:t>
-            </a:r>
-            <a:pPr indent="0" marL="0">
-              <a:buNone/>
-            </a:pPr>
-            <a:r>
-              <a:rPr lang="en-US" sz="1250" dirty="0">
-                <a:solidFill>
-                  <a:srgbClr val="5B6B86"/>
-                </a:solidFill>
-              </a:rPr>
-              <a:t>. Aturan ini hanya mengisi bawaan kolom Pajak; admin purchase tetap bisa mengubahnya per baris.</a:t>
-            </a:r>
-            <a:endParaRPr lang="en-US" sz="1250" dirty="0"/>
-          </a:p>
-        </p:txBody>
-      </p:sp>
-      <p:sp>
-        <p:nvSpPr>
-          <p:cNvPr id="25" name="Slide Number Placeholder 0"/>
-          <p:cNvSpPr>
-            <a:spLocks noGrp="1"/>
-          </p:cNvSpPr>
-          <p:nvPr>
-            <p:ph type="sldNum" sz="quarter" idx="4294967295"/>
-          </p:nvPr>
-        </p:nvSpPr>
-        <p:spPr>
-          <a:xfrm>
-            <a:off x="11109960" y="6309360"/>
-            <a:ext cx="457200" cy="274320"/>
-          </a:xfrm>
-          <a:prstGeom prst="rect">
-            <a:avLst/>
-          </a:prstGeom>
-          <a:extLst>
-            <a:ext uri="{C572A759-6A51-4108-AA02-DFA0A04FC94B}">
-              <ma14:wrappingTextBoxFlag xmlns:ma14="http://schemas.microsoft.com/office/mac/drawingml/2011/main" val="0"/>
-            </a:ext>
-          </a:extLst>
-        </p:spPr>
-        <p:txBody>
-          <a:bodyPr/>
-          <a:lstStyle>
-            <a:lvl1pPr>
-              <a:defRPr sz="1000">
-                <a:solidFill>
-                  <a:srgbClr val="5B6B86"/>
-                </a:solidFill>
-              </a:defRPr>
-            </a:lvl1pPr>
-          </a:lstStyle>
-          <a:p>
-            <a:pPr algn="r"/>
-            <a:fld id="{F7021451-1387-4CA6-816F-3879F97B5CBC}" type="slidenum">
-              <a:rPr b="0" lang="en-US"/>
-              <a:t>5</a:t>
-            </a:fld>
-            <a:endParaRPr lang="en-US"/>
-          </a:p>
-        </p:txBody>
-      </p:sp>
-    </p:spTree>
-  </p:cSld>
-  <p:clrMapOvr>
-    <a:masterClrMapping/>
-  </p:clrMapOvr>
-</p:sld>
-</file>
-
-<file path=ppt/slides/slide6.xml><?xml version="1.0" encoding="utf-8"?>
-<p:sld xmlns:a="http://schemas.openxmlformats.org/drawingml/2006/main" xmlns:r="http://schemas.openxmlformats.org/officeDocument/2006/relationships" xmlns:p="http://schemas.openxmlformats.org/presentationml/2006/main">
-  <p:cSld name="Slide 6">
-    <p:spTree>
-      <p:nvGrpSpPr>
-        <p:cNvPr id="1" name=""/>
-        <p:cNvGrpSpPr/>
-        <p:nvPr/>
-      </p:nvGrpSpPr>
-      <p:grpSpPr>
-        <a:xfrm>
-          <a:off x="0" y="0"/>
-          <a:ext cx="0" cy="0"/>
-          <a:chOff x="0" y="0"/>
-          <a:chExt cx="0" cy="0"/>
-        </a:xfrm>
-      </p:grpSpPr>
-      <p:sp>
-        <p:nvSpPr>
-          <p:cNvPr id="2" name="Text 0"/>
-          <p:cNvSpPr/>
-          <p:nvPr>
-            <p:ph idx="100" type="title" hasCustomPrompt="1"/>
-          </p:nvPr>
-        </p:nvSpPr>
-        <p:spPr>
-          <a:xfrm>
-            <a:off x="685800" y="914400"/>
-            <a:ext cx="10835640" cy="640080"/>
-          </a:xfrm>
-          <a:prstGeom prst="rect">
-            <a:avLst/>
-          </a:prstGeom>
-          <a:noFill/>
-          <a:ln/>
-        </p:spPr>
-        <p:txBody>
-          <a:bodyPr wrap="square" lIns="0" tIns="0" rIns="0" bIns="0" rtlCol="0" anchor="ctr"/>
-          <a:lstStyle/>
-          <a:p>
-            <a:pPr algn="l" indent="0" marL="0">
-              <a:buNone/>
-            </a:pPr>
-            <a:r>
-              <a:rPr lang="en-US" sz="2800" b="1" dirty="0">
-                <a:solidFill>
-                  <a:schemeClr val="tx2"/>
-                </a:solidFill>
-              </a:rPr>
-              <a:t>Admin purchase · 1. Menemukan permintaan yang siap di-PO</a:t>
-            </a:r>
-            <a:endParaRPr lang="en-US" sz="2800" dirty="0"/>
-          </a:p>
-        </p:txBody>
-      </p:sp>
-      <p:sp>
-        <p:nvSpPr>
-          <p:cNvPr id="3" name="Tab PO dan panel Purchase Order bingkai"/>
-          <p:cNvSpPr/>
-          <p:nvPr/>
-        </p:nvSpPr>
-        <p:spPr>
-          <a:xfrm>
-            <a:off x="621792" y="1677162"/>
-            <a:ext cx="6437376" cy="4509516"/>
-          </a:xfrm>
-          <a:prstGeom prst="roundRect">
-            <a:avLst>
-              <a:gd name="adj" fmla="val 2028"/>
-            </a:avLst>
-          </a:prstGeom>
-          <a:solidFill>
-            <a:srgbClr val="E4EAF4"/>
-          </a:solidFill>
-          <a:ln w="9525">
-            <a:solidFill>
-              <a:srgbClr val="E4EAF4"/>
-            </a:solidFill>
-            <a:prstDash val="solid"/>
-          </a:ln>
-          <a:effectLst>
-            <a:outerShdw sx="100000" sy="100000" kx="0" ky="0" algn="bl" rotWithShape="0" blurRad="101600" dist="25400" dir="5400000">
-              <a:srgbClr val="274289">
-                <a:alpha val="12000"/>
-              </a:srgbClr>
-            </a:outerShdw>
-          </a:effectLst>
-        </p:spPr>
-      </p:sp>
-      <p:pic>
-        <p:nvPicPr>
-          <p:cNvPr id="4" name="Tab PO dan panel Purchase Order" descr="Layar PID POS: Tab PO dan panel Purchase Order">    </p:cNvPr>
-          <p:cNvPicPr>
-            <a:picLocks noChangeAspect="1"/>
-          </p:cNvPicPr>
-          <p:nvPr/>
-        </p:nvPicPr>
-        <p:blipFill>
-          <a:blip r:embed="rId1"/>
-          <a:stretch>
-            <a:fillRect/>
-          </a:stretch>
-        </p:blipFill>
-        <p:spPr>
-          <a:xfrm>
-            <a:off x="685800" y="1741170"/>
-            <a:ext cx="6309360" cy="4381500"/>
-          </a:xfrm>
-          <a:prstGeom prst="rect">
-            <a:avLst/>
-          </a:prstGeom>
-        </p:spPr>
-      </p:pic>
-      <p:sp>
-        <p:nvSpPr>
-          <p:cNvPr id="5" name="Sorotan Tab PO dan panel Purchase Order 1"/>
-          <p:cNvSpPr/>
-          <p:nvPr/>
-        </p:nvSpPr>
-        <p:spPr>
-          <a:xfrm>
-            <a:off x="3334004" y="2359279"/>
-            <a:ext cx="455041" cy="230124"/>
-          </a:xfrm>
-          <a:prstGeom prst="roundRect">
-            <a:avLst>
-              <a:gd name="adj" fmla="val 19868"/>
-            </a:avLst>
-          </a:prstGeom>
-          <a:ln w="28575">
-            <a:solidFill>
-              <a:srgbClr val="F2762E"/>
-            </a:solidFill>
-            <a:prstDash val="solid"/>
-          </a:ln>
-        </p:spPr>
-      </p:sp>
-      <p:sp>
-        <p:nvSpPr>
-          <p:cNvPr id="6" name="Nomor 1"/>
-          <p:cNvSpPr/>
-          <p:nvPr/>
-        </p:nvSpPr>
-        <p:spPr>
-          <a:xfrm>
-            <a:off x="3205988" y="2231263"/>
-            <a:ext cx="292608" cy="292608"/>
-          </a:xfrm>
-          <a:prstGeom prst="ellipse">
-            <a:avLst/>
-          </a:prstGeom>
-          <a:solidFill>
-            <a:srgbClr val="F2762E"/>
-          </a:solidFill>
-          <a:ln w="19050">
-            <a:solidFill>
-              <a:srgbClr val="FFFFFF"/>
-            </a:solidFill>
-            <a:prstDash val="solid"/>
-          </a:ln>
-        </p:spPr>
-      </p:sp>
-      <p:sp>
-        <p:nvSpPr>
-          <p:cNvPr id="7" name="Text 4"/>
-          <p:cNvSpPr txBox="1"/>
-          <p:nvPr/>
-        </p:nvSpPr>
-        <p:spPr>
-          <a:xfrm>
-            <a:off x="3205988" y="2231263"/>
-            <a:ext cx="292608" cy="292608"/>
-          </a:xfrm>
-          <a:prstGeom prst="rect">
-            <a:avLst/>
-          </a:prstGeom>
-          <a:noFill/>
-          <a:ln/>
-        </p:spPr>
-        <p:txBody>
-          <a:bodyPr wrap="square" lIns="0" tIns="0" rIns="0" bIns="0" rtlCol="0" anchor="ctr"/>
-          <a:lstStyle/>
-          <a:p>
-            <a:pPr algn="ctr" indent="0" marL="0">
-              <a:buNone/>
-            </a:pPr>
-            <a:r>
-              <a:rPr lang="en-US" sz="1100" b="1" dirty="0">
-                <a:solidFill>
-                  <a:srgbClr val="FFFFFF"/>
-                </a:solidFill>
-              </a:rPr>
-              <a:t>1</a:t>
-            </a:r>
-            <a:endParaRPr lang="en-US" sz="1100" dirty="0"/>
-          </a:p>
-        </p:txBody>
-      </p:sp>
-      <p:sp>
-        <p:nvSpPr>
-          <p:cNvPr id="8" name="Sorotan Tab PO dan panel Purchase Order 2"/>
-          <p:cNvSpPr/>
-          <p:nvPr/>
-        </p:nvSpPr>
-        <p:spPr>
-          <a:xfrm>
-            <a:off x="751840" y="3282315"/>
-            <a:ext cx="1760728" cy="490093"/>
-          </a:xfrm>
-          <a:prstGeom prst="roundRect">
-            <a:avLst>
-              <a:gd name="adj" fmla="val 9329"/>
-            </a:avLst>
-          </a:prstGeom>
-          <a:ln w="28575">
-            <a:solidFill>
-              <a:srgbClr val="F2762E"/>
-            </a:solidFill>
-            <a:prstDash val="solid"/>
-          </a:ln>
-        </p:spPr>
-      </p:sp>
-      <p:sp>
-        <p:nvSpPr>
-          <p:cNvPr id="9" name="Nomor 2"/>
-          <p:cNvSpPr/>
-          <p:nvPr/>
-        </p:nvSpPr>
-        <p:spPr>
-          <a:xfrm>
-            <a:off x="623824" y="3154299"/>
-            <a:ext cx="292608" cy="292608"/>
-          </a:xfrm>
-          <a:prstGeom prst="ellipse">
-            <a:avLst/>
-          </a:prstGeom>
-          <a:solidFill>
-            <a:srgbClr val="F2762E"/>
-          </a:solidFill>
-          <a:ln w="19050">
-            <a:solidFill>
-              <a:srgbClr val="FFFFFF"/>
-            </a:solidFill>
-            <a:prstDash val="solid"/>
-          </a:ln>
-        </p:spPr>
-      </p:sp>
-      <p:sp>
-        <p:nvSpPr>
-          <p:cNvPr id="10" name="Text 7"/>
-          <p:cNvSpPr txBox="1"/>
-          <p:nvPr/>
-        </p:nvSpPr>
-        <p:spPr>
-          <a:xfrm>
-            <a:off x="623824" y="3154299"/>
-            <a:ext cx="292608" cy="292608"/>
-          </a:xfrm>
-          <a:prstGeom prst="rect">
-            <a:avLst/>
-          </a:prstGeom>
-          <a:noFill/>
-          <a:ln/>
-        </p:spPr>
-        <p:txBody>
-          <a:bodyPr wrap="square" lIns="0" tIns="0" rIns="0" bIns="0" rtlCol="0" anchor="ctr"/>
-          <a:lstStyle/>
-          <a:p>
-            <a:pPr algn="ctr" indent="0" marL="0">
-              <a:buNone/>
-            </a:pPr>
-            <a:r>
-              <a:rPr lang="en-US" sz="1100" b="1" dirty="0">
-                <a:solidFill>
-                  <a:srgbClr val="FFFFFF"/>
-                </a:solidFill>
-              </a:rPr>
-              <a:t>2</a:t>
-            </a:r>
-            <a:endParaRPr lang="en-US" sz="1100" dirty="0"/>
-          </a:p>
-        </p:txBody>
-      </p:sp>
-      <p:sp>
-        <p:nvSpPr>
-          <p:cNvPr id="11" name="Sorotan Tab PO dan panel Purchase Order 3"/>
-          <p:cNvSpPr/>
-          <p:nvPr/>
-        </p:nvSpPr>
-        <p:spPr>
-          <a:xfrm>
-            <a:off x="2700147" y="4263771"/>
-            <a:ext cx="4056634" cy="431673"/>
-          </a:xfrm>
-          <a:prstGeom prst="roundRect">
-            <a:avLst>
-              <a:gd name="adj" fmla="val 10591"/>
-            </a:avLst>
-          </a:prstGeom>
-          <a:ln w="28575">
-            <a:solidFill>
-              <a:srgbClr val="F2762E"/>
-            </a:solidFill>
-            <a:prstDash val="solid"/>
-          </a:ln>
-        </p:spPr>
-      </p:sp>
-      <p:sp>
-        <p:nvSpPr>
-          <p:cNvPr id="12" name="Nomor 3"/>
-          <p:cNvSpPr/>
-          <p:nvPr/>
-        </p:nvSpPr>
-        <p:spPr>
-          <a:xfrm>
-            <a:off x="2572131" y="4135755"/>
-            <a:ext cx="292608" cy="292608"/>
-          </a:xfrm>
-          <a:prstGeom prst="ellipse">
-            <a:avLst/>
-          </a:prstGeom>
-          <a:solidFill>
-            <a:srgbClr val="F2762E"/>
-          </a:solidFill>
-          <a:ln w="19050">
-            <a:solidFill>
-              <a:srgbClr val="FFFFFF"/>
-            </a:solidFill>
-            <a:prstDash val="solid"/>
-          </a:ln>
-        </p:spPr>
-      </p:sp>
-      <p:sp>
-        <p:nvSpPr>
-          <p:cNvPr id="13" name="Text 10"/>
-          <p:cNvSpPr txBox="1"/>
-          <p:nvPr/>
-        </p:nvSpPr>
-        <p:spPr>
-          <a:xfrm>
-            <a:off x="2572131" y="4135755"/>
-            <a:ext cx="292608" cy="292608"/>
-          </a:xfrm>
-          <a:prstGeom prst="rect">
-            <a:avLst/>
-          </a:prstGeom>
-          <a:noFill/>
-          <a:ln/>
-        </p:spPr>
-        <p:txBody>
-          <a:bodyPr wrap="square" lIns="0" tIns="0" rIns="0" bIns="0" rtlCol="0" anchor="ctr"/>
-          <a:lstStyle/>
-          <a:p>
-            <a:pPr algn="ctr" indent="0" marL="0">
-              <a:buNone/>
-            </a:pPr>
-            <a:r>
-              <a:rPr lang="en-US" sz="1100" b="1" dirty="0">
-                <a:solidFill>
-                  <a:srgbClr val="FFFFFF"/>
-                </a:solidFill>
-              </a:rPr>
-              <a:t>3</a:t>
-            </a:r>
-            <a:endParaRPr lang="en-US" sz="1100" dirty="0"/>
-          </a:p>
-        </p:txBody>
-      </p:sp>
-      <p:sp>
-        <p:nvSpPr>
-          <p:cNvPr id="14" name="Sorotan Tab PO dan panel Purchase Order 4"/>
-          <p:cNvSpPr/>
-          <p:nvPr/>
-        </p:nvSpPr>
-        <p:spPr>
-          <a:xfrm>
-            <a:off x="6237478" y="3992118"/>
-            <a:ext cx="519303" cy="235966"/>
-          </a:xfrm>
-          <a:prstGeom prst="roundRect">
-            <a:avLst>
-              <a:gd name="adj" fmla="val 19376"/>
-            </a:avLst>
-          </a:prstGeom>
-          <a:ln w="28575">
-            <a:solidFill>
-              <a:srgbClr val="F2762E"/>
-            </a:solidFill>
-            <a:prstDash val="solid"/>
-          </a:ln>
-        </p:spPr>
-      </p:sp>
-      <p:sp>
-        <p:nvSpPr>
-          <p:cNvPr id="15" name="Nomor 4"/>
-          <p:cNvSpPr/>
-          <p:nvPr/>
-        </p:nvSpPr>
-        <p:spPr>
-          <a:xfrm>
-            <a:off x="6109462" y="3864102"/>
-            <a:ext cx="292608" cy="292608"/>
-          </a:xfrm>
-          <a:prstGeom prst="ellipse">
-            <a:avLst/>
-          </a:prstGeom>
-          <a:solidFill>
-            <a:srgbClr val="F2762E"/>
-          </a:solidFill>
-          <a:ln w="19050">
-            <a:solidFill>
-              <a:srgbClr val="FFFFFF"/>
-            </a:solidFill>
-            <a:prstDash val="solid"/>
-          </a:ln>
-        </p:spPr>
-      </p:sp>
-      <p:sp>
-        <p:nvSpPr>
-          <p:cNvPr id="16" name="Text 13"/>
-          <p:cNvSpPr txBox="1"/>
-          <p:nvPr/>
-        </p:nvSpPr>
-        <p:spPr>
-          <a:xfrm>
-            <a:off x="6109462" y="3864102"/>
-            <a:ext cx="292608" cy="292608"/>
-          </a:xfrm>
-          <a:prstGeom prst="rect">
-            <a:avLst/>
-          </a:prstGeom>
-          <a:noFill/>
-          <a:ln/>
-        </p:spPr>
-        <p:txBody>
-          <a:bodyPr wrap="square" lIns="0" tIns="0" rIns="0" bIns="0" rtlCol="0" anchor="ctr"/>
-          <a:lstStyle/>
-          <a:p>
-            <a:pPr algn="ctr" indent="0" marL="0">
-              <a:buNone/>
-            </a:pPr>
-            <a:r>
-              <a:rPr lang="en-US" sz="1100" b="1" dirty="0">
-                <a:solidFill>
-                  <a:srgbClr val="FFFFFF"/>
-                </a:solidFill>
-              </a:rPr>
-              <a:t>4</a:t>
-            </a:r>
-            <a:endParaRPr lang="en-US" sz="1100" dirty="0"/>
-          </a:p>
-        </p:txBody>
-      </p:sp>
-      <p:sp>
-        <p:nvSpPr>
           <p:cNvPr id="17" name="Langkah 1"/>
           <p:cNvSpPr/>
           <p:nvPr/>
@@ -11856,7 +7263,7 @@
             <a:pPr algn="r"/>
             <a:fld id="{F7021451-1387-4CA6-816F-3879F97B5CBC}" type="slidenum">
               <a:rPr b="0" lang="en-US"/>
-              <a:t>6</a:t>
+              <a:t>4</a:t>
             </a:fld>
             <a:endParaRPr lang="en-US"/>
           </a:p>
@@ -11870,9 +7277,9 @@
 </p:sld>
 </file>
 
-<file path=ppt/slides/slide7.xml><?xml version="1.0" encoding="utf-8"?>
+<file path=ppt/slides/slide5.xml><?xml version="1.0" encoding="utf-8"?>
 <p:sld xmlns:a="http://schemas.openxmlformats.org/drawingml/2006/main" xmlns:r="http://schemas.openxmlformats.org/officeDocument/2006/relationships" xmlns:p="http://schemas.openxmlformats.org/presentationml/2006/main">
-  <p:cSld name="Slide 7">
+  <p:cSld name="Slide 5">
     <p:spTree>
       <p:nvGrpSpPr>
         <p:cNvPr id="1" name=""/>
@@ -12533,7 +7940,7 @@
             <a:pPr algn="r"/>
             <a:fld id="{F7021451-1387-4CA6-816F-3879F97B5CBC}" type="slidenum">
               <a:rPr b="0" lang="en-US"/>
-              <a:t>7</a:t>
+              <a:t>5</a:t>
             </a:fld>
             <a:endParaRPr lang="en-US"/>
           </a:p>
@@ -12547,9 +7954,9 @@
 </p:sld>
 </file>
 
-<file path=ppt/slides/slide8.xml><?xml version="1.0" encoding="utf-8"?>
+<file path=ppt/slides/slide6.xml><?xml version="1.0" encoding="utf-8"?>
 <p:sld xmlns:a="http://schemas.openxmlformats.org/drawingml/2006/main" xmlns:r="http://schemas.openxmlformats.org/officeDocument/2006/relationships" xmlns:p="http://schemas.openxmlformats.org/presentationml/2006/main">
-  <p:cSld name="Slide 8">
+  <p:cSld name="Slide 6">
     <p:spTree>
       <p:nvGrpSpPr>
         <p:cNvPr id="1" name=""/>
@@ -13087,7 +8494,7 @@
       </p:sp>
       <p:graphicFrame>
         <p:nvGraphicFramePr>
-          <p:cNvPr id="9" name="Table 0"/>
+          <p:cNvPr id="7" name="Table 0"/>
           <p:cNvGraphicFramePr>
             <a:graphicFrameLocks noGrp="1"/>
           </p:cNvGraphicFramePr>
@@ -14137,7 +9544,7 @@
       </p:graphicFrame>
       <p:graphicFrame>
         <p:nvGraphicFramePr>
-          <p:cNvPr id="17" name="Table 1"/>
+          <p:cNvPr id="13" name="Table 1"/>
           <p:cNvGraphicFramePr>
             <a:graphicFrameLocks noGrp="1"/>
           </p:cNvGraphicFramePr>
@@ -14859,7 +10266,7 @@
             <a:pPr algn="r"/>
             <a:fld id="{F7021451-1387-4CA6-816F-3879F97B5CBC}" type="slidenum">
               <a:rPr b="0" lang="en-US"/>
-              <a:t>8</a:t>
+              <a:t>6</a:t>
             </a:fld>
             <a:endParaRPr lang="en-US"/>
           </a:p>
@@ -14873,9 +10280,9 @@
 </p:sld>
 </file>
 
-<file path=ppt/slides/slide9.xml><?xml version="1.0" encoding="utf-8"?>
+<file path=ppt/slides/slide7.xml><?xml version="1.0" encoding="utf-8"?>
 <p:sld xmlns:a="http://schemas.openxmlformats.org/drawingml/2006/main" xmlns:r="http://schemas.openxmlformats.org/officeDocument/2006/relationships" xmlns:p="http://schemas.openxmlformats.org/presentationml/2006/main">
-  <p:cSld name="Slide 9">
+  <p:cSld name="Slide 7">
     <p:spTree>
       <p:nvGrpSpPr>
         <p:cNvPr id="1" name=""/>
@@ -14930,7 +10337,7 @@
       </p:sp>
       <p:graphicFrame>
         <p:nvGraphicFramePr>
-          <p:cNvPr id="10" name="Table 0"/>
+          <p:cNvPr id="8" name="Table 0"/>
           <p:cNvGraphicFramePr>
             <a:graphicFrameLocks noGrp="1"/>
           </p:cNvGraphicFramePr>
@@ -15933,7 +11340,7 @@
                           <a:ea typeface="Calibri" pitchFamily="34" charset="-122"/>
                           <a:cs typeface="Calibri" pitchFamily="34" charset="-120"/>
                         </a:rPr>
-                        <a:t>Tidak bisa diubah/dibatalkan dari web; lanjut ke tab GRPO</a:t>
+                        <a:t>Tidak bisa diubah/dibatalkan dari web; pembatalan di SAP</a:t>
                       </a:r>
                       <a:endParaRPr lang="en-US" sz="1250" dirty="0">
                         <a:latin typeface="Calibri" charset="0"/>
@@ -16321,6 +11728,2296 @@
               <a:t>buat PO pertama, lalu + Buat PO lagi untuk sisanya. Kolom Sisa sudah dikurangi PO aktif vendor lain, jadi qty tidak bisa dobel.</a:t>
             </a:r>
             <a:endParaRPr lang="en-US" sz="1300" dirty="0"/>
+          </a:p>
+        </p:txBody>
+      </p:sp>
+      <p:sp>
+        <p:nvSpPr>
+          <p:cNvPr id="25" name="Slide Number Placeholder 0"/>
+          <p:cNvSpPr>
+            <a:spLocks noGrp="1"/>
+          </p:cNvSpPr>
+          <p:nvPr>
+            <p:ph type="sldNum" sz="quarter" idx="4294967295"/>
+          </p:nvPr>
+        </p:nvSpPr>
+        <p:spPr>
+          <a:xfrm>
+            <a:off x="11109960" y="6309360"/>
+            <a:ext cx="457200" cy="274320"/>
+          </a:xfrm>
+          <a:prstGeom prst="rect">
+            <a:avLst/>
+          </a:prstGeom>
+          <a:extLst>
+            <a:ext uri="{C572A759-6A51-4108-AA02-DFA0A04FC94B}">
+              <ma14:wrappingTextBoxFlag xmlns:ma14="http://schemas.microsoft.com/office/mac/drawingml/2011/main" val="0"/>
+            </a:ext>
+          </a:extLst>
+        </p:spPr>
+        <p:txBody>
+          <a:bodyPr/>
+          <a:lstStyle>
+            <a:lvl1pPr>
+              <a:defRPr sz="1000">
+                <a:solidFill>
+                  <a:srgbClr val="5B6B86"/>
+                </a:solidFill>
+              </a:defRPr>
+            </a:lvl1pPr>
+          </a:lstStyle>
+          <a:p>
+            <a:pPr algn="r"/>
+            <a:fld id="{F7021451-1387-4CA6-816F-3879F97B5CBC}" type="slidenum">
+              <a:rPr b="0" lang="en-US"/>
+              <a:t>7</a:t>
+            </a:fld>
+            <a:endParaRPr lang="en-US"/>
+          </a:p>
+        </p:txBody>
+      </p:sp>
+    </p:spTree>
+  </p:cSld>
+  <p:clrMapOvr>
+    <a:masterClrMapping/>
+  </p:clrMapOvr>
+</p:sld>
+</file>
+
+<file path=ppt/slides/slide8.xml><?xml version="1.0" encoding="utf-8"?>
+<p:sld xmlns:a="http://schemas.openxmlformats.org/drawingml/2006/main" xmlns:r="http://schemas.openxmlformats.org/officeDocument/2006/relationships" xmlns:p="http://schemas.openxmlformats.org/presentationml/2006/main">
+  <p:cSld name="Slide 8">
+    <p:spTree>
+      <p:nvGrpSpPr>
+        <p:cNvPr id="1" name=""/>
+        <p:cNvGrpSpPr/>
+        <p:nvPr/>
+      </p:nvGrpSpPr>
+      <p:grpSpPr>
+        <a:xfrm>
+          <a:off x="0" y="0"/>
+          <a:ext cx="0" cy="0"/>
+          <a:chOff x="0" y="0"/>
+          <a:chExt cx="0" cy="0"/>
+        </a:xfrm>
+      </p:grpSpPr>
+      <p:sp>
+        <p:nvSpPr>
+          <p:cNvPr id="2" name="Text 0"/>
+          <p:cNvSpPr/>
+          <p:nvPr>
+            <p:ph idx="100" type="title" hasCustomPrompt="1"/>
+          </p:nvPr>
+        </p:nvSpPr>
+        <p:spPr>
+          <a:xfrm>
+            <a:off x="685800" y="914400"/>
+            <a:ext cx="10835640" cy="640080"/>
+          </a:xfrm>
+          <a:prstGeom prst="rect">
+            <a:avLst/>
+          </a:prstGeom>
+          <a:noFill/>
+          <a:ln/>
+        </p:spPr>
+        <p:txBody>
+          <a:bodyPr wrap="square" lIns="0" tIns="0" rIns="0" bIns="0" rtlCol="0" anchor="ctr"/>
+          <a:lstStyle/>
+          <a:p>
+            <a:pPr algn="l" indent="0" marL="0">
+              <a:buNone/>
+            </a:pPr>
+            <a:r>
+              <a:rPr lang="en-US" sz="2800" b="1" dirty="0">
+                <a:solidFill>
+                  <a:schemeClr val="tx2"/>
+                </a:solidFill>
+              </a:rPr>
+              <a:t>Approve PO · Temukan, periksa, putuskan</a:t>
+            </a:r>
+            <a:endParaRPr lang="en-US" sz="2800" dirty="0"/>
+          </a:p>
+        </p:txBody>
+      </p:sp>
+      <p:sp>
+        <p:nvSpPr>
+          <p:cNvPr id="3" name="PO menunggu approval bingkai"/>
+          <p:cNvSpPr/>
+          <p:nvPr/>
+        </p:nvSpPr>
+        <p:spPr>
+          <a:xfrm>
+            <a:off x="621792" y="1678432"/>
+            <a:ext cx="5248656" cy="3684016"/>
+          </a:xfrm>
+          <a:prstGeom prst="roundRect">
+            <a:avLst>
+              <a:gd name="adj" fmla="val 2482"/>
+            </a:avLst>
+          </a:prstGeom>
+          <a:solidFill>
+            <a:srgbClr val="E4EAF4"/>
+          </a:solidFill>
+          <a:ln w="9525">
+            <a:solidFill>
+              <a:srgbClr val="E4EAF4"/>
+            </a:solidFill>
+            <a:prstDash val="solid"/>
+          </a:ln>
+          <a:effectLst>
+            <a:outerShdw sx="100000" sy="100000" kx="0" ky="0" algn="bl" rotWithShape="0" blurRad="101600" dist="25400" dir="5400000">
+              <a:srgbClr val="274289">
+                <a:alpha val="12000"/>
+              </a:srgbClr>
+            </a:outerShdw>
+          </a:effectLst>
+        </p:spPr>
+      </p:sp>
+      <p:pic>
+        <p:nvPicPr>
+          <p:cNvPr id="4" name="PO menunggu approval" descr="Layar PID POS: PO menunggu approval">    </p:cNvPr>
+          <p:cNvPicPr>
+            <a:picLocks noChangeAspect="1"/>
+          </p:cNvPicPr>
+          <p:nvPr/>
+        </p:nvPicPr>
+        <p:blipFill>
+          <a:blip r:embed="rId1"/>
+          <a:stretch>
+            <a:fillRect/>
+          </a:stretch>
+        </p:blipFill>
+        <p:spPr>
+          <a:xfrm>
+            <a:off x="685800" y="1742440"/>
+            <a:ext cx="5120640" cy="3556000"/>
+          </a:xfrm>
+          <a:prstGeom prst="rect">
+            <a:avLst/>
+          </a:prstGeom>
+        </p:spPr>
+      </p:pic>
+      <p:sp>
+        <p:nvSpPr>
+          <p:cNvPr id="5" name="Sorotan PO menunggu approval 1"/>
+          <p:cNvSpPr/>
+          <p:nvPr/>
+        </p:nvSpPr>
+        <p:spPr>
+          <a:xfrm>
+            <a:off x="734229" y="2238925"/>
+            <a:ext cx="581152" cy="197104"/>
+          </a:xfrm>
+          <a:prstGeom prst="roundRect">
+            <a:avLst>
+              <a:gd name="adj" fmla="val 23196"/>
+            </a:avLst>
+          </a:prstGeom>
+          <a:ln w="28575">
+            <a:solidFill>
+              <a:srgbClr val="F2762E"/>
+            </a:solidFill>
+            <a:prstDash val="solid"/>
+          </a:ln>
+        </p:spPr>
+      </p:sp>
+      <p:sp>
+        <p:nvSpPr>
+          <p:cNvPr id="6" name="Nomor 1"/>
+          <p:cNvSpPr/>
+          <p:nvPr/>
+        </p:nvSpPr>
+        <p:spPr>
+          <a:xfrm>
+            <a:off x="606213" y="2110909"/>
+            <a:ext cx="292608" cy="292608"/>
+          </a:xfrm>
+          <a:prstGeom prst="ellipse">
+            <a:avLst/>
+          </a:prstGeom>
+          <a:solidFill>
+            <a:srgbClr val="F2762E"/>
+          </a:solidFill>
+          <a:ln w="19050">
+            <a:solidFill>
+              <a:srgbClr val="FFFFFF"/>
+            </a:solidFill>
+            <a:prstDash val="solid"/>
+          </a:ln>
+        </p:spPr>
+      </p:sp>
+      <p:sp>
+        <p:nvSpPr>
+          <p:cNvPr id="7" name="Text 4"/>
+          <p:cNvSpPr txBox="1"/>
+          <p:nvPr/>
+        </p:nvSpPr>
+        <p:spPr>
+          <a:xfrm>
+            <a:off x="606213" y="2110909"/>
+            <a:ext cx="292608" cy="292608"/>
+          </a:xfrm>
+          <a:prstGeom prst="rect">
+            <a:avLst/>
+          </a:prstGeom>
+          <a:noFill/>
+          <a:ln/>
+        </p:spPr>
+        <p:txBody>
+          <a:bodyPr wrap="square" lIns="0" tIns="0" rIns="0" bIns="0" rtlCol="0" anchor="ctr"/>
+          <a:lstStyle/>
+          <a:p>
+            <a:pPr algn="ctr" indent="0" marL="0">
+              <a:buNone/>
+            </a:pPr>
+            <a:r>
+              <a:rPr lang="en-US" sz="1100" b="1" dirty="0">
+                <a:solidFill>
+                  <a:srgbClr val="FFFFFF"/>
+                </a:solidFill>
+              </a:rPr>
+              <a:t>1</a:t>
+            </a:r>
+            <a:endParaRPr lang="en-US" sz="1100" dirty="0"/>
+          </a:p>
+        </p:txBody>
+      </p:sp>
+      <p:sp>
+        <p:nvSpPr>
+          <p:cNvPr id="8" name="Sorotan PO menunggu approval 2"/>
+          <p:cNvSpPr/>
+          <p:nvPr/>
+        </p:nvSpPr>
+        <p:spPr>
+          <a:xfrm>
+            <a:off x="734229" y="2988056"/>
+            <a:ext cx="1439333" cy="408093"/>
+          </a:xfrm>
+          <a:prstGeom prst="roundRect">
+            <a:avLst>
+              <a:gd name="adj" fmla="val 11203"/>
+            </a:avLst>
+          </a:prstGeom>
+          <a:ln w="28575">
+            <a:solidFill>
+              <a:srgbClr val="F2762E"/>
+            </a:solidFill>
+            <a:prstDash val="solid"/>
+          </a:ln>
+        </p:spPr>
+      </p:sp>
+      <p:sp>
+        <p:nvSpPr>
+          <p:cNvPr id="9" name="Nomor 2"/>
+          <p:cNvSpPr/>
+          <p:nvPr/>
+        </p:nvSpPr>
+        <p:spPr>
+          <a:xfrm>
+            <a:off x="606213" y="2860040"/>
+            <a:ext cx="292608" cy="292608"/>
+          </a:xfrm>
+          <a:prstGeom prst="ellipse">
+            <a:avLst/>
+          </a:prstGeom>
+          <a:solidFill>
+            <a:srgbClr val="F2762E"/>
+          </a:solidFill>
+          <a:ln w="19050">
+            <a:solidFill>
+              <a:srgbClr val="FFFFFF"/>
+            </a:solidFill>
+            <a:prstDash val="solid"/>
+          </a:ln>
+        </p:spPr>
+      </p:sp>
+      <p:sp>
+        <p:nvSpPr>
+          <p:cNvPr id="10" name="Text 7"/>
+          <p:cNvSpPr txBox="1"/>
+          <p:nvPr/>
+        </p:nvSpPr>
+        <p:spPr>
+          <a:xfrm>
+            <a:off x="606213" y="2860040"/>
+            <a:ext cx="292608" cy="292608"/>
+          </a:xfrm>
+          <a:prstGeom prst="rect">
+            <a:avLst/>
+          </a:prstGeom>
+          <a:noFill/>
+          <a:ln/>
+        </p:spPr>
+        <p:txBody>
+          <a:bodyPr wrap="square" lIns="0" tIns="0" rIns="0" bIns="0" rtlCol="0" anchor="ctr"/>
+          <a:lstStyle/>
+          <a:p>
+            <a:pPr algn="ctr" indent="0" marL="0">
+              <a:buNone/>
+            </a:pPr>
+            <a:r>
+              <a:rPr lang="en-US" sz="1100" b="1" dirty="0">
+                <a:solidFill>
+                  <a:srgbClr val="FFFFFF"/>
+                </a:solidFill>
+              </a:rPr>
+              <a:t>2</a:t>
+            </a:r>
+            <a:endParaRPr lang="en-US" sz="1100" dirty="0"/>
+          </a:p>
+        </p:txBody>
+      </p:sp>
+      <p:sp>
+        <p:nvSpPr>
+          <p:cNvPr id="11" name="Sorotan PO menunggu approval 3"/>
+          <p:cNvSpPr/>
+          <p:nvPr/>
+        </p:nvSpPr>
+        <p:spPr>
+          <a:xfrm>
+            <a:off x="2315464" y="4761315"/>
+            <a:ext cx="3302677" cy="564557"/>
+          </a:xfrm>
+          <a:prstGeom prst="roundRect">
+            <a:avLst>
+              <a:gd name="adj" fmla="val 8098"/>
+            </a:avLst>
+          </a:prstGeom>
+          <a:ln w="28575">
+            <a:solidFill>
+              <a:srgbClr val="F2762E"/>
+            </a:solidFill>
+            <a:prstDash val="solid"/>
+          </a:ln>
+        </p:spPr>
+      </p:sp>
+      <p:sp>
+        <p:nvSpPr>
+          <p:cNvPr id="12" name="Nomor 3"/>
+          <p:cNvSpPr/>
+          <p:nvPr/>
+        </p:nvSpPr>
+        <p:spPr>
+          <a:xfrm>
+            <a:off x="2187448" y="4633299"/>
+            <a:ext cx="292608" cy="292608"/>
+          </a:xfrm>
+          <a:prstGeom prst="ellipse">
+            <a:avLst/>
+          </a:prstGeom>
+          <a:solidFill>
+            <a:srgbClr val="F2762E"/>
+          </a:solidFill>
+          <a:ln w="19050">
+            <a:solidFill>
+              <a:srgbClr val="FFFFFF"/>
+            </a:solidFill>
+            <a:prstDash val="solid"/>
+          </a:ln>
+        </p:spPr>
+      </p:sp>
+      <p:sp>
+        <p:nvSpPr>
+          <p:cNvPr id="13" name="Text 10"/>
+          <p:cNvSpPr txBox="1"/>
+          <p:nvPr/>
+        </p:nvSpPr>
+        <p:spPr>
+          <a:xfrm>
+            <a:off x="2187448" y="4633299"/>
+            <a:ext cx="292608" cy="292608"/>
+          </a:xfrm>
+          <a:prstGeom prst="rect">
+            <a:avLst/>
+          </a:prstGeom>
+          <a:noFill/>
+          <a:ln/>
+        </p:spPr>
+        <p:txBody>
+          <a:bodyPr wrap="square" lIns="0" tIns="0" rIns="0" bIns="0" rtlCol="0" anchor="ctr"/>
+          <a:lstStyle/>
+          <a:p>
+            <a:pPr algn="ctr" indent="0" marL="0">
+              <a:buNone/>
+            </a:pPr>
+            <a:r>
+              <a:rPr lang="en-US" sz="1100" b="1" dirty="0">
+                <a:solidFill>
+                  <a:srgbClr val="FFFFFF"/>
+                </a:solidFill>
+              </a:rPr>
+              <a:t>3</a:t>
+            </a:r>
+            <a:endParaRPr lang="en-US" sz="1100" dirty="0"/>
+          </a:p>
+        </p:txBody>
+      </p:sp>
+      <p:sp>
+        <p:nvSpPr>
+          <p:cNvPr id="14" name="Langkah 1"/>
+          <p:cNvSpPr/>
+          <p:nvPr/>
+        </p:nvSpPr>
+        <p:spPr>
+          <a:xfrm>
+            <a:off x="6126480" y="1783080"/>
+            <a:ext cx="329184" cy="329184"/>
+          </a:xfrm>
+          <a:prstGeom prst="ellipse">
+            <a:avLst/>
+          </a:prstGeom>
+          <a:solidFill>
+            <a:srgbClr val="274289"/>
+          </a:solidFill>
+          <a:ln w="12700">
+            <a:solidFill>
+              <a:srgbClr val="274289"/>
+            </a:solidFill>
+            <a:prstDash val="solid"/>
+          </a:ln>
+        </p:spPr>
+      </p:sp>
+      <p:sp>
+        <p:nvSpPr>
+          <p:cNvPr id="15" name="Text 12"/>
+          <p:cNvSpPr txBox="1"/>
+          <p:nvPr/>
+        </p:nvSpPr>
+        <p:spPr>
+          <a:xfrm>
+            <a:off x="6126480" y="1783080"/>
+            <a:ext cx="329184" cy="329184"/>
+          </a:xfrm>
+          <a:prstGeom prst="rect">
+            <a:avLst/>
+          </a:prstGeom>
+          <a:noFill/>
+          <a:ln/>
+        </p:spPr>
+        <p:txBody>
+          <a:bodyPr wrap="square" lIns="0" tIns="0" rIns="0" bIns="0" rtlCol="0" anchor="ctr"/>
+          <a:lstStyle/>
+          <a:p>
+            <a:pPr algn="ctr" indent="0" marL="0">
+              <a:buNone/>
+            </a:pPr>
+            <a:r>
+              <a:rPr lang="en-US" sz="1200" b="1" dirty="0">
+                <a:solidFill>
+                  <a:srgbClr val="FFFFFF"/>
+                </a:solidFill>
+              </a:rPr>
+              <a:t>1</a:t>
+            </a:r>
+            <a:endParaRPr lang="en-US" sz="1200" dirty="0"/>
+          </a:p>
+        </p:txBody>
+      </p:sp>
+      <p:sp>
+        <p:nvSpPr>
+          <p:cNvPr id="16" name="Text 13"/>
+          <p:cNvSpPr txBox="1"/>
+          <p:nvPr/>
+        </p:nvSpPr>
+        <p:spPr>
+          <a:xfrm>
+            <a:off x="6583680" y="1764792"/>
+            <a:ext cx="4937760" cy="566928"/>
+          </a:xfrm>
+          <a:prstGeom prst="rect">
+            <a:avLst/>
+          </a:prstGeom>
+          <a:noFill/>
+          <a:ln/>
+        </p:spPr>
+        <p:txBody>
+          <a:bodyPr wrap="square" lIns="0" tIns="0" rIns="0" bIns="0" rtlCol="0" anchor="t"/>
+          <a:lstStyle/>
+          <a:p>
+            <a:pPr indent="0" marL="0">
+              <a:buNone/>
+            </a:pPr>
+            <a:r>
+              <a:rPr lang="en-US" sz="1300" b="1" dirty="0">
+                <a:solidFill>
+                  <a:srgbClr val="274289"/>
+                </a:solidFill>
+              </a:rPr>
+              <a:t>Tab Giliran saya</a:t>
+            </a:r>
+            <a:endParaRPr lang="en-US" sz="1300" dirty="0"/>
+          </a:p>
+          <a:p>
+            <a:pPr indent="0" marL="0">
+              <a:buNone/>
+            </a:pPr>
+            <a:r>
+              <a:rPr lang="en-US" sz="1300" dirty="0">
+                <a:solidFill>
+                  <a:srgbClr val="1B2437"/>
+                </a:solidFill>
+              </a:rPr>
+              <a:t>Permintaan berstatus Approval PO · Draft SAP menunggu Anda (angka di tab = jumlahnya).</a:t>
+            </a:r>
+            <a:endParaRPr lang="en-US" sz="1300" dirty="0"/>
+          </a:p>
+        </p:txBody>
+      </p:sp>
+      <p:sp>
+        <p:nvSpPr>
+          <p:cNvPr id="17" name="Langkah 2"/>
+          <p:cNvSpPr/>
+          <p:nvPr/>
+        </p:nvSpPr>
+        <p:spPr>
+          <a:xfrm>
+            <a:off x="6126480" y="2441448"/>
+            <a:ext cx="329184" cy="329184"/>
+          </a:xfrm>
+          <a:prstGeom prst="ellipse">
+            <a:avLst/>
+          </a:prstGeom>
+          <a:solidFill>
+            <a:srgbClr val="274289"/>
+          </a:solidFill>
+          <a:ln w="12700">
+            <a:solidFill>
+              <a:srgbClr val="274289"/>
+            </a:solidFill>
+            <a:prstDash val="solid"/>
+          </a:ln>
+        </p:spPr>
+      </p:sp>
+      <p:sp>
+        <p:nvSpPr>
+          <p:cNvPr id="18" name="Text 15"/>
+          <p:cNvSpPr txBox="1"/>
+          <p:nvPr/>
+        </p:nvSpPr>
+        <p:spPr>
+          <a:xfrm>
+            <a:off x="6126480" y="2441448"/>
+            <a:ext cx="329184" cy="329184"/>
+          </a:xfrm>
+          <a:prstGeom prst="rect">
+            <a:avLst/>
+          </a:prstGeom>
+          <a:noFill/>
+          <a:ln/>
+        </p:spPr>
+        <p:txBody>
+          <a:bodyPr wrap="square" lIns="0" tIns="0" rIns="0" bIns="0" rtlCol="0" anchor="ctr"/>
+          <a:lstStyle/>
+          <a:p>
+            <a:pPr algn="ctr" indent="0" marL="0">
+              <a:buNone/>
+            </a:pPr>
+            <a:r>
+              <a:rPr lang="en-US" sz="1200" b="1" dirty="0">
+                <a:solidFill>
+                  <a:srgbClr val="FFFFFF"/>
+                </a:solidFill>
+              </a:rPr>
+              <a:t>2</a:t>
+            </a:r>
+            <a:endParaRPr lang="en-US" sz="1200" dirty="0"/>
+          </a:p>
+        </p:txBody>
+      </p:sp>
+      <p:sp>
+        <p:nvSpPr>
+          <p:cNvPr id="19" name="Text 16"/>
+          <p:cNvSpPr txBox="1"/>
+          <p:nvPr/>
+        </p:nvSpPr>
+        <p:spPr>
+          <a:xfrm>
+            <a:off x="6583680" y="2423160"/>
+            <a:ext cx="4937760" cy="566928"/>
+          </a:xfrm>
+          <a:prstGeom prst="rect">
+            <a:avLst/>
+          </a:prstGeom>
+          <a:noFill/>
+          <a:ln/>
+        </p:spPr>
+        <p:txBody>
+          <a:bodyPr wrap="square" lIns="0" tIns="0" rIns="0" bIns="0" rtlCol="0" anchor="t"/>
+          <a:lstStyle/>
+          <a:p>
+            <a:pPr indent="0" marL="0">
+              <a:buNone/>
+            </a:pPr>
+            <a:r>
+              <a:rPr lang="en-US" sz="1300" b="1" dirty="0">
+                <a:solidFill>
+                  <a:srgbClr val="274289"/>
+                </a:solidFill>
+              </a:rPr>
+              <a:t>Buka permintaannya</a:t>
+            </a:r>
+            <a:endParaRPr lang="en-US" sz="1300" dirty="0"/>
+          </a:p>
+          <a:p>
+            <a:pPr indent="0" marL="0">
+              <a:buNone/>
+            </a:pPr>
+            <a:r>
+              <a:rPr lang="en-US" sz="1300" dirty="0">
+                <a:solidFill>
+                  <a:srgbClr val="1B2437"/>
+                </a:solidFill>
+              </a:rPr>
+              <a:t>Kotak Approval PO hanya muncul bila level itu giliran Anda.</a:t>
+            </a:r>
+            <a:endParaRPr lang="en-US" sz="1300" dirty="0"/>
+          </a:p>
+        </p:txBody>
+      </p:sp>
+      <p:sp>
+        <p:nvSpPr>
+          <p:cNvPr id="20" name="Langkah 3"/>
+          <p:cNvSpPr/>
+          <p:nvPr/>
+        </p:nvSpPr>
+        <p:spPr>
+          <a:xfrm>
+            <a:off x="6126480" y="3099816"/>
+            <a:ext cx="329184" cy="329184"/>
+          </a:xfrm>
+          <a:prstGeom prst="ellipse">
+            <a:avLst/>
+          </a:prstGeom>
+          <a:solidFill>
+            <a:srgbClr val="274289"/>
+          </a:solidFill>
+          <a:ln w="12700">
+            <a:solidFill>
+              <a:srgbClr val="274289"/>
+            </a:solidFill>
+            <a:prstDash val="solid"/>
+          </a:ln>
+        </p:spPr>
+      </p:sp>
+      <p:sp>
+        <p:nvSpPr>
+          <p:cNvPr id="21" name="Text 18"/>
+          <p:cNvSpPr txBox="1"/>
+          <p:nvPr/>
+        </p:nvSpPr>
+        <p:spPr>
+          <a:xfrm>
+            <a:off x="6126480" y="3099816"/>
+            <a:ext cx="329184" cy="329184"/>
+          </a:xfrm>
+          <a:prstGeom prst="rect">
+            <a:avLst/>
+          </a:prstGeom>
+          <a:noFill/>
+          <a:ln/>
+        </p:spPr>
+        <p:txBody>
+          <a:bodyPr wrap="square" lIns="0" tIns="0" rIns="0" bIns="0" rtlCol="0" anchor="ctr"/>
+          <a:lstStyle/>
+          <a:p>
+            <a:pPr algn="ctr" indent="0" marL="0">
+              <a:buNone/>
+            </a:pPr>
+            <a:r>
+              <a:rPr lang="en-US" sz="1200" b="1" dirty="0">
+                <a:solidFill>
+                  <a:srgbClr val="FFFFFF"/>
+                </a:solidFill>
+              </a:rPr>
+              <a:t>3</a:t>
+            </a:r>
+            <a:endParaRPr lang="en-US" sz="1200" dirty="0"/>
+          </a:p>
+        </p:txBody>
+      </p:sp>
+      <p:sp>
+        <p:nvSpPr>
+          <p:cNvPr id="22" name="Text 19"/>
+          <p:cNvSpPr txBox="1"/>
+          <p:nvPr/>
+        </p:nvSpPr>
+        <p:spPr>
+          <a:xfrm>
+            <a:off x="6583680" y="3081528"/>
+            <a:ext cx="4937760" cy="502920"/>
+          </a:xfrm>
+          <a:prstGeom prst="rect">
+            <a:avLst/>
+          </a:prstGeom>
+          <a:noFill/>
+          <a:ln/>
+        </p:spPr>
+        <p:txBody>
+          <a:bodyPr wrap="square" lIns="0" tIns="0" rIns="0" bIns="0" rtlCol="0" anchor="t"/>
+          <a:lstStyle/>
+          <a:p>
+            <a:pPr indent="0" marL="0">
+              <a:buNone/>
+            </a:pPr>
+            <a:r>
+              <a:rPr lang="en-US" sz="1300" b="1" dirty="0">
+                <a:solidFill>
+                  <a:srgbClr val="274289"/>
+                </a:solidFill>
+              </a:rPr>
+              <a:t>Kartu “Menunggu approval · level n” → Lihat</a:t>
+            </a:r>
+            <a:endParaRPr lang="en-US" sz="1300" dirty="0"/>
+          </a:p>
+          <a:p>
+            <a:pPr indent="0" marL="0">
+              <a:buNone/>
+            </a:pPr>
+            <a:r>
+              <a:rPr lang="en-US" sz="1300" dirty="0">
+                <a:solidFill>
+                  <a:srgbClr val="1B2437"/>
+                </a:solidFill>
+              </a:rPr>
+              <a:t>Periksa sebelum memutuskan:</a:t>
+            </a:r>
+            <a:endParaRPr lang="en-US" sz="1300" dirty="0"/>
+          </a:p>
+        </p:txBody>
+      </p:sp>
+      <p:sp>
+        <p:nvSpPr>
+          <p:cNvPr id="23" name="Text 20"/>
+          <p:cNvSpPr txBox="1"/>
+          <p:nvPr/>
+        </p:nvSpPr>
+        <p:spPr>
+          <a:xfrm>
+            <a:off x="6583680" y="3657600"/>
+            <a:ext cx="4937760" cy="1463040"/>
+          </a:xfrm>
+          <a:prstGeom prst="rect">
+            <a:avLst/>
+          </a:prstGeom>
+          <a:noFill/>
+          <a:ln/>
+        </p:spPr>
+        <p:txBody>
+          <a:bodyPr wrap="square" lIns="0" tIns="0" rIns="0" bIns="0" rtlCol="0" anchor="t"/>
+          <a:lstStyle/>
+          <a:p>
+            <a:pPr indent="0" marL="0">
+              <a:spcAft>
+                <a:spcPts val="200"/>
+              </a:spcAft>
+              <a:buNone/>
+            </a:pPr>
+            <a:r>
+              <a:rPr lang="en-US" sz="1250" dirty="0">
+                <a:solidFill>
+                  <a:srgbClr val="1B2437"/>
+                </a:solidFill>
+              </a:rPr>
+              <a:t>✓  Vendor benar dan aktif di SAP</a:t>
+            </a:r>
+            <a:endParaRPr lang="en-US" sz="1250" dirty="0"/>
+          </a:p>
+          <a:p>
+            <a:pPr indent="0" marL="0">
+              <a:spcAft>
+                <a:spcPts val="200"/>
+              </a:spcAft>
+              <a:buNone/>
+            </a:pPr>
+            <a:r>
+              <a:rPr lang="en-US" sz="1250" dirty="0">
+                <a:solidFill>
+                  <a:srgbClr val="1B2437"/>
+                </a:solidFill>
+              </a:rPr>
+              <a:t>✓  Harga beli wajar dibanding PO sebelumnya</a:t>
+            </a:r>
+            <a:endParaRPr lang="en-US" sz="1250" dirty="0"/>
+          </a:p>
+          <a:p>
+            <a:pPr indent="0" marL="0">
+              <a:spcAft>
+                <a:spcPts val="200"/>
+              </a:spcAft>
+              <a:buNone/>
+            </a:pPr>
+            <a:r>
+              <a:rPr lang="en-US" sz="1250" dirty="0">
+                <a:solidFill>
+                  <a:srgbClr val="1B2437"/>
+                </a:solidFill>
+              </a:rPr>
+              <a:t>✓  Pajak per baris sesuai (mis. VAT I-E 11%, VAT I-C 0%)</a:t>
+            </a:r>
+            <a:endParaRPr lang="en-US" sz="1250" dirty="0"/>
+          </a:p>
+          <a:p>
+            <a:pPr indent="0" marL="0">
+              <a:spcAft>
+                <a:spcPts val="200"/>
+              </a:spcAft>
+              <a:buNone/>
+            </a:pPr>
+            <a:r>
+              <a:rPr lang="en-US" sz="1250" dirty="0">
+                <a:solidFill>
+                  <a:srgbClr val="1B2437"/>
+                </a:solidFill>
+              </a:rPr>
+              <a:t>✓  Qty dan dek sesuai permintaan kapal</a:t>
+            </a:r>
+            <a:endParaRPr lang="en-US" sz="1250" dirty="0"/>
+          </a:p>
+          <a:p>
+            <a:pPr indent="0" marL="0">
+              <a:spcAft>
+                <a:spcPts val="200"/>
+              </a:spcAft>
+              <a:buNone/>
+            </a:pPr>
+            <a:r>
+              <a:rPr lang="en-US" sz="1250" dirty="0">
+                <a:solidFill>
+                  <a:srgbClr val="1B2437"/>
+                </a:solidFill>
+              </a:rPr>
+              <a:t>✓  Catatan pengiriman (tanggal, DC tujuan) jelas</a:t>
+            </a:r>
+            <a:endParaRPr lang="en-US" sz="1250" dirty="0"/>
+          </a:p>
+        </p:txBody>
+      </p:sp>
+      <p:sp>
+        <p:nvSpPr>
+          <p:cNvPr id="24" name="Kotak Approval PO bingkai"/>
+          <p:cNvSpPr/>
+          <p:nvPr/>
+        </p:nvSpPr>
+        <p:spPr>
+          <a:xfrm>
+            <a:off x="621792" y="5389972"/>
+            <a:ext cx="5248656" cy="1198695"/>
+          </a:xfrm>
+          <a:prstGeom prst="roundRect">
+            <a:avLst>
+              <a:gd name="adj" fmla="val 7628"/>
+            </a:avLst>
+          </a:prstGeom>
+          <a:solidFill>
+            <a:srgbClr val="E4EAF4"/>
+          </a:solidFill>
+          <a:ln w="9525">
+            <a:solidFill>
+              <a:srgbClr val="E4EAF4"/>
+            </a:solidFill>
+            <a:prstDash val="solid"/>
+          </a:ln>
+          <a:effectLst>
+            <a:outerShdw sx="100000" sy="100000" kx="0" ky="0" algn="bl" rotWithShape="0" blurRad="101600" dist="25400" dir="5400000">
+              <a:srgbClr val="274289">
+                <a:alpha val="12000"/>
+              </a:srgbClr>
+            </a:outerShdw>
+          </a:effectLst>
+        </p:spPr>
+      </p:sp>
+      <p:pic>
+        <p:nvPicPr>
+          <p:cNvPr id="25" name="Kotak Approval PO" descr="Layar PID POS: Kotak Approval PO">    </p:cNvPr>
+          <p:cNvPicPr>
+            <a:picLocks noChangeAspect="1"/>
+          </p:cNvPicPr>
+          <p:nvPr/>
+        </p:nvPicPr>
+        <p:blipFill>
+          <a:blip r:embed="rId2"/>
+          <a:stretch>
+            <a:fillRect/>
+          </a:stretch>
+        </p:blipFill>
+        <p:spPr>
+          <a:xfrm>
+            <a:off x="685800" y="5453980"/>
+            <a:ext cx="5120640" cy="1070679"/>
+          </a:xfrm>
+          <a:prstGeom prst="rect">
+            <a:avLst/>
+          </a:prstGeom>
+        </p:spPr>
+      </p:pic>
+      <p:sp>
+        <p:nvSpPr>
+          <p:cNvPr id="26" name="Sorotan Kotak Approval PO 1"/>
+          <p:cNvSpPr/>
+          <p:nvPr/>
+        </p:nvSpPr>
+        <p:spPr>
+          <a:xfrm>
+            <a:off x="5173841" y="6140335"/>
+            <a:ext cx="570807" cy="330292"/>
+          </a:xfrm>
+          <a:prstGeom prst="roundRect">
+            <a:avLst>
+              <a:gd name="adj" fmla="val 13842"/>
+            </a:avLst>
+          </a:prstGeom>
+          <a:ln w="28575">
+            <a:solidFill>
+              <a:srgbClr val="F2762E"/>
+            </a:solidFill>
+            <a:prstDash val="solid"/>
+          </a:ln>
+        </p:spPr>
+      </p:sp>
+      <p:sp>
+        <p:nvSpPr>
+          <p:cNvPr id="27" name="Sorotan Kotak Approval PO 2"/>
+          <p:cNvSpPr/>
+          <p:nvPr/>
+        </p:nvSpPr>
+        <p:spPr>
+          <a:xfrm>
+            <a:off x="743712" y="6140335"/>
+            <a:ext cx="497101" cy="330292"/>
+          </a:xfrm>
+          <a:prstGeom prst="roundRect">
+            <a:avLst>
+              <a:gd name="adj" fmla="val 13842"/>
+            </a:avLst>
+          </a:prstGeom>
+          <a:ln w="28575">
+            <a:solidFill>
+              <a:srgbClr val="F2762E"/>
+            </a:solidFill>
+            <a:prstDash val="solid"/>
+          </a:ln>
+        </p:spPr>
+      </p:sp>
+      <p:sp>
+        <p:nvSpPr>
+          <p:cNvPr id="25" name="Slide Number Placeholder 0"/>
+          <p:cNvSpPr>
+            <a:spLocks noGrp="1"/>
+          </p:cNvSpPr>
+          <p:nvPr>
+            <p:ph type="sldNum" sz="quarter" idx="4294967295"/>
+          </p:nvPr>
+        </p:nvSpPr>
+        <p:spPr>
+          <a:xfrm>
+            <a:off x="11109960" y="6309360"/>
+            <a:ext cx="457200" cy="274320"/>
+          </a:xfrm>
+          <a:prstGeom prst="rect">
+            <a:avLst/>
+          </a:prstGeom>
+          <a:extLst>
+            <a:ext uri="{C572A759-6A51-4108-AA02-DFA0A04FC94B}">
+              <ma14:wrappingTextBoxFlag xmlns:ma14="http://schemas.microsoft.com/office/mac/drawingml/2011/main" val="0"/>
+            </a:ext>
+          </a:extLst>
+        </p:spPr>
+        <p:txBody>
+          <a:bodyPr/>
+          <a:lstStyle>
+            <a:lvl1pPr>
+              <a:defRPr sz="1000">
+                <a:solidFill>
+                  <a:srgbClr val="5B6B86"/>
+                </a:solidFill>
+              </a:defRPr>
+            </a:lvl1pPr>
+          </a:lstStyle>
+          <a:p>
+            <a:pPr algn="r"/>
+            <a:fld id="{F7021451-1387-4CA6-816F-3879F97B5CBC}" type="slidenum">
+              <a:rPr b="0" lang="en-US"/>
+              <a:t>8</a:t>
+            </a:fld>
+            <a:endParaRPr lang="en-US"/>
+          </a:p>
+        </p:txBody>
+      </p:sp>
+    </p:spTree>
+  </p:cSld>
+  <p:clrMapOvr>
+    <a:masterClrMapping/>
+  </p:clrMapOvr>
+</p:sld>
+</file>
+
+<file path=ppt/slides/slide9.xml><?xml version="1.0" encoding="utf-8"?>
+<p:sld xmlns:a="http://schemas.openxmlformats.org/drawingml/2006/main" xmlns:r="http://schemas.openxmlformats.org/officeDocument/2006/relationships" xmlns:p="http://schemas.openxmlformats.org/presentationml/2006/main">
+  <p:cSld name="Slide 9">
+    <p:spTree>
+      <p:nvGrpSpPr>
+        <p:cNvPr id="1" name=""/>
+        <p:cNvGrpSpPr/>
+        <p:nvPr/>
+      </p:nvGrpSpPr>
+      <p:grpSpPr>
+        <a:xfrm>
+          <a:off x="0" y="0"/>
+          <a:ext cx="0" cy="0"/>
+          <a:chOff x="0" y="0"/>
+          <a:chExt cx="0" cy="0"/>
+        </a:xfrm>
+      </p:grpSpPr>
+      <p:sp>
+        <p:nvSpPr>
+          <p:cNvPr id="2" name="Text 0"/>
+          <p:cNvSpPr/>
+          <p:nvPr>
+            <p:ph idx="100" type="title" hasCustomPrompt="1"/>
+          </p:nvPr>
+        </p:nvSpPr>
+        <p:spPr>
+          <a:xfrm>
+            <a:off x="685800" y="914400"/>
+            <a:ext cx="10835640" cy="640080"/>
+          </a:xfrm>
+          <a:prstGeom prst="rect">
+            <a:avLst/>
+          </a:prstGeom>
+          <a:noFill/>
+          <a:ln/>
+        </p:spPr>
+        <p:txBody>
+          <a:bodyPr wrap="square" lIns="0" tIns="0" rIns="0" bIns="0" rtlCol="0" anchor="ctr"/>
+          <a:lstStyle/>
+          <a:p>
+            <a:pPr algn="l" indent="0" marL="0">
+              <a:buNone/>
+            </a:pPr>
+            <a:r>
+              <a:rPr lang="en-US" sz="2800" b="1" dirty="0">
+                <a:solidFill>
+                  <a:schemeClr val="tx2"/>
+                </a:solidFill>
+              </a:rPr>
+              <a:t>Approve PO · Setujui atau tolak</a:t>
+            </a:r>
+            <a:endParaRPr lang="en-US" sz="2800" dirty="0"/>
+          </a:p>
+        </p:txBody>
+      </p:sp>
+      <p:sp>
+        <p:nvSpPr>
+          <p:cNvPr id="3" name="Kotak Approval PO bingkai"/>
+          <p:cNvSpPr/>
+          <p:nvPr/>
+        </p:nvSpPr>
+        <p:spPr>
+          <a:xfrm>
+            <a:off x="1557064" y="1673352"/>
+            <a:ext cx="9093112" cy="2002536"/>
+          </a:xfrm>
+          <a:prstGeom prst="roundRect">
+            <a:avLst>
+              <a:gd name="adj" fmla="val 4566"/>
+            </a:avLst>
+          </a:prstGeom>
+          <a:solidFill>
+            <a:srgbClr val="E4EAF4"/>
+          </a:solidFill>
+          <a:ln w="9525">
+            <a:solidFill>
+              <a:srgbClr val="E4EAF4"/>
+            </a:solidFill>
+            <a:prstDash val="solid"/>
+          </a:ln>
+          <a:effectLst>
+            <a:outerShdw sx="100000" sy="100000" kx="0" ky="0" algn="bl" rotWithShape="0" blurRad="101600" dist="25400" dir="5400000">
+              <a:srgbClr val="274289">
+                <a:alpha val="12000"/>
+              </a:srgbClr>
+            </a:outerShdw>
+          </a:effectLst>
+        </p:spPr>
+      </p:sp>
+      <p:pic>
+        <p:nvPicPr>
+          <p:cNvPr id="4" name="Kotak Approval PO" descr="Layar PID POS: Kotak Approval PO">    </p:cNvPr>
+          <p:cNvPicPr>
+            <a:picLocks noChangeAspect="1"/>
+          </p:cNvPicPr>
+          <p:nvPr/>
+        </p:nvPicPr>
+        <p:blipFill>
+          <a:blip r:embed="rId1"/>
+          <a:stretch>
+            <a:fillRect/>
+          </a:stretch>
+        </p:blipFill>
+        <p:spPr>
+          <a:xfrm>
+            <a:off x="1621072" y="1737360"/>
+            <a:ext cx="8965096" cy="1874520"/>
+          </a:xfrm>
+          <a:prstGeom prst="rect">
+            <a:avLst/>
+          </a:prstGeom>
+        </p:spPr>
+      </p:pic>
+      <p:sp>
+        <p:nvSpPr>
+          <p:cNvPr id="5" name="Sorotan Kotak Approval PO 1"/>
+          <p:cNvSpPr/>
+          <p:nvPr/>
+        </p:nvSpPr>
+        <p:spPr>
+          <a:xfrm>
+            <a:off x="9499225" y="2959608"/>
+            <a:ext cx="958165" cy="537077"/>
+          </a:xfrm>
+          <a:prstGeom prst="roundRect">
+            <a:avLst>
+              <a:gd name="adj" fmla="val 8513"/>
+            </a:avLst>
+          </a:prstGeom>
+          <a:ln w="28575">
+            <a:solidFill>
+              <a:srgbClr val="F2762E"/>
+            </a:solidFill>
+            <a:prstDash val="solid"/>
+          </a:ln>
+        </p:spPr>
+      </p:sp>
+      <p:sp>
+        <p:nvSpPr>
+          <p:cNvPr id="6" name="Nomor 1"/>
+          <p:cNvSpPr/>
+          <p:nvPr/>
+        </p:nvSpPr>
+        <p:spPr>
+          <a:xfrm>
+            <a:off x="9371209" y="2831592"/>
+            <a:ext cx="292608" cy="292608"/>
+          </a:xfrm>
+          <a:prstGeom prst="ellipse">
+            <a:avLst/>
+          </a:prstGeom>
+          <a:solidFill>
+            <a:srgbClr val="F2762E"/>
+          </a:solidFill>
+          <a:ln w="19050">
+            <a:solidFill>
+              <a:srgbClr val="FFFFFF"/>
+            </a:solidFill>
+            <a:prstDash val="solid"/>
+          </a:ln>
+        </p:spPr>
+      </p:sp>
+      <p:sp>
+        <p:nvSpPr>
+          <p:cNvPr id="7" name="Text 4"/>
+          <p:cNvSpPr txBox="1"/>
+          <p:nvPr/>
+        </p:nvSpPr>
+        <p:spPr>
+          <a:xfrm>
+            <a:off x="9371209" y="2831592"/>
+            <a:ext cx="292608" cy="292608"/>
+          </a:xfrm>
+          <a:prstGeom prst="rect">
+            <a:avLst/>
+          </a:prstGeom>
+          <a:noFill/>
+          <a:ln/>
+        </p:spPr>
+        <p:txBody>
+          <a:bodyPr wrap="square" lIns="0" tIns="0" rIns="0" bIns="0" rtlCol="0" anchor="ctr"/>
+          <a:lstStyle/>
+          <a:p>
+            <a:pPr algn="ctr" indent="0" marL="0">
+              <a:buNone/>
+            </a:pPr>
+            <a:r>
+              <a:rPr lang="en-US" sz="1100" b="1" dirty="0">
+                <a:solidFill>
+                  <a:srgbClr val="FFFFFF"/>
+                </a:solidFill>
+              </a:rPr>
+              <a:t>1</a:t>
+            </a:r>
+            <a:endParaRPr lang="en-US" sz="1100" dirty="0"/>
+          </a:p>
+        </p:txBody>
+      </p:sp>
+      <p:sp>
+        <p:nvSpPr>
+          <p:cNvPr id="8" name="Sorotan Kotak Approval PO 2"/>
+          <p:cNvSpPr/>
+          <p:nvPr/>
+        </p:nvSpPr>
+        <p:spPr>
+          <a:xfrm>
+            <a:off x="1743058" y="2470603"/>
+            <a:ext cx="8714331" cy="516702"/>
+          </a:xfrm>
+          <a:prstGeom prst="roundRect">
+            <a:avLst>
+              <a:gd name="adj" fmla="val 8848"/>
+            </a:avLst>
+          </a:prstGeom>
+          <a:ln w="28575">
+            <a:solidFill>
+              <a:srgbClr val="F2762E"/>
+            </a:solidFill>
+            <a:prstDash val="solid"/>
+          </a:ln>
+        </p:spPr>
+      </p:sp>
+      <p:sp>
+        <p:nvSpPr>
+          <p:cNvPr id="9" name="Nomor 2"/>
+          <p:cNvSpPr/>
+          <p:nvPr/>
+        </p:nvSpPr>
+        <p:spPr>
+          <a:xfrm>
+            <a:off x="1615042" y="2342587"/>
+            <a:ext cx="292608" cy="292608"/>
+          </a:xfrm>
+          <a:prstGeom prst="ellipse">
+            <a:avLst/>
+          </a:prstGeom>
+          <a:solidFill>
+            <a:srgbClr val="F2762E"/>
+          </a:solidFill>
+          <a:ln w="19050">
+            <a:solidFill>
+              <a:srgbClr val="FFFFFF"/>
+            </a:solidFill>
+            <a:prstDash val="solid"/>
+          </a:ln>
+        </p:spPr>
+      </p:sp>
+      <p:sp>
+        <p:nvSpPr>
+          <p:cNvPr id="10" name="Text 7"/>
+          <p:cNvSpPr txBox="1"/>
+          <p:nvPr/>
+        </p:nvSpPr>
+        <p:spPr>
+          <a:xfrm>
+            <a:off x="1615042" y="2342587"/>
+            <a:ext cx="292608" cy="292608"/>
+          </a:xfrm>
+          <a:prstGeom prst="rect">
+            <a:avLst/>
+          </a:prstGeom>
+          <a:noFill/>
+          <a:ln/>
+        </p:spPr>
+        <p:txBody>
+          <a:bodyPr wrap="square" lIns="0" tIns="0" rIns="0" bIns="0" rtlCol="0" anchor="ctr"/>
+          <a:lstStyle/>
+          <a:p>
+            <a:pPr algn="ctr" indent="0" marL="0">
+              <a:buNone/>
+            </a:pPr>
+            <a:r>
+              <a:rPr lang="en-US" sz="1100" b="1" dirty="0">
+                <a:solidFill>
+                  <a:srgbClr val="FFFFFF"/>
+                </a:solidFill>
+              </a:rPr>
+              <a:t>2</a:t>
+            </a:r>
+            <a:endParaRPr lang="en-US" sz="1100" dirty="0"/>
+          </a:p>
+        </p:txBody>
+      </p:sp>
+      <p:sp>
+        <p:nvSpPr>
+          <p:cNvPr id="11" name="Sorotan Kotak Approval PO 3"/>
+          <p:cNvSpPr/>
+          <p:nvPr/>
+        </p:nvSpPr>
+        <p:spPr>
+          <a:xfrm>
+            <a:off x="1743058" y="2959608"/>
+            <a:ext cx="829122" cy="537077"/>
+          </a:xfrm>
+          <a:prstGeom prst="roundRect">
+            <a:avLst>
+              <a:gd name="adj" fmla="val 8513"/>
+            </a:avLst>
+          </a:prstGeom>
+          <a:ln w="28575">
+            <a:solidFill>
+              <a:srgbClr val="F2762E"/>
+            </a:solidFill>
+            <a:prstDash val="solid"/>
+          </a:ln>
+        </p:spPr>
+      </p:sp>
+      <p:sp>
+        <p:nvSpPr>
+          <p:cNvPr id="12" name="Nomor 3"/>
+          <p:cNvSpPr/>
+          <p:nvPr/>
+        </p:nvSpPr>
+        <p:spPr>
+          <a:xfrm>
+            <a:off x="1615042" y="2831592"/>
+            <a:ext cx="292608" cy="292608"/>
+          </a:xfrm>
+          <a:prstGeom prst="ellipse">
+            <a:avLst/>
+          </a:prstGeom>
+          <a:solidFill>
+            <a:srgbClr val="F2762E"/>
+          </a:solidFill>
+          <a:ln w="19050">
+            <a:solidFill>
+              <a:srgbClr val="FFFFFF"/>
+            </a:solidFill>
+            <a:prstDash val="solid"/>
+          </a:ln>
+        </p:spPr>
+      </p:sp>
+      <p:sp>
+        <p:nvSpPr>
+          <p:cNvPr id="13" name="Text 10"/>
+          <p:cNvSpPr txBox="1"/>
+          <p:nvPr/>
+        </p:nvSpPr>
+        <p:spPr>
+          <a:xfrm>
+            <a:off x="1615042" y="2831592"/>
+            <a:ext cx="292608" cy="292608"/>
+          </a:xfrm>
+          <a:prstGeom prst="rect">
+            <a:avLst/>
+          </a:prstGeom>
+          <a:noFill/>
+          <a:ln/>
+        </p:spPr>
+        <p:txBody>
+          <a:bodyPr wrap="square" lIns="0" tIns="0" rIns="0" bIns="0" rtlCol="0" anchor="ctr"/>
+          <a:lstStyle/>
+          <a:p>
+            <a:pPr algn="ctr" indent="0" marL="0">
+              <a:buNone/>
+            </a:pPr>
+            <a:r>
+              <a:rPr lang="en-US" sz="1100" b="1" dirty="0">
+                <a:solidFill>
+                  <a:srgbClr val="FFFFFF"/>
+                </a:solidFill>
+              </a:rPr>
+              <a:t>3</a:t>
+            </a:r>
+            <a:endParaRPr lang="en-US" sz="1100" dirty="0"/>
+          </a:p>
+        </p:txBody>
+      </p:sp>
+      <p:graphicFrame>
+        <p:nvGraphicFramePr>
+          <p:cNvPr id="10" name="Table 0"/>
+          <p:cNvGraphicFramePr>
+            <a:graphicFrameLocks noGrp="1"/>
+          </p:cNvGraphicFramePr>
+          <p:nvPr>
+            <p:extLst>
+              <p:ext uri="{D42A27DB-BD31-4B8C-83A1-F6EECF244321}">
+                <p14:modId xmlns:p14="http://schemas.microsoft.com/office/powerpoint/2010/main" val="1579011935"/>
+              </p:ext>
+            </p:extLst>
+          </p:nvPr>
+        </p:nvGraphicFramePr>
+        <p:xfrm>
+          <a:off x="685800" y="3794760"/>
+          <a:ext cx="10835640" cy="914400"/>
+        </p:xfrm>
+        <a:graphic>
+          <a:graphicData uri="http://schemas.openxmlformats.org/drawingml/2006/table">
+            <a:tbl>
+              <a:tblPr/>
+              <a:tblGrid>
+                <a:gridCol w="2743200"/>
+                <a:gridCol w="2743200"/>
+                <a:gridCol w="5349240"/>
+              </a:tblGrid>
+              <a:tr h="0">
+                <a:tc>
+                  <a:txBody>
+                    <a:bodyPr/>
+                    <a:lstStyle/>
+                    <a:p>
+                      <a:pPr indent="0" marL="0">
+                        <a:buNone/>
+                      </a:pPr>
+                      <a:r>
+                        <a:rPr lang="en-US" sz="1250" b="1" dirty="0">
+                          <a:solidFill>
+                            <a:srgbClr val="FFFFFF"/>
+                          </a:solidFill>
+                          <a:latin typeface="Calibri" pitchFamily="34" charset="0"/>
+                          <a:ea typeface="Calibri" pitchFamily="34" charset="-122"/>
+                          <a:cs typeface="Calibri" pitchFamily="34" charset="-120"/>
+                        </a:rPr>
+                        <a:t>Tindakan</a:t>
+                      </a:r>
+                      <a:endParaRPr lang="en-US" sz="1250" dirty="0">
+                        <a:latin typeface="Calibri" charset="0"/>
+                        <a:ea typeface="Calibri" charset="0"/>
+                        <a:cs typeface="Calibri" charset="0"/>
+                      </a:endParaRPr>
+                    </a:p>
+                  </a:txBody>
+                  <a:tcPr marL="91440" marR="91440" marT="54864" marB="54864" anchor="ctr">
+                    <a:lnL w="9525" cap="flat" cmpd="sng" algn="ctr">
+                      <a:solidFill>
+                        <a:srgbClr val="D5DEEC"/>
+                      </a:solidFill>
+                      <a:prstDash val="solid"/>
+                      <a:round/>
+                      <a:headEnd type="none" w="med" len="med"/>
+                      <a:tailEnd type="none" w="med" len="med"/>
+                    </a:lnL>
+                    <a:lnR w="9525" cap="flat" cmpd="sng" algn="ctr">
+                      <a:solidFill>
+                        <a:srgbClr val="D5DEEC"/>
+                      </a:solidFill>
+                      <a:prstDash val="solid"/>
+                      <a:round/>
+                      <a:headEnd type="none" w="med" len="med"/>
+                      <a:tailEnd type="none" w="med" len="med"/>
+                    </a:lnR>
+                    <a:lnT w="9525" cap="flat" cmpd="sng" algn="ctr">
+                      <a:solidFill>
+                        <a:srgbClr val="D5DEEC"/>
+                      </a:solidFill>
+                      <a:prstDash val="solid"/>
+                      <a:round/>
+                      <a:headEnd type="none" w="med" len="med"/>
+                      <a:tailEnd type="none" w="med" len="med"/>
+                    </a:lnT>
+                    <a:lnB w="9525" cap="flat" cmpd="sng" algn="ctr">
+                      <a:solidFill>
+                        <a:srgbClr val="D5DEEC"/>
+                      </a:solidFill>
+                      <a:prstDash val="solid"/>
+                      <a:round/>
+                      <a:headEnd type="none" w="med" len="med"/>
+                      <a:tailEnd type="none" w="med" len="med"/>
+                    </a:lnB>
+                    <a:solidFill>
+                      <a:srgbClr val="274289"/>
+                    </a:solidFill>
+                  </a:tcPr>
+                </a:tc>
+                <a:tc>
+                  <a:txBody>
+                    <a:bodyPr/>
+                    <a:lstStyle/>
+                    <a:p>
+                      <a:pPr indent="0" marL="0">
+                        <a:buNone/>
+                      </a:pPr>
+                      <a:r>
+                        <a:rPr lang="en-US" sz="1250" b="1" dirty="0">
+                          <a:solidFill>
+                            <a:srgbClr val="FFFFFF"/>
+                          </a:solidFill>
+                          <a:latin typeface="Calibri" pitchFamily="34" charset="0"/>
+                          <a:ea typeface="Calibri" pitchFamily="34" charset="-122"/>
+                          <a:cs typeface="Calibri" pitchFamily="34" charset="-120"/>
+                        </a:rPr>
+                        <a:t>Cara</a:t>
+                      </a:r>
+                      <a:endParaRPr lang="en-US" sz="1250" dirty="0">
+                        <a:latin typeface="Calibri" charset="0"/>
+                        <a:ea typeface="Calibri" charset="0"/>
+                        <a:cs typeface="Calibri" charset="0"/>
+                      </a:endParaRPr>
+                    </a:p>
+                  </a:txBody>
+                  <a:tcPr marL="91440" marR="91440" marT="54864" marB="54864" anchor="ctr">
+                    <a:lnL w="9525" cap="flat" cmpd="sng" algn="ctr">
+                      <a:solidFill>
+                        <a:srgbClr val="D5DEEC"/>
+                      </a:solidFill>
+                      <a:prstDash val="solid"/>
+                      <a:round/>
+                      <a:headEnd type="none" w="med" len="med"/>
+                      <a:tailEnd type="none" w="med" len="med"/>
+                    </a:lnL>
+                    <a:lnR w="9525" cap="flat" cmpd="sng" algn="ctr">
+                      <a:solidFill>
+                        <a:srgbClr val="D5DEEC"/>
+                      </a:solidFill>
+                      <a:prstDash val="solid"/>
+                      <a:round/>
+                      <a:headEnd type="none" w="med" len="med"/>
+                      <a:tailEnd type="none" w="med" len="med"/>
+                    </a:lnR>
+                    <a:lnT w="9525" cap="flat" cmpd="sng" algn="ctr">
+                      <a:solidFill>
+                        <a:srgbClr val="D5DEEC"/>
+                      </a:solidFill>
+                      <a:prstDash val="solid"/>
+                      <a:round/>
+                      <a:headEnd type="none" w="med" len="med"/>
+                      <a:tailEnd type="none" w="med" len="med"/>
+                    </a:lnT>
+                    <a:lnB w="9525" cap="flat" cmpd="sng" algn="ctr">
+                      <a:solidFill>
+                        <a:srgbClr val="D5DEEC"/>
+                      </a:solidFill>
+                      <a:prstDash val="solid"/>
+                      <a:round/>
+                      <a:headEnd type="none" w="med" len="med"/>
+                      <a:tailEnd type="none" w="med" len="med"/>
+                    </a:lnB>
+                    <a:solidFill>
+                      <a:srgbClr val="274289"/>
+                    </a:solidFill>
+                  </a:tcPr>
+                </a:tc>
+                <a:tc>
+                  <a:txBody>
+                    <a:bodyPr/>
+                    <a:lstStyle/>
+                    <a:p>
+                      <a:pPr indent="0" marL="0">
+                        <a:buNone/>
+                      </a:pPr>
+                      <a:r>
+                        <a:rPr lang="en-US" sz="1250" b="1" dirty="0">
+                          <a:solidFill>
+                            <a:srgbClr val="FFFFFF"/>
+                          </a:solidFill>
+                          <a:latin typeface="Calibri" pitchFamily="34" charset="0"/>
+                          <a:ea typeface="Calibri" pitchFamily="34" charset="-122"/>
+                          <a:cs typeface="Calibri" pitchFamily="34" charset="-120"/>
+                        </a:rPr>
+                        <a:t>Hasil</a:t>
+                      </a:r>
+                      <a:endParaRPr lang="en-US" sz="1250" dirty="0">
+                        <a:latin typeface="Calibri" charset="0"/>
+                        <a:ea typeface="Calibri" charset="0"/>
+                        <a:cs typeface="Calibri" charset="0"/>
+                      </a:endParaRPr>
+                    </a:p>
+                  </a:txBody>
+                  <a:tcPr marL="91440" marR="91440" marT="54864" marB="54864" anchor="ctr">
+                    <a:lnL w="9525" cap="flat" cmpd="sng" algn="ctr">
+                      <a:solidFill>
+                        <a:srgbClr val="D5DEEC"/>
+                      </a:solidFill>
+                      <a:prstDash val="solid"/>
+                      <a:round/>
+                      <a:headEnd type="none" w="med" len="med"/>
+                      <a:tailEnd type="none" w="med" len="med"/>
+                    </a:lnL>
+                    <a:lnR w="9525" cap="flat" cmpd="sng" algn="ctr">
+                      <a:solidFill>
+                        <a:srgbClr val="D5DEEC"/>
+                      </a:solidFill>
+                      <a:prstDash val="solid"/>
+                      <a:round/>
+                      <a:headEnd type="none" w="med" len="med"/>
+                      <a:tailEnd type="none" w="med" len="med"/>
+                    </a:lnR>
+                    <a:lnT w="9525" cap="flat" cmpd="sng" algn="ctr">
+                      <a:solidFill>
+                        <a:srgbClr val="D5DEEC"/>
+                      </a:solidFill>
+                      <a:prstDash val="solid"/>
+                      <a:round/>
+                      <a:headEnd type="none" w="med" len="med"/>
+                      <a:tailEnd type="none" w="med" len="med"/>
+                    </a:lnT>
+                    <a:lnB w="9525" cap="flat" cmpd="sng" algn="ctr">
+                      <a:solidFill>
+                        <a:srgbClr val="D5DEEC"/>
+                      </a:solidFill>
+                      <a:prstDash val="solid"/>
+                      <a:round/>
+                      <a:headEnd type="none" w="med" len="med"/>
+                      <a:tailEnd type="none" w="med" len="med"/>
+                    </a:lnB>
+                    <a:solidFill>
+                      <a:srgbClr val="274289"/>
+                    </a:solidFill>
+                  </a:tcPr>
+                </a:tc>
+              </a:tr>
+              <a:tr h="0">
+                <a:tc>
+                  <a:txBody>
+                    <a:bodyPr/>
+                    <a:lstStyle/>
+                    <a:p>
+                      <a:pPr indent="0" marL="0">
+                        <a:buNone/>
+                      </a:pPr>
+                      <a:r>
+                        <a:rPr lang="en-US" sz="1250" b="1" dirty="0">
+                          <a:solidFill>
+                            <a:srgbClr val="274289"/>
+                          </a:solidFill>
+                          <a:latin typeface="Calibri" pitchFamily="34" charset="0"/>
+                          <a:ea typeface="Calibri" pitchFamily="34" charset="-122"/>
+                          <a:cs typeface="Calibri" pitchFamily="34" charset="-120"/>
+                        </a:rPr>
+                        <a:t>1 Setujui (belum level terakhir)</a:t>
+                      </a:r>
+                      <a:endParaRPr lang="en-US" sz="1250" dirty="0">
+                        <a:latin typeface="Calibri" charset="0"/>
+                        <a:ea typeface="Calibri" charset="0"/>
+                        <a:cs typeface="Calibri" charset="0"/>
+                      </a:endParaRPr>
+                    </a:p>
+                  </a:txBody>
+                  <a:tcPr marL="91440" marR="91440" marT="54864" marB="54864" anchor="ctr">
+                    <a:lnL w="9525" cap="flat" cmpd="sng" algn="ctr">
+                      <a:solidFill>
+                        <a:srgbClr val="D5DEEC"/>
+                      </a:solidFill>
+                      <a:prstDash val="solid"/>
+                      <a:round/>
+                      <a:headEnd type="none" w="med" len="med"/>
+                      <a:tailEnd type="none" w="med" len="med"/>
+                    </a:lnL>
+                    <a:lnR w="9525" cap="flat" cmpd="sng" algn="ctr">
+                      <a:solidFill>
+                        <a:srgbClr val="D5DEEC"/>
+                      </a:solidFill>
+                      <a:prstDash val="solid"/>
+                      <a:round/>
+                      <a:headEnd type="none" w="med" len="med"/>
+                      <a:tailEnd type="none" w="med" len="med"/>
+                    </a:lnR>
+                    <a:lnT w="9525" cap="flat" cmpd="sng" algn="ctr">
+                      <a:solidFill>
+                        <a:srgbClr val="D5DEEC"/>
+                      </a:solidFill>
+                      <a:prstDash val="solid"/>
+                      <a:round/>
+                      <a:headEnd type="none" w="med" len="med"/>
+                      <a:tailEnd type="none" w="med" len="med"/>
+                    </a:lnT>
+                    <a:lnB w="9525" cap="flat" cmpd="sng" algn="ctr">
+                      <a:solidFill>
+                        <a:srgbClr val="D5DEEC"/>
+                      </a:solidFill>
+                      <a:prstDash val="solid"/>
+                      <a:round/>
+                      <a:headEnd type="none" w="med" len="med"/>
+                      <a:tailEnd type="none" w="med" len="med"/>
+                    </a:lnB>
+                    <a:solidFill>
+                      <a:srgbClr val="FFFFFF"/>
+                    </a:solidFill>
+                  </a:tcPr>
+                </a:tc>
+                <a:tc>
+                  <a:txBody>
+                    <a:bodyPr/>
+                    <a:lstStyle/>
+                    <a:p>
+                      <a:pPr indent="0" marL="0">
+                        <a:buNone/>
+                      </a:pPr>
+                      <a:r>
+                        <a:rPr lang="en-US" sz="1250" dirty="0">
+                          <a:solidFill>
+                            <a:srgbClr val="1B2437"/>
+                          </a:solidFill>
+                          <a:latin typeface="Calibri" pitchFamily="34" charset="0"/>
+                          <a:ea typeface="Calibri" pitchFamily="34" charset="-122"/>
+                          <a:cs typeface="Calibri" pitchFamily="34" charset="-120"/>
+                        </a:rPr>
+                        <a:t>Klik Setujui; catatan opsional</a:t>
+                      </a:r>
+                      <a:endParaRPr lang="en-US" sz="1250" dirty="0">
+                        <a:latin typeface="Calibri" charset="0"/>
+                        <a:ea typeface="Calibri" charset="0"/>
+                        <a:cs typeface="Calibri" charset="0"/>
+                      </a:endParaRPr>
+                    </a:p>
+                  </a:txBody>
+                  <a:tcPr marL="91440" marR="91440" marT="54864" marB="54864" anchor="ctr">
+                    <a:lnL w="9525" cap="flat" cmpd="sng" algn="ctr">
+                      <a:solidFill>
+                        <a:srgbClr val="D5DEEC"/>
+                      </a:solidFill>
+                      <a:prstDash val="solid"/>
+                      <a:round/>
+                      <a:headEnd type="none" w="med" len="med"/>
+                      <a:tailEnd type="none" w="med" len="med"/>
+                    </a:lnL>
+                    <a:lnR w="9525" cap="flat" cmpd="sng" algn="ctr">
+                      <a:solidFill>
+                        <a:srgbClr val="D5DEEC"/>
+                      </a:solidFill>
+                      <a:prstDash val="solid"/>
+                      <a:round/>
+                      <a:headEnd type="none" w="med" len="med"/>
+                      <a:tailEnd type="none" w="med" len="med"/>
+                    </a:lnR>
+                    <a:lnT w="9525" cap="flat" cmpd="sng" algn="ctr">
+                      <a:solidFill>
+                        <a:srgbClr val="D5DEEC"/>
+                      </a:solidFill>
+                      <a:prstDash val="solid"/>
+                      <a:round/>
+                      <a:headEnd type="none" w="med" len="med"/>
+                      <a:tailEnd type="none" w="med" len="med"/>
+                    </a:lnT>
+                    <a:lnB w="9525" cap="flat" cmpd="sng" algn="ctr">
+                      <a:solidFill>
+                        <a:srgbClr val="D5DEEC"/>
+                      </a:solidFill>
+                      <a:prstDash val="solid"/>
+                      <a:round/>
+                      <a:headEnd type="none" w="med" len="med"/>
+                      <a:tailEnd type="none" w="med" len="med"/>
+                    </a:lnB>
+                    <a:solidFill>
+                      <a:srgbClr val="FFFFFF"/>
+                    </a:solidFill>
+                  </a:tcPr>
+                </a:tc>
+                <a:tc>
+                  <a:txBody>
+                    <a:bodyPr/>
+                    <a:lstStyle/>
+                    <a:p>
+                      <a:pPr indent="0" marL="0">
+                        <a:buNone/>
+                      </a:pPr>
+                      <a:r>
+                        <a:rPr lang="en-US" sz="1250" dirty="0">
+                          <a:solidFill>
+                            <a:srgbClr val="1B2437"/>
+                          </a:solidFill>
+                          <a:latin typeface="Calibri" pitchFamily="34" charset="0"/>
+                          <a:ea typeface="Calibri" pitchFamily="34" charset="-122"/>
+                          <a:cs typeface="Calibri" pitchFamily="34" charset="-120"/>
+                        </a:rPr>
+                        <a:t>PO naik ke level berikutnya</a:t>
+                      </a:r>
+                      <a:endParaRPr lang="en-US" sz="1250" dirty="0">
+                        <a:latin typeface="Calibri" charset="0"/>
+                        <a:ea typeface="Calibri" charset="0"/>
+                        <a:cs typeface="Calibri" charset="0"/>
+                      </a:endParaRPr>
+                    </a:p>
+                  </a:txBody>
+                  <a:tcPr marL="91440" marR="91440" marT="54864" marB="54864" anchor="ctr">
+                    <a:lnL w="9525" cap="flat" cmpd="sng" algn="ctr">
+                      <a:solidFill>
+                        <a:srgbClr val="D5DEEC"/>
+                      </a:solidFill>
+                      <a:prstDash val="solid"/>
+                      <a:round/>
+                      <a:headEnd type="none" w="med" len="med"/>
+                      <a:tailEnd type="none" w="med" len="med"/>
+                    </a:lnL>
+                    <a:lnR w="9525" cap="flat" cmpd="sng" algn="ctr">
+                      <a:solidFill>
+                        <a:srgbClr val="D5DEEC"/>
+                      </a:solidFill>
+                      <a:prstDash val="solid"/>
+                      <a:round/>
+                      <a:headEnd type="none" w="med" len="med"/>
+                      <a:tailEnd type="none" w="med" len="med"/>
+                    </a:lnR>
+                    <a:lnT w="9525" cap="flat" cmpd="sng" algn="ctr">
+                      <a:solidFill>
+                        <a:srgbClr val="D5DEEC"/>
+                      </a:solidFill>
+                      <a:prstDash val="solid"/>
+                      <a:round/>
+                      <a:headEnd type="none" w="med" len="med"/>
+                      <a:tailEnd type="none" w="med" len="med"/>
+                    </a:lnT>
+                    <a:lnB w="9525" cap="flat" cmpd="sng" algn="ctr">
+                      <a:solidFill>
+                        <a:srgbClr val="D5DEEC"/>
+                      </a:solidFill>
+                      <a:prstDash val="solid"/>
+                      <a:round/>
+                      <a:headEnd type="none" w="med" len="med"/>
+                      <a:tailEnd type="none" w="med" len="med"/>
+                    </a:lnB>
+                    <a:solidFill>
+                      <a:srgbClr val="FFFFFF"/>
+                    </a:solidFill>
+                  </a:tcPr>
+                </a:tc>
+              </a:tr>
+              <a:tr h="0">
+                <a:tc>
+                  <a:txBody>
+                    <a:bodyPr/>
+                    <a:lstStyle/>
+                    <a:p>
+                      <a:pPr indent="0" marL="0">
+                        <a:buNone/>
+                      </a:pPr>
+                      <a:r>
+                        <a:rPr lang="en-US" sz="1250" b="1" dirty="0">
+                          <a:solidFill>
+                            <a:srgbClr val="2E7D4F"/>
+                          </a:solidFill>
+                          <a:latin typeface="Calibri" pitchFamily="34" charset="0"/>
+                          <a:ea typeface="Calibri" pitchFamily="34" charset="-122"/>
+                          <a:cs typeface="Calibri" pitchFamily="34" charset="-120"/>
+                        </a:rPr>
+                        <a:t>1 Setujui (level terakhir)</a:t>
+                      </a:r>
+                      <a:endParaRPr lang="en-US" sz="1250" dirty="0">
+                        <a:latin typeface="Calibri" charset="0"/>
+                        <a:ea typeface="Calibri" charset="0"/>
+                        <a:cs typeface="Calibri" charset="0"/>
+                      </a:endParaRPr>
+                    </a:p>
+                  </a:txBody>
+                  <a:tcPr marL="91440" marR="91440" marT="54864" marB="54864" anchor="ctr">
+                    <a:lnL w="9525" cap="flat" cmpd="sng" algn="ctr">
+                      <a:solidFill>
+                        <a:srgbClr val="D5DEEC"/>
+                      </a:solidFill>
+                      <a:prstDash val="solid"/>
+                      <a:round/>
+                      <a:headEnd type="none" w="med" len="med"/>
+                      <a:tailEnd type="none" w="med" len="med"/>
+                    </a:lnL>
+                    <a:lnR w="9525" cap="flat" cmpd="sng" algn="ctr">
+                      <a:solidFill>
+                        <a:srgbClr val="D5DEEC"/>
+                      </a:solidFill>
+                      <a:prstDash val="solid"/>
+                      <a:round/>
+                      <a:headEnd type="none" w="med" len="med"/>
+                      <a:tailEnd type="none" w="med" len="med"/>
+                    </a:lnR>
+                    <a:lnT w="9525" cap="flat" cmpd="sng" algn="ctr">
+                      <a:solidFill>
+                        <a:srgbClr val="D5DEEC"/>
+                      </a:solidFill>
+                      <a:prstDash val="solid"/>
+                      <a:round/>
+                      <a:headEnd type="none" w="med" len="med"/>
+                      <a:tailEnd type="none" w="med" len="med"/>
+                    </a:lnT>
+                    <a:lnB w="9525" cap="flat" cmpd="sng" algn="ctr">
+                      <a:solidFill>
+                        <a:srgbClr val="D5DEEC"/>
+                      </a:solidFill>
+                      <a:prstDash val="solid"/>
+                      <a:round/>
+                      <a:headEnd type="none" w="med" len="med"/>
+                      <a:tailEnd type="none" w="med" len="med"/>
+                    </a:lnB>
+                    <a:solidFill>
+                      <a:srgbClr val="F6F8FC"/>
+                    </a:solidFill>
+                  </a:tcPr>
+                </a:tc>
+                <a:tc>
+                  <a:txBody>
+                    <a:bodyPr/>
+                    <a:lstStyle/>
+                    <a:p>
+                      <a:pPr indent="0" marL="0">
+                        <a:buNone/>
+                      </a:pPr>
+                      <a:r>
+                        <a:rPr lang="en-US" sz="1250" dirty="0">
+                          <a:solidFill>
+                            <a:srgbClr val="1B2437"/>
+                          </a:solidFill>
+                          <a:latin typeface="Calibri" pitchFamily="34" charset="0"/>
+                          <a:ea typeface="Calibri" pitchFamily="34" charset="-122"/>
+                          <a:cs typeface="Calibri" pitchFamily="34" charset="-120"/>
+                        </a:rPr>
+                        <a:t>Klik Setujui</a:t>
+                      </a:r>
+                      <a:endParaRPr lang="en-US" sz="1250" dirty="0">
+                        <a:latin typeface="Calibri" charset="0"/>
+                        <a:ea typeface="Calibri" charset="0"/>
+                        <a:cs typeface="Calibri" charset="0"/>
+                      </a:endParaRPr>
+                    </a:p>
+                  </a:txBody>
+                  <a:tcPr marL="91440" marR="91440" marT="54864" marB="54864" anchor="ctr">
+                    <a:lnL w="9525" cap="flat" cmpd="sng" algn="ctr">
+                      <a:solidFill>
+                        <a:srgbClr val="D5DEEC"/>
+                      </a:solidFill>
+                      <a:prstDash val="solid"/>
+                      <a:round/>
+                      <a:headEnd type="none" w="med" len="med"/>
+                      <a:tailEnd type="none" w="med" len="med"/>
+                    </a:lnL>
+                    <a:lnR w="9525" cap="flat" cmpd="sng" algn="ctr">
+                      <a:solidFill>
+                        <a:srgbClr val="D5DEEC"/>
+                      </a:solidFill>
+                      <a:prstDash val="solid"/>
+                      <a:round/>
+                      <a:headEnd type="none" w="med" len="med"/>
+                      <a:tailEnd type="none" w="med" len="med"/>
+                    </a:lnR>
+                    <a:lnT w="9525" cap="flat" cmpd="sng" algn="ctr">
+                      <a:solidFill>
+                        <a:srgbClr val="D5DEEC"/>
+                      </a:solidFill>
+                      <a:prstDash val="solid"/>
+                      <a:round/>
+                      <a:headEnd type="none" w="med" len="med"/>
+                      <a:tailEnd type="none" w="med" len="med"/>
+                    </a:lnT>
+                    <a:lnB w="9525" cap="flat" cmpd="sng" algn="ctr">
+                      <a:solidFill>
+                        <a:srgbClr val="D5DEEC"/>
+                      </a:solidFill>
+                      <a:prstDash val="solid"/>
+                      <a:round/>
+                      <a:headEnd type="none" w="med" len="med"/>
+                      <a:tailEnd type="none" w="med" len="med"/>
+                    </a:lnB>
+                    <a:solidFill>
+                      <a:srgbClr val="F6F8FC"/>
+                    </a:solidFill>
+                  </a:tcPr>
+                </a:tc>
+                <a:tc>
+                  <a:txBody>
+                    <a:bodyPr/>
+                    <a:lstStyle/>
+                    <a:p>
+                      <a:pPr indent="0" marL="0">
+                        <a:buNone/>
+                      </a:pPr>
+                      <a:r>
+                        <a:rPr lang="en-US" sz="1250" dirty="0">
+                          <a:solidFill>
+                            <a:srgbClr val="1B2437"/>
+                          </a:solidFill>
+                          <a:latin typeface="Calibri" pitchFamily="34" charset="0"/>
+                          <a:ea typeface="Calibri" pitchFamily="34" charset="-122"/>
+                          <a:cs typeface="Calibri" pitchFamily="34" charset="-120"/>
+                        </a:rPr>
+                        <a:t>Draft SAP dipromosikan menjadi PO final; nomor PO SAP tampil di kartu</a:t>
+                      </a:r>
+                      <a:endParaRPr lang="en-US" sz="1250" dirty="0">
+                        <a:latin typeface="Calibri" charset="0"/>
+                        <a:ea typeface="Calibri" charset="0"/>
+                        <a:cs typeface="Calibri" charset="0"/>
+                      </a:endParaRPr>
+                    </a:p>
+                  </a:txBody>
+                  <a:tcPr marL="91440" marR="91440" marT="54864" marB="54864" anchor="ctr">
+                    <a:lnL w="9525" cap="flat" cmpd="sng" algn="ctr">
+                      <a:solidFill>
+                        <a:srgbClr val="D5DEEC"/>
+                      </a:solidFill>
+                      <a:prstDash val="solid"/>
+                      <a:round/>
+                      <a:headEnd type="none" w="med" len="med"/>
+                      <a:tailEnd type="none" w="med" len="med"/>
+                    </a:lnL>
+                    <a:lnR w="9525" cap="flat" cmpd="sng" algn="ctr">
+                      <a:solidFill>
+                        <a:srgbClr val="D5DEEC"/>
+                      </a:solidFill>
+                      <a:prstDash val="solid"/>
+                      <a:round/>
+                      <a:headEnd type="none" w="med" len="med"/>
+                      <a:tailEnd type="none" w="med" len="med"/>
+                    </a:lnR>
+                    <a:lnT w="9525" cap="flat" cmpd="sng" algn="ctr">
+                      <a:solidFill>
+                        <a:srgbClr val="D5DEEC"/>
+                      </a:solidFill>
+                      <a:prstDash val="solid"/>
+                      <a:round/>
+                      <a:headEnd type="none" w="med" len="med"/>
+                      <a:tailEnd type="none" w="med" len="med"/>
+                    </a:lnT>
+                    <a:lnB w="9525" cap="flat" cmpd="sng" algn="ctr">
+                      <a:solidFill>
+                        <a:srgbClr val="D5DEEC"/>
+                      </a:solidFill>
+                      <a:prstDash val="solid"/>
+                      <a:round/>
+                      <a:headEnd type="none" w="med" len="med"/>
+                      <a:tailEnd type="none" w="med" len="med"/>
+                    </a:lnB>
+                    <a:solidFill>
+                      <a:srgbClr val="F6F8FC"/>
+                    </a:solidFill>
+                  </a:tcPr>
+                </a:tc>
+              </a:tr>
+              <a:tr h="0">
+                <a:tc>
+                  <a:txBody>
+                    <a:bodyPr/>
+                    <a:lstStyle/>
+                    <a:p>
+                      <a:pPr indent="0" marL="0">
+                        <a:buNone/>
+                      </a:pPr>
+                      <a:r>
+                        <a:rPr lang="en-US" sz="1250" b="1" dirty="0">
+                          <a:solidFill>
+                            <a:srgbClr val="C0392B"/>
+                          </a:solidFill>
+                          <a:latin typeface="Calibri" pitchFamily="34" charset="0"/>
+                          <a:ea typeface="Calibri" pitchFamily="34" charset="-122"/>
+                          <a:cs typeface="Calibri" pitchFamily="34" charset="-120"/>
+                        </a:rPr>
+                        <a:t>2 + 3 Tolak</a:t>
+                      </a:r>
+                      <a:endParaRPr lang="en-US" sz="1250" dirty="0">
+                        <a:latin typeface="Calibri" charset="0"/>
+                        <a:ea typeface="Calibri" charset="0"/>
+                        <a:cs typeface="Calibri" charset="0"/>
+                      </a:endParaRPr>
+                    </a:p>
+                  </a:txBody>
+                  <a:tcPr marL="91440" marR="91440" marT="54864" marB="54864" anchor="ctr">
+                    <a:lnL w="9525" cap="flat" cmpd="sng" algn="ctr">
+                      <a:solidFill>
+                        <a:srgbClr val="D5DEEC"/>
+                      </a:solidFill>
+                      <a:prstDash val="solid"/>
+                      <a:round/>
+                      <a:headEnd type="none" w="med" len="med"/>
+                      <a:tailEnd type="none" w="med" len="med"/>
+                    </a:lnL>
+                    <a:lnR w="9525" cap="flat" cmpd="sng" algn="ctr">
+                      <a:solidFill>
+                        <a:srgbClr val="D5DEEC"/>
+                      </a:solidFill>
+                      <a:prstDash val="solid"/>
+                      <a:round/>
+                      <a:headEnd type="none" w="med" len="med"/>
+                      <a:tailEnd type="none" w="med" len="med"/>
+                    </a:lnR>
+                    <a:lnT w="9525" cap="flat" cmpd="sng" algn="ctr">
+                      <a:solidFill>
+                        <a:srgbClr val="D5DEEC"/>
+                      </a:solidFill>
+                      <a:prstDash val="solid"/>
+                      <a:round/>
+                      <a:headEnd type="none" w="med" len="med"/>
+                      <a:tailEnd type="none" w="med" len="med"/>
+                    </a:lnT>
+                    <a:lnB w="9525" cap="flat" cmpd="sng" algn="ctr">
+                      <a:solidFill>
+                        <a:srgbClr val="D5DEEC"/>
+                      </a:solidFill>
+                      <a:prstDash val="solid"/>
+                      <a:round/>
+                      <a:headEnd type="none" w="med" len="med"/>
+                      <a:tailEnd type="none" w="med" len="med"/>
+                    </a:lnB>
+                    <a:solidFill>
+                      <a:srgbClr val="FFFFFF"/>
+                    </a:solidFill>
+                  </a:tcPr>
+                </a:tc>
+                <a:tc>
+                  <a:txBody>
+                    <a:bodyPr/>
+                    <a:lstStyle/>
+                    <a:p>
+                      <a:pPr indent="0" marL="0">
+                        <a:buNone/>
+                      </a:pPr>
+                      <a:r>
+                        <a:rPr lang="en-US" sz="1250" dirty="0">
+                          <a:solidFill>
+                            <a:srgbClr val="1B2437"/>
+                          </a:solidFill>
+                          <a:latin typeface="Calibri" pitchFamily="34" charset="0"/>
+                          <a:ea typeface="Calibri" pitchFamily="34" charset="-122"/>
+                          <a:cs typeface="Calibri" pitchFamily="34" charset="-120"/>
+                        </a:rPr>
+                        <a:t>Isi Catatan (wajib), klik Tolak</a:t>
+                      </a:r>
+                      <a:endParaRPr lang="en-US" sz="1250" dirty="0">
+                        <a:latin typeface="Calibri" charset="0"/>
+                        <a:ea typeface="Calibri" charset="0"/>
+                        <a:cs typeface="Calibri" charset="0"/>
+                      </a:endParaRPr>
+                    </a:p>
+                  </a:txBody>
+                  <a:tcPr marL="91440" marR="91440" marT="54864" marB="54864" anchor="ctr">
+                    <a:lnL w="9525" cap="flat" cmpd="sng" algn="ctr">
+                      <a:solidFill>
+                        <a:srgbClr val="D5DEEC"/>
+                      </a:solidFill>
+                      <a:prstDash val="solid"/>
+                      <a:round/>
+                      <a:headEnd type="none" w="med" len="med"/>
+                      <a:tailEnd type="none" w="med" len="med"/>
+                    </a:lnL>
+                    <a:lnR w="9525" cap="flat" cmpd="sng" algn="ctr">
+                      <a:solidFill>
+                        <a:srgbClr val="D5DEEC"/>
+                      </a:solidFill>
+                      <a:prstDash val="solid"/>
+                      <a:round/>
+                      <a:headEnd type="none" w="med" len="med"/>
+                      <a:tailEnd type="none" w="med" len="med"/>
+                    </a:lnR>
+                    <a:lnT w="9525" cap="flat" cmpd="sng" algn="ctr">
+                      <a:solidFill>
+                        <a:srgbClr val="D5DEEC"/>
+                      </a:solidFill>
+                      <a:prstDash val="solid"/>
+                      <a:round/>
+                      <a:headEnd type="none" w="med" len="med"/>
+                      <a:tailEnd type="none" w="med" len="med"/>
+                    </a:lnT>
+                    <a:lnB w="9525" cap="flat" cmpd="sng" algn="ctr">
+                      <a:solidFill>
+                        <a:srgbClr val="D5DEEC"/>
+                      </a:solidFill>
+                      <a:prstDash val="solid"/>
+                      <a:round/>
+                      <a:headEnd type="none" w="med" len="med"/>
+                      <a:tailEnd type="none" w="med" len="med"/>
+                    </a:lnB>
+                    <a:solidFill>
+                      <a:srgbClr val="FFFFFF"/>
+                    </a:solidFill>
+                  </a:tcPr>
+                </a:tc>
+                <a:tc>
+                  <a:txBody>
+                    <a:bodyPr/>
+                    <a:lstStyle/>
+                    <a:p>
+                      <a:pPr indent="0" marL="0">
+                        <a:buNone/>
+                      </a:pPr>
+                      <a:r>
+                        <a:rPr lang="en-US" sz="1250" dirty="0">
+                          <a:solidFill>
+                            <a:srgbClr val="1B2437"/>
+                          </a:solidFill>
+                          <a:latin typeface="Calibri" pitchFamily="34" charset="0"/>
+                          <a:ea typeface="Calibri" pitchFamily="34" charset="-122"/>
+                          <a:cs typeface="Calibri" pitchFamily="34" charset="-120"/>
+                        </a:rPr>
+                        <a:t>Draft SAP dihapus, status Ditolak, qty kembali menjadi sisa; alasan tampil untuk admin purchase</a:t>
+                      </a:r>
+                      <a:endParaRPr lang="en-US" sz="1250" dirty="0">
+                        <a:latin typeface="Calibri" charset="0"/>
+                        <a:ea typeface="Calibri" charset="0"/>
+                        <a:cs typeface="Calibri" charset="0"/>
+                      </a:endParaRPr>
+                    </a:p>
+                  </a:txBody>
+                  <a:tcPr marL="91440" marR="91440" marT="54864" marB="54864" anchor="ctr">
+                    <a:lnL w="9525" cap="flat" cmpd="sng" algn="ctr">
+                      <a:solidFill>
+                        <a:srgbClr val="D5DEEC"/>
+                      </a:solidFill>
+                      <a:prstDash val="solid"/>
+                      <a:round/>
+                      <a:headEnd type="none" w="med" len="med"/>
+                      <a:tailEnd type="none" w="med" len="med"/>
+                    </a:lnL>
+                    <a:lnR w="9525" cap="flat" cmpd="sng" algn="ctr">
+                      <a:solidFill>
+                        <a:srgbClr val="D5DEEC"/>
+                      </a:solidFill>
+                      <a:prstDash val="solid"/>
+                      <a:round/>
+                      <a:headEnd type="none" w="med" len="med"/>
+                      <a:tailEnd type="none" w="med" len="med"/>
+                    </a:lnR>
+                    <a:lnT w="9525" cap="flat" cmpd="sng" algn="ctr">
+                      <a:solidFill>
+                        <a:srgbClr val="D5DEEC"/>
+                      </a:solidFill>
+                      <a:prstDash val="solid"/>
+                      <a:round/>
+                      <a:headEnd type="none" w="med" len="med"/>
+                      <a:tailEnd type="none" w="med" len="med"/>
+                    </a:lnT>
+                    <a:lnB w="9525" cap="flat" cmpd="sng" algn="ctr">
+                      <a:solidFill>
+                        <a:srgbClr val="D5DEEC"/>
+                      </a:solidFill>
+                      <a:prstDash val="solid"/>
+                      <a:round/>
+                      <a:headEnd type="none" w="med" len="med"/>
+                      <a:tailEnd type="none" w="med" len="med"/>
+                    </a:lnB>
+                    <a:solidFill>
+                      <a:srgbClr val="FFFFFF"/>
+                    </a:solidFill>
+                  </a:tcPr>
+                </a:tc>
+              </a:tr>
+            </a:tbl>
+          </a:graphicData>
+        </a:graphic>
+      </p:graphicFrame>
+      <p:sp>
+        <p:nvSpPr>
+          <p:cNvPr id="15" name="Text 11"/>
+          <p:cNvSpPr txBox="1"/>
+          <p:nvPr/>
+        </p:nvSpPr>
+        <p:spPr>
+          <a:xfrm>
+            <a:off x="1600200" y="5669280"/>
+            <a:ext cx="9921240" cy="457200"/>
+          </a:xfrm>
+          <a:prstGeom prst="rect">
+            <a:avLst/>
+          </a:prstGeom>
+          <a:noFill/>
+          <a:ln/>
+        </p:spPr>
+        <p:txBody>
+          <a:bodyPr wrap="square" lIns="0" tIns="0" rIns="0" bIns="0" rtlCol="0" anchor="t"/>
+          <a:lstStyle/>
+          <a:p>
+            <a:pPr indent="0" marL="0">
+              <a:buNone/>
+            </a:pPr>
+            <a:r>
+              <a:rPr lang="en-US" sz="1250" b="1" dirty="0">
+                <a:solidFill>
+                  <a:srgbClr val="274289"/>
+                </a:solidFill>
+              </a:rPr>
+              <a:t>Bila pembuatan PO di SAP gagal: </a:t>
+            </a:r>
+            <a:pPr indent="0" marL="0">
+              <a:buNone/>
+            </a:pPr>
+            <a:r>
+              <a:rPr lang="en-US" sz="1250" dirty="0">
+                <a:solidFill>
+                  <a:srgbClr val="1B2437"/>
+                </a:solidFill>
+              </a:rPr>
+              <a:t>status kartu menjadi Gagal kirim ke SAP. Setelah penyebabnya diatasi (mis. koneksi SAP pulih), klik Setujui lagi; PO tidak terbuat dobel.</a:t>
+            </a:r>
+            <a:endParaRPr lang="en-US" sz="1250" dirty="0"/>
           </a:p>
         </p:txBody>
       </p:sp>
